--- a/templates/files/ms_office/Project_Status_Report_EN.pptx
+++ b/templates/files/ms_office/Project_Status_Report_EN.pptx
@@ -1,31 +1,126 @@
 
 <file path=ppt/presentation.xml><?xml version="1.0" encoding="utf-8"?>
-<p:presentation xmlns:p="http://schemas.openxmlformats.org/presentationml/2006/main">
+<p:presentation xmlns:a="http://schemas.openxmlformats.org/drawingml/2006/main" xmlns:r="http://schemas.openxmlformats.org/officeDocument/2006/relationships" xmlns:p="http://schemas.openxmlformats.org/presentationml/2006/main">
   <p:sldMasterIdLst>
-    <p:sldMasterId xmlns:r="http://schemas.openxmlformats.org/officeDocument/2006/relationships" id="2147483648" r:id="R4a220e119756442c"/>
+    <p:sldMasterId id="2147483648" r:id="rId1"/>
   </p:sldMasterIdLst>
   <p:notesMasterIdLst>
-    <p:notesMasterId xmlns:r="http://schemas.openxmlformats.org/officeDocument/2006/relationships" r:id="R47c673c21ae14c71"/>
+    <p:notesMasterId r:id="rId8"/>
   </p:notesMasterIdLst>
   <p:sldIdLst>
-    <p:sldId xmlns:r="http://schemas.openxmlformats.org/officeDocument/2006/relationships" id="256" r:id="R1f938da7bd514872"/>
-    <p:sldId xmlns:r="http://schemas.openxmlformats.org/officeDocument/2006/relationships" id="257" r:id="R683c0b3392ff4c54"/>
-    <p:sldId xmlns:r="http://schemas.openxmlformats.org/officeDocument/2006/relationships" id="258" r:id="R34197c043f574197"/>
-    <p:sldId xmlns:r="http://schemas.openxmlformats.org/officeDocument/2006/relationships" id="259" r:id="R13a0d6bb7d88431f"/>
-    <p:sldId xmlns:r="http://schemas.openxmlformats.org/officeDocument/2006/relationships" id="260" r:id="Rd8df2c52cb4d4d6c"/>
-    <p:sldId xmlns:r="http://schemas.openxmlformats.org/officeDocument/2006/relationships" id="261" r:id="Rbc1eb5937fc14065"/>
+    <p:sldId id="256" r:id="rId2"/>
+    <p:sldId id="257" r:id="rId3"/>
+    <p:sldId id="258" r:id="rId4"/>
+    <p:sldId id="259" r:id="rId5"/>
+    <p:sldId id="260" r:id="rId6"/>
+    <p:sldId id="261" r:id="rId7"/>
   </p:sldIdLst>
   <p:sldSz cx="12192000" cy="6858000"/>
   <p:notesSz cx="6858000" cy="9144000"/>
+  <p:defaultTextStyle>
+    <a:defPPr>
+      <a:defRPr lang="sk-SK"/>
+    </a:defPPr>
+    <a:lvl1pPr marL="0" algn="l" defTabSz="914400" rtl="0" eaLnBrk="1" latinLnBrk="0" hangingPunct="1">
+      <a:defRPr sz="1800" kern="1200">
+        <a:solidFill>
+          <a:schemeClr val="tx1"/>
+        </a:solidFill>
+        <a:latin typeface="+mn-lt"/>
+        <a:ea typeface="+mn-ea"/>
+        <a:cs typeface="+mn-cs"/>
+      </a:defRPr>
+    </a:lvl1pPr>
+    <a:lvl2pPr marL="457200" algn="l" defTabSz="914400" rtl="0" eaLnBrk="1" latinLnBrk="0" hangingPunct="1">
+      <a:defRPr sz="1800" kern="1200">
+        <a:solidFill>
+          <a:schemeClr val="tx1"/>
+        </a:solidFill>
+        <a:latin typeface="+mn-lt"/>
+        <a:ea typeface="+mn-ea"/>
+        <a:cs typeface="+mn-cs"/>
+      </a:defRPr>
+    </a:lvl2pPr>
+    <a:lvl3pPr marL="914400" algn="l" defTabSz="914400" rtl="0" eaLnBrk="1" latinLnBrk="0" hangingPunct="1">
+      <a:defRPr sz="1800" kern="1200">
+        <a:solidFill>
+          <a:schemeClr val="tx1"/>
+        </a:solidFill>
+        <a:latin typeface="+mn-lt"/>
+        <a:ea typeface="+mn-ea"/>
+        <a:cs typeface="+mn-cs"/>
+      </a:defRPr>
+    </a:lvl3pPr>
+    <a:lvl4pPr marL="1371600" algn="l" defTabSz="914400" rtl="0" eaLnBrk="1" latinLnBrk="0" hangingPunct="1">
+      <a:defRPr sz="1800" kern="1200">
+        <a:solidFill>
+          <a:schemeClr val="tx1"/>
+        </a:solidFill>
+        <a:latin typeface="+mn-lt"/>
+        <a:ea typeface="+mn-ea"/>
+        <a:cs typeface="+mn-cs"/>
+      </a:defRPr>
+    </a:lvl4pPr>
+    <a:lvl5pPr marL="1828800" algn="l" defTabSz="914400" rtl="0" eaLnBrk="1" latinLnBrk="0" hangingPunct="1">
+      <a:defRPr sz="1800" kern="1200">
+        <a:solidFill>
+          <a:schemeClr val="tx1"/>
+        </a:solidFill>
+        <a:latin typeface="+mn-lt"/>
+        <a:ea typeface="+mn-ea"/>
+        <a:cs typeface="+mn-cs"/>
+      </a:defRPr>
+    </a:lvl5pPr>
+    <a:lvl6pPr marL="2286000" algn="l" defTabSz="914400" rtl="0" eaLnBrk="1" latinLnBrk="0" hangingPunct="1">
+      <a:defRPr sz="1800" kern="1200">
+        <a:solidFill>
+          <a:schemeClr val="tx1"/>
+        </a:solidFill>
+        <a:latin typeface="+mn-lt"/>
+        <a:ea typeface="+mn-ea"/>
+        <a:cs typeface="+mn-cs"/>
+      </a:defRPr>
+    </a:lvl6pPr>
+    <a:lvl7pPr marL="2743200" algn="l" defTabSz="914400" rtl="0" eaLnBrk="1" latinLnBrk="0" hangingPunct="1">
+      <a:defRPr sz="1800" kern="1200">
+        <a:solidFill>
+          <a:schemeClr val="tx1"/>
+        </a:solidFill>
+        <a:latin typeface="+mn-lt"/>
+        <a:ea typeface="+mn-ea"/>
+        <a:cs typeface="+mn-cs"/>
+      </a:defRPr>
+    </a:lvl7pPr>
+    <a:lvl8pPr marL="3200400" algn="l" defTabSz="914400" rtl="0" eaLnBrk="1" latinLnBrk="0" hangingPunct="1">
+      <a:defRPr sz="1800" kern="1200">
+        <a:solidFill>
+          <a:schemeClr val="tx1"/>
+        </a:solidFill>
+        <a:latin typeface="+mn-lt"/>
+        <a:ea typeface="+mn-ea"/>
+        <a:cs typeface="+mn-cs"/>
+      </a:defRPr>
+    </a:lvl8pPr>
+    <a:lvl9pPr marL="3657600" algn="l" defTabSz="914400" rtl="0" eaLnBrk="1" latinLnBrk="0" hangingPunct="1">
+      <a:defRPr sz="1800" kern="1200">
+        <a:solidFill>
+          <a:schemeClr val="tx1"/>
+        </a:solidFill>
+        <a:latin typeface="+mn-lt"/>
+        <a:ea typeface="+mn-ea"/>
+        <a:cs typeface="+mn-cs"/>
+      </a:defRPr>
+    </a:lvl9pPr>
+  </p:defaultTextStyle>
 </p:presentation>
 </file>
 
 <file path=ppt/notesMasters/notesMaster1.xml><?xml version="1.0" encoding="utf-8"?>
-<p:notesMaster xmlns:p="http://schemas.openxmlformats.org/presentationml/2006/main">
+<p:notesMaster xmlns:a="http://schemas.openxmlformats.org/drawingml/2006/main" xmlns:r="http://schemas.openxmlformats.org/officeDocument/2006/relationships" xmlns:p="http://schemas.openxmlformats.org/presentationml/2006/main">
   <p:cSld>
     <p:bg>
       <p:bgRef idx="1001">
-        <a:schemeClr xmlns:a="http://schemas.openxmlformats.org/drawingml/2006/main" val="bg1"/>
+        <a:schemeClr val="bg1"/>
       </p:bgRef>
     </p:bg>
     <p:spTree>
@@ -35,380 +130,164 @@
         <p:nvPr/>
       </p:nvGrpSpPr>
       <p:grpSpPr>
-        <a:xfrm xmlns:a="http://schemas.openxmlformats.org/drawingml/2006/main"/>
+        <a:xfrm>
+          <a:off x="0" y="0"/>
+          <a:ext cx="0" cy="0"/>
+          <a:chOff x="0" y="0"/>
+          <a:chExt cx="0" cy="0"/>
+        </a:xfrm>
       </p:grpSpPr>
       <p:sp>
         <p:nvSpPr>
           <p:cNvPr id="2" name="Header Placeholder"/>
-          <p:cNvSpPr/>
+          <p:cNvSpPr>
+            <a:spLocks noGrp="1"/>
+          </p:cNvSpPr>
           <p:nvPr>
             <p:ph type="hdr" sz="quarter"/>
           </p:nvPr>
         </p:nvSpPr>
         <p:spPr>
-          <a:prstGeom xmlns:a="http://schemas.openxmlformats.org/drawingml/2006/main" prst="rect">
-            <a:avLst/>
-          </a:prstGeom>
-        </p:spPr>
-        <p:txBody>
-          <a:bodyPr xmlns:a="http://schemas.openxmlformats.org/drawingml/2006/main"/>
-          <a:lstStyle xmlns:a="http://schemas.openxmlformats.org/drawingml/2006/main"/>
-          <a:p xmlns:a="http://schemas.openxmlformats.org/drawingml/2006/main"/>
+          <a:prstGeom prst="rect">
+            <a:avLst/>
+          </a:prstGeom>
+        </p:spPr>
+        <p:txBody>
+          <a:bodyPr/>
+          <a:lstStyle/>
+          <a:p>
+            <a:endParaRPr/>
+          </a:p>
         </p:txBody>
       </p:sp>
       <p:sp>
         <p:nvSpPr>
           <p:cNvPr id="3" name="Date Placeholder"/>
-          <p:cNvSpPr/>
+          <p:cNvSpPr>
+            <a:spLocks noGrp="1"/>
+          </p:cNvSpPr>
           <p:nvPr>
             <p:ph type="dt" sz="quarter" idx="1"/>
           </p:nvPr>
         </p:nvSpPr>
         <p:spPr>
-          <a:prstGeom xmlns:a="http://schemas.openxmlformats.org/drawingml/2006/main" prst="rect">
-            <a:avLst/>
-          </a:prstGeom>
-        </p:spPr>
-        <p:txBody>
-          <a:bodyPr xmlns:a="http://schemas.openxmlformats.org/drawingml/2006/main"/>
-          <a:lstStyle xmlns:a="http://schemas.openxmlformats.org/drawingml/2006/main"/>
-          <a:p xmlns:a="http://schemas.openxmlformats.org/drawingml/2006/main"/>
+          <a:prstGeom prst="rect">
+            <a:avLst/>
+          </a:prstGeom>
+        </p:spPr>
+        <p:txBody>
+          <a:bodyPr/>
+          <a:lstStyle/>
+          <a:p>
+            <a:endParaRPr/>
+          </a:p>
         </p:txBody>
       </p:sp>
       <p:sp>
         <p:nvSpPr>
           <p:cNvPr id="4" name="Slide Image Placeholder"/>
-          <p:cNvSpPr/>
+          <p:cNvSpPr>
+            <a:spLocks noGrp="1" noRot="1" noChangeAspect="1"/>
+          </p:cNvSpPr>
           <p:nvPr>
             <p:ph type="sldImg" idx="2"/>
           </p:nvPr>
         </p:nvSpPr>
         <p:spPr>
-          <a:prstGeom xmlns:a="http://schemas.openxmlformats.org/drawingml/2006/main" prst="rect">
-            <a:avLst/>
-          </a:prstGeom>
-        </p:spPr>
-        <p:txBody>
-          <a:bodyPr xmlns:a="http://schemas.openxmlformats.org/drawingml/2006/main"/>
-          <a:lstStyle xmlns:a="http://schemas.openxmlformats.org/drawingml/2006/main"/>
-          <a:p xmlns:a="http://schemas.openxmlformats.org/drawingml/2006/main"/>
+          <a:prstGeom prst="rect">
+            <a:avLst/>
+          </a:prstGeom>
+        </p:spPr>
+        <p:txBody>
+          <a:bodyPr/>
+          <a:lstStyle/>
+          <a:p>
+            <a:endParaRPr/>
+          </a:p>
         </p:txBody>
       </p:sp>
       <p:sp>
         <p:nvSpPr>
           <p:cNvPr id="5" name="Notes Placeholder"/>
-          <p:cNvSpPr/>
+          <p:cNvSpPr>
+            <a:spLocks noGrp="1"/>
+          </p:cNvSpPr>
           <p:nvPr>
             <p:ph type="body" sz="quarter" idx="3"/>
           </p:nvPr>
         </p:nvSpPr>
         <p:spPr>
-          <a:prstGeom xmlns:a="http://schemas.openxmlformats.org/drawingml/2006/main" prst="rect">
-            <a:avLst/>
-          </a:prstGeom>
-        </p:spPr>
-        <p:txBody>
-          <a:bodyPr xmlns:a="http://schemas.openxmlformats.org/drawingml/2006/main"/>
-          <a:lstStyle xmlns:a="http://schemas.openxmlformats.org/drawingml/2006/main"/>
-          <a:p xmlns:a="http://schemas.openxmlformats.org/drawingml/2006/main"/>
+          <a:prstGeom prst="rect">
+            <a:avLst/>
+          </a:prstGeom>
+        </p:spPr>
+        <p:txBody>
+          <a:bodyPr/>
+          <a:lstStyle/>
+          <a:p>
+            <a:endParaRPr/>
+          </a:p>
         </p:txBody>
       </p:sp>
       <p:sp>
         <p:nvSpPr>
           <p:cNvPr id="6" name="Footer Placeholder"/>
-          <p:cNvSpPr/>
+          <p:cNvSpPr>
+            <a:spLocks noGrp="1"/>
+          </p:cNvSpPr>
           <p:nvPr>
             <p:ph type="ftr" sz="quarter" idx="4"/>
           </p:nvPr>
         </p:nvSpPr>
         <p:spPr>
-          <a:prstGeom xmlns:a="http://schemas.openxmlformats.org/drawingml/2006/main" prst="rect">
-            <a:avLst/>
-          </a:prstGeom>
-        </p:spPr>
-        <p:txBody>
-          <a:bodyPr xmlns:a="http://schemas.openxmlformats.org/drawingml/2006/main"/>
-          <a:lstStyle xmlns:a="http://schemas.openxmlformats.org/drawingml/2006/main"/>
-          <a:p xmlns:a="http://schemas.openxmlformats.org/drawingml/2006/main"/>
+          <a:prstGeom prst="rect">
+            <a:avLst/>
+          </a:prstGeom>
+        </p:spPr>
+        <p:txBody>
+          <a:bodyPr/>
+          <a:lstStyle/>
+          <a:p>
+            <a:endParaRPr/>
+          </a:p>
         </p:txBody>
       </p:sp>
       <p:sp>
         <p:nvSpPr>
           <p:cNvPr id="7" name="Slide Number Placeholder"/>
-          <p:cNvSpPr/>
+          <p:cNvSpPr>
+            <a:spLocks noGrp="1"/>
+          </p:cNvSpPr>
           <p:nvPr>
             <p:ph type="sldNum" sz="quarter" idx="5"/>
           </p:nvPr>
         </p:nvSpPr>
         <p:spPr>
-          <a:prstGeom xmlns:a="http://schemas.openxmlformats.org/drawingml/2006/main" prst="rect">
-            <a:avLst/>
-          </a:prstGeom>
-        </p:spPr>
-        <p:txBody>
-          <a:bodyPr xmlns:a="http://schemas.openxmlformats.org/drawingml/2006/main"/>
-          <a:lstStyle xmlns:a="http://schemas.openxmlformats.org/drawingml/2006/main"/>
-          <a:p xmlns:a="http://schemas.openxmlformats.org/drawingml/2006/main"/>
+          <a:prstGeom prst="rect">
+            <a:avLst/>
+          </a:prstGeom>
+        </p:spPr>
+        <p:txBody>
+          <a:bodyPr/>
+          <a:lstStyle/>
+          <a:p>
+            <a:endParaRPr/>
+          </a:p>
         </p:txBody>
       </p:sp>
     </p:spTree>
   </p:cSld>
   <p:clrMap bg1="lt1" tx1="dk1" bg2="lt2" tx2="dk2" accent1="accent1" accent2="accent2" accent3="accent3" accent4="accent4" accent5="accent5" accent6="accent6" hlink="hlink" folHlink="folHlink"/>
   <p:notesStyle>
-    <a:lvl1pPr xmlns:a="http://schemas.openxmlformats.org/drawingml/2006/main" marL="0" algn="l" defTabSz="914400" rtl="0" eaLnBrk="1" latinLnBrk="0" hangingPunct="1">
+    <a:lvl1pPr marL="0" algn="l" defTabSz="914400" rtl="0" eaLnBrk="1" latinLnBrk="0" hangingPunct="1">
       <a:defRPr sz="1200" kern="1200"/>
     </a:lvl1pPr>
   </p:notesStyle>
 </p:notesMaster>
 </file>
 
-<file path=ppt/notesMasters/theme/theme3.xml><?xml version="1.0" encoding="utf-8"?>
-<a:theme xmlns:a="http://schemas.openxmlformats.org/drawingml/2006/main" name="ChatGPT">
-  <a:themeElements>
-    <a:clrScheme name="ChatGPT">
-      <a:dk1>
-        <a:srgbClr val="000000"/>
-      </a:dk1>
-      <a:lt1>
-        <a:srgbClr val="FFFFFF"/>
-      </a:lt1>
-      <a:dk2>
-        <a:srgbClr val="0E2841"/>
-      </a:dk2>
-      <a:lt2>
-        <a:srgbClr val="E8E8E8"/>
-      </a:lt2>
-      <a:accent1>
-        <a:srgbClr val="156082"/>
-      </a:accent1>
-      <a:accent2>
-        <a:srgbClr val="E97132"/>
-      </a:accent2>
-      <a:accent3>
-        <a:srgbClr val="196B24"/>
-      </a:accent3>
-      <a:accent4>
-        <a:srgbClr val="0F9ED5"/>
-      </a:accent4>
-      <a:accent5>
-        <a:srgbClr val="A02B93"/>
-      </a:accent5>
-      <a:accent6>
-        <a:srgbClr val="4EA72E"/>
-      </a:accent6>
-      <a:hlink>
-        <a:srgbClr val="467886"/>
-      </a:hlink>
-      <a:folHlink>
-        <a:srgbClr val="96607D"/>
-      </a:folHlink>
-    </a:clrScheme>
-    <a:fontScheme name="Office">
-      <a:majorFont>
-        <a:latin typeface="Calibri Light"/>
-        <a:ea typeface="Calibri Light"/>
-        <a:cs typeface="Calibri Light"/>
-      </a:majorFont>
-      <a:minorFont>
-        <a:latin typeface="Calibri"/>
-        <a:ea typeface="Calibri"/>
-        <a:cs typeface="Calibri"/>
-      </a:minorFont>
-    </a:fontScheme>
-    <a:fmtScheme name="ChatGPT">
-      <a:fillStyleLst>
-        <a:solidFill>
-          <a:schemeClr val="phClr"/>
-        </a:solidFill>
-        <a:gradFill>
-          <a:gsLst>
-            <a:gs pos="0">
-              <a:schemeClr val="phClr">
-                <a:tint val="67000"/>
-                <a:lumMod val="110000"/>
-                <a:satMod val="105000"/>
-              </a:schemeClr>
-            </a:gs>
-            <a:gs pos="50000">
-              <a:schemeClr val="phClr">
-                <a:tint val="73000"/>
-                <a:lumMod val="105000"/>
-                <a:satMod val="103000"/>
-              </a:schemeClr>
-            </a:gs>
-            <a:gs pos="100000">
-              <a:schemeClr val="phClr">
-                <a:tint val="81000"/>
-                <a:lumMod val="105000"/>
-                <a:satMod val="109000"/>
-              </a:schemeClr>
-            </a:gs>
-          </a:gsLst>
-          <a:lin ang="5400000" scaled="0"/>
-        </a:gradFill>
-        <a:gradFill>
-          <a:gsLst>
-            <a:gs pos="0">
-              <a:schemeClr val="phClr">
-                <a:tint val="94000"/>
-                <a:lumMod val="102000"/>
-                <a:satMod val="103000"/>
-              </a:schemeClr>
-            </a:gs>
-            <a:gs pos="50000">
-              <a:schemeClr val="phClr">
-                <a:shade val="100000"/>
-                <a:lumMod val="100000"/>
-                <a:satMod val="110000"/>
-              </a:schemeClr>
-            </a:gs>
-            <a:gs pos="100000">
-              <a:schemeClr val="phClr">
-                <a:shade val="78000"/>
-                <a:lumMod val="99000"/>
-                <a:satMod val="120000"/>
-              </a:schemeClr>
-            </a:gs>
-          </a:gsLst>
-          <a:lin ang="5400000" scaled="0"/>
-        </a:gradFill>
-      </a:fillStyleLst>
-      <a:lnStyleLst>
-        <a:ln w="12700">
-          <a:solidFill>
-            <a:schemeClr val="phClr"/>
-          </a:solidFill>
-          <a:prstDash val="solid"/>
-        </a:ln>
-        <a:ln w="19050">
-          <a:solidFill>
-            <a:schemeClr val="phClr"/>
-          </a:solidFill>
-          <a:prstDash val="solid"/>
-        </a:ln>
-        <a:ln w="25400">
-          <a:solidFill>
-            <a:schemeClr val="phClr"/>
-          </a:solidFill>
-          <a:prstDash val="solid"/>
-        </a:ln>
-      </a:lnStyleLst>
-      <a:effectStyleLst>
-        <a:effectStyle>
-          <a:effectLst/>
-        </a:effectStyle>
-        <a:effectStyle>
-          <a:effectLst/>
-        </a:effectStyle>
-        <a:effectStyle>
-          <a:effectLst>
-            <a:outerShdw blurRad="57150" dist="19050" dir="5400000">
-              <a:srgbClr val="000000">
-                <a:alpha val="16000"/>
-              </a:srgbClr>
-            </a:outerShdw>
-          </a:effectLst>
-        </a:effectStyle>
-        <a:effectStyle>
-          <a:effectLst>
-            <a:outerShdw blurRad="19050" dist="9525" dir="5400000">
-              <a:srgbClr val="000000">
-                <a:alpha val="6000"/>
-              </a:srgbClr>
-            </a:outerShdw>
-          </a:effectLst>
-        </a:effectStyle>
-        <a:effectStyle>
-          <a:effectLst>
-            <a:outerShdw blurRad="28575" dist="9525" dir="5400000">
-              <a:srgbClr val="000000">
-                <a:alpha val="8000"/>
-              </a:srgbClr>
-            </a:outerShdw>
-          </a:effectLst>
-        </a:effectStyle>
-        <a:effectStyle>
-          <a:effectLst>
-            <a:outerShdw blurRad="57150" dist="19050" dir="5400000">
-              <a:srgbClr val="000000">
-                <a:alpha val="10000"/>
-              </a:srgbClr>
-            </a:outerShdw>
-          </a:effectLst>
-        </a:effectStyle>
-        <a:effectStyle>
-          <a:effectLst>
-            <a:outerShdw blurRad="114300" dist="38100" dir="5400000">
-              <a:srgbClr val="000000">
-                <a:alpha val="12000"/>
-              </a:srgbClr>
-            </a:outerShdw>
-          </a:effectLst>
-        </a:effectStyle>
-        <a:effectStyle>
-          <a:effectLst>
-            <a:outerShdw blurRad="171450" dist="57150" dir="5400000">
-              <a:srgbClr val="000000">
-                <a:alpha val="16000"/>
-              </a:srgbClr>
-            </a:outerShdw>
-          </a:effectLst>
-        </a:effectStyle>
-        <a:effectStyle>
-          <a:effectLst>
-            <a:outerShdw blurRad="266700" dist="95250" dir="5400000">
-              <a:srgbClr val="000000">
-                <a:alpha val="24000"/>
-              </a:srgbClr>
-            </a:outerShdw>
-          </a:effectLst>
-        </a:effectStyle>
-      </a:effectStyleLst>
-      <a:bgFillStyleLst>
-        <a:solidFill>
-          <a:schemeClr val="phClr"/>
-        </a:solidFill>
-        <a:solidFill>
-          <a:schemeClr val="phClr">
-            <a:tint val="95000"/>
-            <a:satMod val="170000"/>
-          </a:schemeClr>
-        </a:solidFill>
-        <a:gradFill>
-          <a:gsLst>
-            <a:gs pos="0">
-              <a:schemeClr val="phClr">
-                <a:tint val="93000"/>
-                <a:shade val="98000"/>
-                <a:lumMod val="102000"/>
-                <a:satMod val="150000"/>
-              </a:schemeClr>
-            </a:gs>
-            <a:gs pos="50000">
-              <a:schemeClr val="phClr">
-                <a:tint val="98000"/>
-                <a:shade val="90000"/>
-                <a:lumMod val="103000"/>
-                <a:satMod val="130000"/>
-              </a:schemeClr>
-            </a:gs>
-            <a:gs pos="100000">
-              <a:schemeClr val="phClr">
-                <a:shade val="63000"/>
-                <a:satMod val="120000"/>
-              </a:schemeClr>
-            </a:gs>
-          </a:gsLst>
-          <a:lin ang="5400000" scaled="0"/>
-        </a:gradFill>
-      </a:bgFillStyleLst>
-    </a:fmtScheme>
-  </a:themeElements>
-</a:theme>
-</file>
-
 <file path=ppt/notesSlides/notesSlide1.xml><?xml version="1.0" encoding="utf-8"?>
-<p:notes xmlns:p="http://schemas.openxmlformats.org/presentationml/2006/main">
+<p:notes xmlns:a="http://schemas.openxmlformats.org/drawingml/2006/main" xmlns:r="http://schemas.openxmlformats.org/officeDocument/2006/relationships" xmlns:p="http://schemas.openxmlformats.org/presentationml/2006/main">
   <p:cSld>
     <p:spTree>
       <p:nvGrpSpPr>
@@ -417,16 +296,21 @@
         <p:nvPr/>
       </p:nvGrpSpPr>
       <p:grpSpPr>
-        <a:xfrm xmlns:a="http://schemas.openxmlformats.org/drawingml/2006/main"/>
+        <a:xfrm>
+          <a:off x="0" y="0"/>
+          <a:ext cx="0" cy="0"/>
+          <a:chOff x="0" y="0"/>
+          <a:chExt cx="0" cy="0"/>
+        </a:xfrm>
       </p:grpSpPr>
       <p:sp>
         <p:nvSpPr>
           <p:cNvPr id="2" name="Slide Image Placeholder 1"/>
           <p:cNvSpPr>
-            <a:spLocks xmlns:a="http://schemas.openxmlformats.org/drawingml/2006/main" noGrp="1"/>
+            <a:spLocks noGrp="1" noRot="1" noChangeAspect="1"/>
           </p:cNvSpPr>
           <p:nvPr>
-            <p:ph type="sldImg" idx="0"/>
+            <p:ph type="sldImg"/>
           </p:nvPr>
         </p:nvSpPr>
         <p:spPr/>
@@ -435,7 +319,7 @@
         <p:nvSpPr>
           <p:cNvPr id="3" name="Notes Placeholder 2"/>
           <p:cNvSpPr>
-            <a:spLocks xmlns:a="http://schemas.openxmlformats.org/drawingml/2006/main" noGrp="1"/>
+            <a:spLocks noGrp="1"/>
           </p:cNvSpPr>
           <p:nvPr>
             <p:ph type="body" idx="1"/>
@@ -443,16 +327,18 @@
         </p:nvSpPr>
         <p:spPr/>
         <p:txBody>
-          <a:bodyPr xmlns:a="http://schemas.openxmlformats.org/drawingml/2006/main"/>
-          <a:lstStyle xmlns:a="http://schemas.openxmlformats.org/drawingml/2006/main"/>
-          <a:p xmlns:a="http://schemas.openxmlformats.org/drawingml/2006/main"/>
+          <a:bodyPr/>
+          <a:lstStyle/>
+          <a:p>
+            <a:endParaRPr/>
+          </a:p>
         </p:txBody>
       </p:sp>
       <p:sp>
         <p:nvSpPr>
           <p:cNvPr id="4" name="Slide Number Placeholder 3"/>
           <p:cNvSpPr>
-            <a:spLocks xmlns:a="http://schemas.openxmlformats.org/drawingml/2006/main" noGrp="1"/>
+            <a:spLocks noGrp="1"/>
           </p:cNvSpPr>
           <p:nvPr>
             <p:ph type="sldNum" idx="5"/>
@@ -460,21 +346,23 @@
         </p:nvSpPr>
         <p:spPr/>
         <p:txBody>
-          <a:bodyPr xmlns:a="http://schemas.openxmlformats.org/drawingml/2006/main"/>
-          <a:lstStyle xmlns:a="http://schemas.openxmlformats.org/drawingml/2006/main"/>
-          <a:p xmlns:a="http://schemas.openxmlformats.org/drawingml/2006/main"/>
+          <a:bodyPr/>
+          <a:lstStyle/>
+          <a:p>
+            <a:endParaRPr/>
+          </a:p>
         </p:txBody>
       </p:sp>
     </p:spTree>
   </p:cSld>
   <p:clrMapOvr>
-    <a:masterClrMapping xmlns:a="http://schemas.openxmlformats.org/drawingml/2006/main"/>
+    <a:masterClrMapping/>
   </p:clrMapOvr>
 </p:notes>
 </file>
 
 <file path=ppt/notesSlides/notesSlide2.xml><?xml version="1.0" encoding="utf-8"?>
-<p:notes xmlns:p="http://schemas.openxmlformats.org/presentationml/2006/main">
+<p:notes xmlns:a="http://schemas.openxmlformats.org/drawingml/2006/main" xmlns:r="http://schemas.openxmlformats.org/officeDocument/2006/relationships" xmlns:p="http://schemas.openxmlformats.org/presentationml/2006/main">
   <p:cSld>
     <p:spTree>
       <p:nvGrpSpPr>
@@ -483,16 +371,21 @@
         <p:nvPr/>
       </p:nvGrpSpPr>
       <p:grpSpPr>
-        <a:xfrm xmlns:a="http://schemas.openxmlformats.org/drawingml/2006/main"/>
+        <a:xfrm>
+          <a:off x="0" y="0"/>
+          <a:ext cx="0" cy="0"/>
+          <a:chOff x="0" y="0"/>
+          <a:chExt cx="0" cy="0"/>
+        </a:xfrm>
       </p:grpSpPr>
       <p:sp>
         <p:nvSpPr>
           <p:cNvPr id="2" name="Slide Image Placeholder 1"/>
           <p:cNvSpPr>
-            <a:spLocks xmlns:a="http://schemas.openxmlformats.org/drawingml/2006/main" noGrp="1"/>
+            <a:spLocks noGrp="1" noRot="1" noChangeAspect="1"/>
           </p:cNvSpPr>
           <p:nvPr>
-            <p:ph type="sldImg" idx="0"/>
+            <p:ph type="sldImg"/>
           </p:nvPr>
         </p:nvSpPr>
         <p:spPr/>
@@ -501,7 +394,7 @@
         <p:nvSpPr>
           <p:cNvPr id="3" name="Notes Placeholder 2"/>
           <p:cNvSpPr>
-            <a:spLocks xmlns:a="http://schemas.openxmlformats.org/drawingml/2006/main" noGrp="1"/>
+            <a:spLocks noGrp="1"/>
           </p:cNvSpPr>
           <p:nvPr>
             <p:ph type="body" idx="1"/>
@@ -509,16 +402,18 @@
         </p:nvSpPr>
         <p:spPr/>
         <p:txBody>
-          <a:bodyPr xmlns:a="http://schemas.openxmlformats.org/drawingml/2006/main"/>
-          <a:lstStyle xmlns:a="http://schemas.openxmlformats.org/drawingml/2006/main"/>
-          <a:p xmlns:a="http://schemas.openxmlformats.org/drawingml/2006/main"/>
+          <a:bodyPr/>
+          <a:lstStyle/>
+          <a:p>
+            <a:endParaRPr/>
+          </a:p>
         </p:txBody>
       </p:sp>
       <p:sp>
         <p:nvSpPr>
           <p:cNvPr id="4" name="Slide Number Placeholder 3"/>
           <p:cNvSpPr>
-            <a:spLocks xmlns:a="http://schemas.openxmlformats.org/drawingml/2006/main" noGrp="1"/>
+            <a:spLocks noGrp="1"/>
           </p:cNvSpPr>
           <p:nvPr>
             <p:ph type="sldNum" idx="5"/>
@@ -526,21 +421,23 @@
         </p:nvSpPr>
         <p:spPr/>
         <p:txBody>
-          <a:bodyPr xmlns:a="http://schemas.openxmlformats.org/drawingml/2006/main"/>
-          <a:lstStyle xmlns:a="http://schemas.openxmlformats.org/drawingml/2006/main"/>
-          <a:p xmlns:a="http://schemas.openxmlformats.org/drawingml/2006/main"/>
+          <a:bodyPr/>
+          <a:lstStyle/>
+          <a:p>
+            <a:endParaRPr/>
+          </a:p>
         </p:txBody>
       </p:sp>
     </p:spTree>
   </p:cSld>
   <p:clrMapOvr>
-    <a:masterClrMapping xmlns:a="http://schemas.openxmlformats.org/drawingml/2006/main"/>
+    <a:masterClrMapping/>
   </p:clrMapOvr>
 </p:notes>
 </file>
 
 <file path=ppt/notesSlides/notesSlide3.xml><?xml version="1.0" encoding="utf-8"?>
-<p:notes xmlns:p="http://schemas.openxmlformats.org/presentationml/2006/main">
+<p:notes xmlns:a="http://schemas.openxmlformats.org/drawingml/2006/main" xmlns:r="http://schemas.openxmlformats.org/officeDocument/2006/relationships" xmlns:p="http://schemas.openxmlformats.org/presentationml/2006/main">
   <p:cSld>
     <p:spTree>
       <p:nvGrpSpPr>
@@ -549,16 +446,21 @@
         <p:nvPr/>
       </p:nvGrpSpPr>
       <p:grpSpPr>
-        <a:xfrm xmlns:a="http://schemas.openxmlformats.org/drawingml/2006/main"/>
+        <a:xfrm>
+          <a:off x="0" y="0"/>
+          <a:ext cx="0" cy="0"/>
+          <a:chOff x="0" y="0"/>
+          <a:chExt cx="0" cy="0"/>
+        </a:xfrm>
       </p:grpSpPr>
       <p:sp>
         <p:nvSpPr>
           <p:cNvPr id="2" name="Slide Image Placeholder 1"/>
           <p:cNvSpPr>
-            <a:spLocks xmlns:a="http://schemas.openxmlformats.org/drawingml/2006/main" noGrp="1"/>
+            <a:spLocks noGrp="1" noRot="1" noChangeAspect="1"/>
           </p:cNvSpPr>
           <p:nvPr>
-            <p:ph type="sldImg" idx="0"/>
+            <p:ph type="sldImg"/>
           </p:nvPr>
         </p:nvSpPr>
         <p:spPr/>
@@ -567,7 +469,7 @@
         <p:nvSpPr>
           <p:cNvPr id="3" name="Notes Placeholder 2"/>
           <p:cNvSpPr>
-            <a:spLocks xmlns:a="http://schemas.openxmlformats.org/drawingml/2006/main" noGrp="1"/>
+            <a:spLocks noGrp="1"/>
           </p:cNvSpPr>
           <p:nvPr>
             <p:ph type="body" idx="1"/>
@@ -575,16 +477,18 @@
         </p:nvSpPr>
         <p:spPr/>
         <p:txBody>
-          <a:bodyPr xmlns:a="http://schemas.openxmlformats.org/drawingml/2006/main"/>
-          <a:lstStyle xmlns:a="http://schemas.openxmlformats.org/drawingml/2006/main"/>
-          <a:p xmlns:a="http://schemas.openxmlformats.org/drawingml/2006/main"/>
+          <a:bodyPr/>
+          <a:lstStyle/>
+          <a:p>
+            <a:endParaRPr/>
+          </a:p>
         </p:txBody>
       </p:sp>
       <p:sp>
         <p:nvSpPr>
           <p:cNvPr id="4" name="Slide Number Placeholder 3"/>
           <p:cNvSpPr>
-            <a:spLocks xmlns:a="http://schemas.openxmlformats.org/drawingml/2006/main" noGrp="1"/>
+            <a:spLocks noGrp="1"/>
           </p:cNvSpPr>
           <p:nvPr>
             <p:ph type="sldNum" idx="5"/>
@@ -592,21 +496,23 @@
         </p:nvSpPr>
         <p:spPr/>
         <p:txBody>
-          <a:bodyPr xmlns:a="http://schemas.openxmlformats.org/drawingml/2006/main"/>
-          <a:lstStyle xmlns:a="http://schemas.openxmlformats.org/drawingml/2006/main"/>
-          <a:p xmlns:a="http://schemas.openxmlformats.org/drawingml/2006/main"/>
+          <a:bodyPr/>
+          <a:lstStyle/>
+          <a:p>
+            <a:endParaRPr/>
+          </a:p>
         </p:txBody>
       </p:sp>
     </p:spTree>
   </p:cSld>
   <p:clrMapOvr>
-    <a:masterClrMapping xmlns:a="http://schemas.openxmlformats.org/drawingml/2006/main"/>
+    <a:masterClrMapping/>
   </p:clrMapOvr>
 </p:notes>
 </file>
 
 <file path=ppt/notesSlides/notesSlide4.xml><?xml version="1.0" encoding="utf-8"?>
-<p:notes xmlns:p="http://schemas.openxmlformats.org/presentationml/2006/main">
+<p:notes xmlns:a="http://schemas.openxmlformats.org/drawingml/2006/main" xmlns:r="http://schemas.openxmlformats.org/officeDocument/2006/relationships" xmlns:p="http://schemas.openxmlformats.org/presentationml/2006/main">
   <p:cSld>
     <p:spTree>
       <p:nvGrpSpPr>
@@ -615,16 +521,21 @@
         <p:nvPr/>
       </p:nvGrpSpPr>
       <p:grpSpPr>
-        <a:xfrm xmlns:a="http://schemas.openxmlformats.org/drawingml/2006/main"/>
+        <a:xfrm>
+          <a:off x="0" y="0"/>
+          <a:ext cx="0" cy="0"/>
+          <a:chOff x="0" y="0"/>
+          <a:chExt cx="0" cy="0"/>
+        </a:xfrm>
       </p:grpSpPr>
       <p:sp>
         <p:nvSpPr>
           <p:cNvPr id="2" name="Slide Image Placeholder 1"/>
           <p:cNvSpPr>
-            <a:spLocks xmlns:a="http://schemas.openxmlformats.org/drawingml/2006/main" noGrp="1"/>
+            <a:spLocks noGrp="1" noRot="1" noChangeAspect="1"/>
           </p:cNvSpPr>
           <p:nvPr>
-            <p:ph type="sldImg" idx="0"/>
+            <p:ph type="sldImg"/>
           </p:nvPr>
         </p:nvSpPr>
         <p:spPr/>
@@ -633,7 +544,7 @@
         <p:nvSpPr>
           <p:cNvPr id="3" name="Notes Placeholder 2"/>
           <p:cNvSpPr>
-            <a:spLocks xmlns:a="http://schemas.openxmlformats.org/drawingml/2006/main" noGrp="1"/>
+            <a:spLocks noGrp="1"/>
           </p:cNvSpPr>
           <p:nvPr>
             <p:ph type="body" idx="1"/>
@@ -641,16 +552,18 @@
         </p:nvSpPr>
         <p:spPr/>
         <p:txBody>
-          <a:bodyPr xmlns:a="http://schemas.openxmlformats.org/drawingml/2006/main"/>
-          <a:lstStyle xmlns:a="http://schemas.openxmlformats.org/drawingml/2006/main"/>
-          <a:p xmlns:a="http://schemas.openxmlformats.org/drawingml/2006/main"/>
+          <a:bodyPr/>
+          <a:lstStyle/>
+          <a:p>
+            <a:endParaRPr/>
+          </a:p>
         </p:txBody>
       </p:sp>
       <p:sp>
         <p:nvSpPr>
           <p:cNvPr id="4" name="Slide Number Placeholder 3"/>
           <p:cNvSpPr>
-            <a:spLocks xmlns:a="http://schemas.openxmlformats.org/drawingml/2006/main" noGrp="1"/>
+            <a:spLocks noGrp="1"/>
           </p:cNvSpPr>
           <p:nvPr>
             <p:ph type="sldNum" idx="5"/>
@@ -658,21 +571,23 @@
         </p:nvSpPr>
         <p:spPr/>
         <p:txBody>
-          <a:bodyPr xmlns:a="http://schemas.openxmlformats.org/drawingml/2006/main"/>
-          <a:lstStyle xmlns:a="http://schemas.openxmlformats.org/drawingml/2006/main"/>
-          <a:p xmlns:a="http://schemas.openxmlformats.org/drawingml/2006/main"/>
+          <a:bodyPr/>
+          <a:lstStyle/>
+          <a:p>
+            <a:endParaRPr/>
+          </a:p>
         </p:txBody>
       </p:sp>
     </p:spTree>
   </p:cSld>
   <p:clrMapOvr>
-    <a:masterClrMapping xmlns:a="http://schemas.openxmlformats.org/drawingml/2006/main"/>
+    <a:masterClrMapping/>
   </p:clrMapOvr>
 </p:notes>
 </file>
 
 <file path=ppt/notesSlides/notesSlide5.xml><?xml version="1.0" encoding="utf-8"?>
-<p:notes xmlns:p="http://schemas.openxmlformats.org/presentationml/2006/main">
+<p:notes xmlns:a="http://schemas.openxmlformats.org/drawingml/2006/main" xmlns:r="http://schemas.openxmlformats.org/officeDocument/2006/relationships" xmlns:p="http://schemas.openxmlformats.org/presentationml/2006/main">
   <p:cSld>
     <p:spTree>
       <p:nvGrpSpPr>
@@ -681,16 +596,21 @@
         <p:nvPr/>
       </p:nvGrpSpPr>
       <p:grpSpPr>
-        <a:xfrm xmlns:a="http://schemas.openxmlformats.org/drawingml/2006/main"/>
+        <a:xfrm>
+          <a:off x="0" y="0"/>
+          <a:ext cx="0" cy="0"/>
+          <a:chOff x="0" y="0"/>
+          <a:chExt cx="0" cy="0"/>
+        </a:xfrm>
       </p:grpSpPr>
       <p:sp>
         <p:nvSpPr>
           <p:cNvPr id="2" name="Slide Image Placeholder 1"/>
           <p:cNvSpPr>
-            <a:spLocks xmlns:a="http://schemas.openxmlformats.org/drawingml/2006/main" noGrp="1"/>
+            <a:spLocks noGrp="1" noRot="1" noChangeAspect="1"/>
           </p:cNvSpPr>
           <p:nvPr>
-            <p:ph type="sldImg" idx="0"/>
+            <p:ph type="sldImg"/>
           </p:nvPr>
         </p:nvSpPr>
         <p:spPr/>
@@ -699,7 +619,7 @@
         <p:nvSpPr>
           <p:cNvPr id="3" name="Notes Placeholder 2"/>
           <p:cNvSpPr>
-            <a:spLocks xmlns:a="http://schemas.openxmlformats.org/drawingml/2006/main" noGrp="1"/>
+            <a:spLocks noGrp="1"/>
           </p:cNvSpPr>
           <p:nvPr>
             <p:ph type="body" idx="1"/>
@@ -707,16 +627,18 @@
         </p:nvSpPr>
         <p:spPr/>
         <p:txBody>
-          <a:bodyPr xmlns:a="http://schemas.openxmlformats.org/drawingml/2006/main"/>
-          <a:lstStyle xmlns:a="http://schemas.openxmlformats.org/drawingml/2006/main"/>
-          <a:p xmlns:a="http://schemas.openxmlformats.org/drawingml/2006/main"/>
+          <a:bodyPr/>
+          <a:lstStyle/>
+          <a:p>
+            <a:endParaRPr/>
+          </a:p>
         </p:txBody>
       </p:sp>
       <p:sp>
         <p:nvSpPr>
           <p:cNvPr id="4" name="Slide Number Placeholder 3"/>
           <p:cNvSpPr>
-            <a:spLocks xmlns:a="http://schemas.openxmlformats.org/drawingml/2006/main" noGrp="1"/>
+            <a:spLocks noGrp="1"/>
           </p:cNvSpPr>
           <p:nvPr>
             <p:ph type="sldNum" idx="5"/>
@@ -724,21 +646,23 @@
         </p:nvSpPr>
         <p:spPr/>
         <p:txBody>
-          <a:bodyPr xmlns:a="http://schemas.openxmlformats.org/drawingml/2006/main"/>
-          <a:lstStyle xmlns:a="http://schemas.openxmlformats.org/drawingml/2006/main"/>
-          <a:p xmlns:a="http://schemas.openxmlformats.org/drawingml/2006/main"/>
+          <a:bodyPr/>
+          <a:lstStyle/>
+          <a:p>
+            <a:endParaRPr/>
+          </a:p>
         </p:txBody>
       </p:sp>
     </p:spTree>
   </p:cSld>
   <p:clrMapOvr>
-    <a:masterClrMapping xmlns:a="http://schemas.openxmlformats.org/drawingml/2006/main"/>
+    <a:masterClrMapping/>
   </p:clrMapOvr>
 </p:notes>
 </file>
 
 <file path=ppt/notesSlides/notesSlide6.xml><?xml version="1.0" encoding="utf-8"?>
-<p:notes xmlns:p="http://schemas.openxmlformats.org/presentationml/2006/main">
+<p:notes xmlns:a="http://schemas.openxmlformats.org/drawingml/2006/main" xmlns:r="http://schemas.openxmlformats.org/officeDocument/2006/relationships" xmlns:p="http://schemas.openxmlformats.org/presentationml/2006/main">
   <p:cSld>
     <p:spTree>
       <p:nvGrpSpPr>
@@ -747,16 +671,21 @@
         <p:nvPr/>
       </p:nvGrpSpPr>
       <p:grpSpPr>
-        <a:xfrm xmlns:a="http://schemas.openxmlformats.org/drawingml/2006/main"/>
+        <a:xfrm>
+          <a:off x="0" y="0"/>
+          <a:ext cx="0" cy="0"/>
+          <a:chOff x="0" y="0"/>
+          <a:chExt cx="0" cy="0"/>
+        </a:xfrm>
       </p:grpSpPr>
       <p:sp>
         <p:nvSpPr>
           <p:cNvPr id="2" name="Slide Image Placeholder 1"/>
           <p:cNvSpPr>
-            <a:spLocks xmlns:a="http://schemas.openxmlformats.org/drawingml/2006/main" noGrp="1"/>
+            <a:spLocks noGrp="1" noRot="1" noChangeAspect="1"/>
           </p:cNvSpPr>
           <p:nvPr>
-            <p:ph type="sldImg" idx="0"/>
+            <p:ph type="sldImg"/>
           </p:nvPr>
         </p:nvSpPr>
         <p:spPr/>
@@ -765,7 +694,7 @@
         <p:nvSpPr>
           <p:cNvPr id="3" name="Notes Placeholder 2"/>
           <p:cNvSpPr>
-            <a:spLocks xmlns:a="http://schemas.openxmlformats.org/drawingml/2006/main" noGrp="1"/>
+            <a:spLocks noGrp="1"/>
           </p:cNvSpPr>
           <p:nvPr>
             <p:ph type="body" idx="1"/>
@@ -773,16 +702,18 @@
         </p:nvSpPr>
         <p:spPr/>
         <p:txBody>
-          <a:bodyPr xmlns:a="http://schemas.openxmlformats.org/drawingml/2006/main"/>
-          <a:lstStyle xmlns:a="http://schemas.openxmlformats.org/drawingml/2006/main"/>
-          <a:p xmlns:a="http://schemas.openxmlformats.org/drawingml/2006/main"/>
+          <a:bodyPr/>
+          <a:lstStyle/>
+          <a:p>
+            <a:endParaRPr/>
+          </a:p>
         </p:txBody>
       </p:sp>
       <p:sp>
         <p:nvSpPr>
           <p:cNvPr id="4" name="Slide Number Placeholder 3"/>
           <p:cNvSpPr>
-            <a:spLocks xmlns:a="http://schemas.openxmlformats.org/drawingml/2006/main" noGrp="1"/>
+            <a:spLocks noGrp="1"/>
           </p:cNvSpPr>
           <p:nvPr>
             <p:ph type="sldNum" idx="5"/>
@@ -790,21 +721,23 @@
         </p:nvSpPr>
         <p:spPr/>
         <p:txBody>
-          <a:bodyPr xmlns:a="http://schemas.openxmlformats.org/drawingml/2006/main"/>
-          <a:lstStyle xmlns:a="http://schemas.openxmlformats.org/drawingml/2006/main"/>
-          <a:p xmlns:a="http://schemas.openxmlformats.org/drawingml/2006/main"/>
+          <a:bodyPr/>
+          <a:lstStyle/>
+          <a:p>
+            <a:endParaRPr/>
+          </a:p>
         </p:txBody>
       </p:sp>
     </p:spTree>
   </p:cSld>
   <p:clrMapOvr>
-    <a:masterClrMapping xmlns:a="http://schemas.openxmlformats.org/drawingml/2006/main"/>
+    <a:masterClrMapping/>
   </p:clrMapOvr>
 </p:notes>
 </file>
 
 <file path=ppt/slideLayouts/slideLayout1.xml><?xml version="1.0" encoding="utf-8"?>
-<p:sldLayout xmlns:p="http://schemas.openxmlformats.org/presentationml/2006/main" type="title">
+<p:sldLayout xmlns:a="http://schemas.openxmlformats.org/drawingml/2006/main" xmlns:r="http://schemas.openxmlformats.org/officeDocument/2006/relationships" xmlns:p="http://schemas.openxmlformats.org/presentationml/2006/main" type="title">
   <p:cSld name="Title Slide">
     <p:spTree>
       <p:nvGrpSpPr>
@@ -813,19 +746,27 @@
         <p:nvPr/>
       </p:nvGrpSpPr>
       <p:grpSpPr>
-        <a:xfrm xmlns:a="http://schemas.openxmlformats.org/drawingml/2006/main"/>
+        <a:xfrm>
+          <a:off x="0" y="0"/>
+          <a:ext cx="0" cy="0"/>
+          <a:chOff x="0" y="0"/>
+          <a:chExt cx="0" cy="0"/>
+        </a:xfrm>
       </p:grpSpPr>
     </p:spTree>
   </p:cSld>
+  <p:clrMapOvr>
+    <a:masterClrMapping/>
+  </p:clrMapOvr>
 </p:sldLayout>
 </file>
 
 <file path=ppt/slideMasters/slideMaster1.xml><?xml version="1.0" encoding="utf-8"?>
-<p:sldMaster xmlns:p="http://schemas.openxmlformats.org/presentationml/2006/main">
+<p:sldMaster xmlns:a="http://schemas.openxmlformats.org/drawingml/2006/main" xmlns:r="http://schemas.openxmlformats.org/officeDocument/2006/relationships" xmlns:p="http://schemas.openxmlformats.org/presentationml/2006/main">
   <p:cSld name="Master">
     <p:bg>
       <p:bgRef idx="1001">
-        <a:schemeClr xmlns:a="http://schemas.openxmlformats.org/drawingml/2006/main" val="bg1"/>
+        <a:schemeClr val="bg1"/>
       </p:bgRef>
     </p:bg>
     <p:spTree>
@@ -835,17 +776,22 @@
         <p:nvPr/>
       </p:nvGrpSpPr>
       <p:grpSpPr>
-        <a:xfrm xmlns:a="http://schemas.openxmlformats.org/drawingml/2006/main"/>
+        <a:xfrm>
+          <a:off x="0" y="0"/>
+          <a:ext cx="0" cy="0"/>
+          <a:chOff x="0" y="0"/>
+          <a:chExt cx="0" cy="0"/>
+        </a:xfrm>
       </p:grpSpPr>
     </p:spTree>
   </p:cSld>
   <p:clrMap bg1="lt1" tx1="dk1" bg2="lt2" tx2="dk2" accent1="accent1" accent2="accent2" accent3="accent3" accent4="accent4" accent5="accent5" accent6="accent6" hlink="hlink" folHlink="folHlink"/>
   <p:sldLayoutIdLst>
-    <p:sldLayoutId xmlns:r="http://schemas.openxmlformats.org/officeDocument/2006/relationships" id="2147483649" r:id="R4ef17ef05b844527"/>
+    <p:sldLayoutId id="2147483649" r:id="rId1"/>
   </p:sldLayoutIdLst>
   <p:txStyles>
     <p:titleStyle>
-      <a:lvl1pPr xmlns:a="http://schemas.openxmlformats.org/drawingml/2006/main" algn="l">
+      <a:lvl1pPr algn="l">
         <a:lnSpc>
           <a:spcPct val="90000"/>
         </a:lnSpc>
@@ -864,7 +810,7 @@
       </a:lvl1pPr>
     </p:titleStyle>
     <p:bodyStyle>
-      <a:lvl1pPr xmlns:a="http://schemas.openxmlformats.org/drawingml/2006/main" marL="228600" indent="-228600" algn="l">
+      <a:lvl1pPr marL="228600" indent="-228600" algn="l">
         <a:lnSpc>
           <a:spcPct val="90000"/>
         </a:lnSpc>
@@ -881,7 +827,7 @@
           <a:cs typeface="+mn-lt"/>
         </a:defRPr>
       </a:lvl1pPr>
-      <a:lvl2pPr xmlns:a="http://schemas.openxmlformats.org/drawingml/2006/main" marL="685800" indent="-228600" algn="l">
+      <a:lvl2pPr marL="685800" indent="-228600" algn="l">
         <a:lnSpc>
           <a:spcPct val="90000"/>
         </a:lnSpc>
@@ -898,7 +844,7 @@
           <a:cs typeface="+mn-lt"/>
         </a:defRPr>
       </a:lvl2pPr>
-      <a:lvl3pPr xmlns:a="http://schemas.openxmlformats.org/drawingml/2006/main" marL="1143000" indent="-228600" algn="l">
+      <a:lvl3pPr marL="1143000" indent="-228600" algn="l">
         <a:lnSpc>
           <a:spcPct val="90000"/>
         </a:lnSpc>
@@ -915,7 +861,7 @@
           <a:cs typeface="+mn-lt"/>
         </a:defRPr>
       </a:lvl3pPr>
-      <a:lvl4pPr xmlns:a="http://schemas.openxmlformats.org/drawingml/2006/main" marL="1600200" indent="-228600" algn="l">
+      <a:lvl4pPr marL="1600200" indent="-228600" algn="l">
         <a:lnSpc>
           <a:spcPct val="90000"/>
         </a:lnSpc>
@@ -932,7 +878,7 @@
           <a:cs typeface="+mn-lt"/>
         </a:defRPr>
       </a:lvl4pPr>
-      <a:lvl5pPr xmlns:a="http://schemas.openxmlformats.org/drawingml/2006/main" marL="2057400" indent="-228600" algn="l">
+      <a:lvl5pPr marL="2057400" indent="-228600" algn="l">
         <a:lnSpc>
           <a:spcPct val="90000"/>
         </a:lnSpc>
@@ -949,7 +895,7 @@
           <a:cs typeface="+mn-lt"/>
         </a:defRPr>
       </a:lvl5pPr>
-      <a:lvl6pPr xmlns:a="http://schemas.openxmlformats.org/drawingml/2006/main" marL="2514600" indent="-228600" algn="l">
+      <a:lvl6pPr marL="2514600" indent="-228600" algn="l">
         <a:lnSpc>
           <a:spcPct val="90000"/>
         </a:lnSpc>
@@ -966,7 +912,7 @@
           <a:cs typeface="+mn-lt"/>
         </a:defRPr>
       </a:lvl6pPr>
-      <a:lvl7pPr xmlns:a="http://schemas.openxmlformats.org/drawingml/2006/main" marL="2971800" indent="-228600" algn="l">
+      <a:lvl7pPr marL="2971800" indent="-228600" algn="l">
         <a:lnSpc>
           <a:spcPct val="90000"/>
         </a:lnSpc>
@@ -983,7 +929,7 @@
           <a:cs typeface="+mn-lt"/>
         </a:defRPr>
       </a:lvl7pPr>
-      <a:lvl8pPr xmlns:a="http://schemas.openxmlformats.org/drawingml/2006/main" marL="3429000" indent="-228600" algn="l">
+      <a:lvl8pPr marL="3429000" indent="-228600" algn="l">
         <a:lnSpc>
           <a:spcPct val="90000"/>
         </a:lnSpc>
@@ -1000,7 +946,7 @@
           <a:cs typeface="+mn-lt"/>
         </a:defRPr>
       </a:lvl8pPr>
-      <a:lvl9pPr xmlns:a="http://schemas.openxmlformats.org/drawingml/2006/main" marL="3886200" indent="-228600" algn="l">
+      <a:lvl9pPr marL="3886200" indent="-228600" algn="l">
         <a:lnSpc>
           <a:spcPct val="90000"/>
         </a:lnSpc>
@@ -1019,7 +965,7 @@
       </a:lvl9pPr>
     </p:bodyStyle>
     <p:otherStyle>
-      <a:lvl1pPr xmlns:a="http://schemas.openxmlformats.org/drawingml/2006/main" marL="0" algn="l">
+      <a:lvl1pPr marL="0" algn="l">
         <a:buNone/>
         <a:defRPr sz="1800">
           <a:solidFill>
@@ -1030,7 +976,7 @@
           <a:cs typeface="+mn-lt"/>
         </a:defRPr>
       </a:lvl1pPr>
-      <a:lvl2pPr xmlns:a="http://schemas.openxmlformats.org/drawingml/2006/main" marL="457200" algn="l">
+      <a:lvl2pPr marL="457200" algn="l">
         <a:buNone/>
         <a:defRPr sz="1800">
           <a:solidFill>
@@ -1041,7 +987,7 @@
           <a:cs typeface="+mn-lt"/>
         </a:defRPr>
       </a:lvl2pPr>
-      <a:lvl3pPr xmlns:a="http://schemas.openxmlformats.org/drawingml/2006/main" marL="914400" algn="l">
+      <a:lvl3pPr marL="914400" algn="l">
         <a:buNone/>
         <a:defRPr sz="1800">
           <a:solidFill>
@@ -1052,7 +998,7 @@
           <a:cs typeface="+mn-lt"/>
         </a:defRPr>
       </a:lvl3pPr>
-      <a:lvl4pPr xmlns:a="http://schemas.openxmlformats.org/drawingml/2006/main" marL="1371600" algn="l">
+      <a:lvl4pPr marL="1371600" algn="l">
         <a:buNone/>
         <a:defRPr sz="1800">
           <a:solidFill>
@@ -1063,7 +1009,7 @@
           <a:cs typeface="+mn-lt"/>
         </a:defRPr>
       </a:lvl4pPr>
-      <a:lvl5pPr xmlns:a="http://schemas.openxmlformats.org/drawingml/2006/main" marL="1828800" algn="l">
+      <a:lvl5pPr marL="1828800" algn="l">
         <a:buNone/>
         <a:defRPr sz="1800">
           <a:solidFill>
@@ -1074,7 +1020,7 @@
           <a:cs typeface="+mn-lt"/>
         </a:defRPr>
       </a:lvl5pPr>
-      <a:lvl6pPr xmlns:a="http://schemas.openxmlformats.org/drawingml/2006/main" marL="2286000" algn="l">
+      <a:lvl6pPr marL="2286000" algn="l">
         <a:buNone/>
         <a:defRPr sz="1800">
           <a:solidFill>
@@ -1085,7 +1031,7 @@
           <a:cs typeface="+mn-lt"/>
         </a:defRPr>
       </a:lvl6pPr>
-      <a:lvl7pPr xmlns:a="http://schemas.openxmlformats.org/drawingml/2006/main" marL="2743200" algn="l">
+      <a:lvl7pPr marL="2743200" algn="l">
         <a:buNone/>
         <a:defRPr sz="1800">
           <a:solidFill>
@@ -1096,7 +1042,7 @@
           <a:cs typeface="+mn-lt"/>
         </a:defRPr>
       </a:lvl7pPr>
-      <a:lvl8pPr xmlns:a="http://schemas.openxmlformats.org/drawingml/2006/main" marL="3200400" algn="l">
+      <a:lvl8pPr marL="3200400" algn="l">
         <a:buNone/>
         <a:defRPr sz="1800">
           <a:solidFill>
@@ -1107,7 +1053,7 @@
           <a:cs typeface="+mn-lt"/>
         </a:defRPr>
       </a:lvl8pPr>
-      <a:lvl9pPr xmlns:a="http://schemas.openxmlformats.org/drawingml/2006/main" marL="3657600" algn="l">
+      <a:lvl9pPr marL="3657600" algn="l">
         <a:buNone/>
         <a:defRPr sz="1800">
           <a:solidFill>
@@ -1123,259 +1069,15 @@
 </p:sldMaster>
 </file>
 
-<file path=ppt/slideMasters/theme/theme2.xml><?xml version="1.0" encoding="utf-8"?>
-<a:theme xmlns:a="http://schemas.openxmlformats.org/drawingml/2006/main" name="ChatGPT">
-  <a:themeElements>
-    <a:clrScheme name="ChatGPT">
-      <a:dk1>
-        <a:srgbClr val="000000"/>
-      </a:dk1>
-      <a:lt1>
-        <a:srgbClr val="FFFFFF"/>
-      </a:lt1>
-      <a:dk2>
-        <a:srgbClr val="0E2841"/>
-      </a:dk2>
-      <a:lt2>
-        <a:srgbClr val="E8E8E8"/>
-      </a:lt2>
-      <a:accent1>
-        <a:srgbClr val="156082"/>
-      </a:accent1>
-      <a:accent2>
-        <a:srgbClr val="E97132"/>
-      </a:accent2>
-      <a:accent3>
-        <a:srgbClr val="196B24"/>
-      </a:accent3>
-      <a:accent4>
-        <a:srgbClr val="0F9ED5"/>
-      </a:accent4>
-      <a:accent5>
-        <a:srgbClr val="A02B93"/>
-      </a:accent5>
-      <a:accent6>
-        <a:srgbClr val="4EA72E"/>
-      </a:accent6>
-      <a:hlink>
-        <a:srgbClr val="467886"/>
-      </a:hlink>
-      <a:folHlink>
-        <a:srgbClr val="96607D"/>
-      </a:folHlink>
-    </a:clrScheme>
-    <a:fontScheme name="Office">
-      <a:majorFont>
-        <a:latin typeface="Calibri Light"/>
-        <a:ea typeface="Calibri Light"/>
-        <a:cs typeface="Calibri Light"/>
-      </a:majorFont>
-      <a:minorFont>
-        <a:latin typeface="Calibri"/>
-        <a:ea typeface="Calibri"/>
-        <a:cs typeface="Calibri"/>
-      </a:minorFont>
-    </a:fontScheme>
-    <a:fmtScheme name="ChatGPT">
-      <a:fillStyleLst>
-        <a:solidFill>
-          <a:schemeClr val="phClr"/>
-        </a:solidFill>
-        <a:gradFill>
-          <a:gsLst>
-            <a:gs pos="0">
-              <a:schemeClr val="phClr">
-                <a:tint val="67000"/>
-                <a:lumMod val="110000"/>
-                <a:satMod val="105000"/>
-              </a:schemeClr>
-            </a:gs>
-            <a:gs pos="50000">
-              <a:schemeClr val="phClr">
-                <a:tint val="73000"/>
-                <a:lumMod val="105000"/>
-                <a:satMod val="103000"/>
-              </a:schemeClr>
-            </a:gs>
-            <a:gs pos="100000">
-              <a:schemeClr val="phClr">
-                <a:tint val="81000"/>
-                <a:lumMod val="105000"/>
-                <a:satMod val="109000"/>
-              </a:schemeClr>
-            </a:gs>
-          </a:gsLst>
-          <a:lin ang="5400000" scaled="0"/>
-        </a:gradFill>
-        <a:gradFill>
-          <a:gsLst>
-            <a:gs pos="0">
-              <a:schemeClr val="phClr">
-                <a:tint val="94000"/>
-                <a:lumMod val="102000"/>
-                <a:satMod val="103000"/>
-              </a:schemeClr>
-            </a:gs>
-            <a:gs pos="50000">
-              <a:schemeClr val="phClr">
-                <a:shade val="100000"/>
-                <a:lumMod val="100000"/>
-                <a:satMod val="110000"/>
-              </a:schemeClr>
-            </a:gs>
-            <a:gs pos="100000">
-              <a:schemeClr val="phClr">
-                <a:shade val="78000"/>
-                <a:lumMod val="99000"/>
-                <a:satMod val="120000"/>
-              </a:schemeClr>
-            </a:gs>
-          </a:gsLst>
-          <a:lin ang="5400000" scaled="0"/>
-        </a:gradFill>
-      </a:fillStyleLst>
-      <a:lnStyleLst>
-        <a:ln w="12700">
-          <a:solidFill>
-            <a:schemeClr val="phClr"/>
-          </a:solidFill>
-          <a:prstDash val="solid"/>
-        </a:ln>
-        <a:ln w="19050">
-          <a:solidFill>
-            <a:schemeClr val="phClr"/>
-          </a:solidFill>
-          <a:prstDash val="solid"/>
-        </a:ln>
-        <a:ln w="25400">
-          <a:solidFill>
-            <a:schemeClr val="phClr"/>
-          </a:solidFill>
-          <a:prstDash val="solid"/>
-        </a:ln>
-      </a:lnStyleLst>
-      <a:effectStyleLst>
-        <a:effectStyle>
-          <a:effectLst/>
-        </a:effectStyle>
-        <a:effectStyle>
-          <a:effectLst/>
-        </a:effectStyle>
-        <a:effectStyle>
-          <a:effectLst>
-            <a:outerShdw blurRad="57150" dist="19050" dir="5400000">
-              <a:srgbClr val="000000">
-                <a:alpha val="16000"/>
-              </a:srgbClr>
-            </a:outerShdw>
-          </a:effectLst>
-        </a:effectStyle>
-        <a:effectStyle>
-          <a:effectLst>
-            <a:outerShdw blurRad="19050" dist="9525" dir="5400000">
-              <a:srgbClr val="000000">
-                <a:alpha val="6000"/>
-              </a:srgbClr>
-            </a:outerShdw>
-          </a:effectLst>
-        </a:effectStyle>
-        <a:effectStyle>
-          <a:effectLst>
-            <a:outerShdw blurRad="28575" dist="9525" dir="5400000">
-              <a:srgbClr val="000000">
-                <a:alpha val="8000"/>
-              </a:srgbClr>
-            </a:outerShdw>
-          </a:effectLst>
-        </a:effectStyle>
-        <a:effectStyle>
-          <a:effectLst>
-            <a:outerShdw blurRad="57150" dist="19050" dir="5400000">
-              <a:srgbClr val="000000">
-                <a:alpha val="10000"/>
-              </a:srgbClr>
-            </a:outerShdw>
-          </a:effectLst>
-        </a:effectStyle>
-        <a:effectStyle>
-          <a:effectLst>
-            <a:outerShdw blurRad="114300" dist="38100" dir="5400000">
-              <a:srgbClr val="000000">
-                <a:alpha val="12000"/>
-              </a:srgbClr>
-            </a:outerShdw>
-          </a:effectLst>
-        </a:effectStyle>
-        <a:effectStyle>
-          <a:effectLst>
-            <a:outerShdw blurRad="171450" dist="57150" dir="5400000">
-              <a:srgbClr val="000000">
-                <a:alpha val="16000"/>
-              </a:srgbClr>
-            </a:outerShdw>
-          </a:effectLst>
-        </a:effectStyle>
-        <a:effectStyle>
-          <a:effectLst>
-            <a:outerShdw blurRad="266700" dist="95250" dir="5400000">
-              <a:srgbClr val="000000">
-                <a:alpha val="24000"/>
-              </a:srgbClr>
-            </a:outerShdw>
-          </a:effectLst>
-        </a:effectStyle>
-      </a:effectStyleLst>
-      <a:bgFillStyleLst>
-        <a:solidFill>
-          <a:schemeClr val="phClr"/>
-        </a:solidFill>
-        <a:solidFill>
-          <a:schemeClr val="phClr">
-            <a:tint val="95000"/>
-            <a:satMod val="170000"/>
-          </a:schemeClr>
-        </a:solidFill>
-        <a:gradFill>
-          <a:gsLst>
-            <a:gs pos="0">
-              <a:schemeClr val="phClr">
-                <a:tint val="93000"/>
-                <a:shade val="98000"/>
-                <a:lumMod val="102000"/>
-                <a:satMod val="150000"/>
-              </a:schemeClr>
-            </a:gs>
-            <a:gs pos="50000">
-              <a:schemeClr val="phClr">
-                <a:tint val="98000"/>
-                <a:shade val="90000"/>
-                <a:lumMod val="103000"/>
-                <a:satMod val="130000"/>
-              </a:schemeClr>
-            </a:gs>
-            <a:gs pos="100000">
-              <a:schemeClr val="phClr">
-                <a:shade val="63000"/>
-                <a:satMod val="120000"/>
-              </a:schemeClr>
-            </a:gs>
-          </a:gsLst>
-          <a:lin ang="5400000" scaled="0"/>
-        </a:gradFill>
-      </a:bgFillStyleLst>
-    </a:fmtScheme>
-  </a:themeElements>
-</a:theme>
-</file>
-
 <file path=ppt/slides/slide1.xml><?xml version="1.0" encoding="utf-8"?>
-<p:sld xmlns:p="http://schemas.openxmlformats.org/presentationml/2006/main">
+<p:sld xmlns:a="http://schemas.openxmlformats.org/drawingml/2006/main" xmlns:r="http://schemas.openxmlformats.org/officeDocument/2006/relationships" xmlns:p="http://schemas.openxmlformats.org/presentationml/2006/main">
   <p:cSld>
     <p:bg>
       <p:bgPr>
-        <a:solidFill xmlns:a="http://schemas.openxmlformats.org/drawingml/2006/main">
+        <a:solidFill>
           <a:srgbClr val="FFFFFF"/>
         </a:solidFill>
+        <a:effectLst/>
       </p:bgPr>
     </p:bg>
     <p:spTree>
@@ -1385,42 +1087,47 @@
         <p:nvPr/>
       </p:nvGrpSpPr>
       <p:grpSpPr>
-        <a:xfrm xmlns:a="http://schemas.openxmlformats.org/drawingml/2006/main"/>
+        <a:xfrm>
+          <a:off x="0" y="0"/>
+          <a:ext cx="0" cy="0"/>
+          <a:chOff x="0" y="0"/>
+          <a:chExt cx="0" cy="0"/>
+        </a:xfrm>
       </p:grpSpPr>
       <p:sp>
         <p:nvSpPr>
-          <p:cNvPr id="9" name="">
-            <a:extLst xmlns:a="http://schemas.openxmlformats.org/drawingml/2006/main">
+          <p:cNvPr id="9" name="Rectangle 8">
+            <a:extLst>
               <a:ext uri="{FF2B5EF4-FFF2-40B4-BE49-F238E27FC236}">
                 <a16:creationId xmlns:a16="http://schemas.microsoft.com/office/drawing/2014/main" id="{C817496D-56CE-41FF-8E27-00087802AF3A}"/>
               </a:ext>
             </a:extLst>
           </p:cNvPr>
           <p:cNvSpPr>
-            <a:spLocks xmlns:a="http://schemas.openxmlformats.org/drawingml/2006/main" noGrp="1"/>
-          </p:cNvSpPr>
-          <p:nvPr/>
-        </p:nvSpPr>
-        <p:spPr>
-          <a:xfrm xmlns:a="http://schemas.openxmlformats.org/drawingml/2006/main">
+            <a:spLocks noGrp="1"/>
+          </p:cNvSpPr>
+          <p:nvPr/>
+        </p:nvSpPr>
+        <p:spPr>
+          <a:xfrm>
             <a:off x="419100" y="381000"/>
             <a:ext cx="8858250" cy="323850"/>
           </a:xfrm>
-          <a:prstGeom xmlns:a="http://schemas.openxmlformats.org/drawingml/2006/main" prst="rect">
-            <a:avLst/>
-          </a:prstGeom>
-          <a:noFill xmlns:a="http://schemas.openxmlformats.org/drawingml/2006/main"/>
-          <a:ln xmlns:a="http://schemas.openxmlformats.org/drawingml/2006/main" w="0">
-            <a:noFill/>
-            <a:prstDash val="solid"/>
-          </a:ln>
-        </p:spPr>
-        <p:txBody>
-          <a:bodyPr xmlns:a="http://schemas.openxmlformats.org/drawingml/2006/main" anchor="t">
-            <a:normAutofit fontScale="100000"/>
+          <a:prstGeom prst="rect">
+            <a:avLst/>
+          </a:prstGeom>
+          <a:noFill/>
+          <a:ln w="0">
+            <a:noFill/>
+            <a:prstDash val="solid"/>
+          </a:ln>
+        </p:spPr>
+        <p:txBody>
+          <a:bodyPr anchor="t">
+            <a:normAutofit/>
           </a:bodyPr>
-          <a:lstStyle xmlns:a="http://schemas.openxmlformats.org/drawingml/2006/main"/>
-          <a:p xmlns:a="http://schemas.openxmlformats.org/drawingml/2006/main">
+          <a:lstStyle/>
+          <a:p>
             <a:pPr algn="l">
               <a:defRPr sz="1200" b="1">
                 <a:solidFill>
@@ -1447,38 +1154,38 @@
       </p:sp>
       <p:sp>
         <p:nvSpPr>
-          <p:cNvPr id="2" name="">
-            <a:extLst xmlns:a="http://schemas.openxmlformats.org/drawingml/2006/main">
+          <p:cNvPr id="2" name="Rectangle 1">
+            <a:extLst>
               <a:ext uri="{FF2B5EF4-FFF2-40B4-BE49-F238E27FC236}">
                 <a16:creationId xmlns:a16="http://schemas.microsoft.com/office/drawing/2014/main" id="{A8C9FCB8-FBED-4325-8EC1-1E1AEEBEC44F}"/>
               </a:ext>
             </a:extLst>
           </p:cNvPr>
           <p:cNvSpPr>
-            <a:spLocks xmlns:a="http://schemas.openxmlformats.org/drawingml/2006/main" noGrp="1"/>
-          </p:cNvSpPr>
-          <p:nvPr/>
-        </p:nvSpPr>
-        <p:spPr>
-          <a:xfrm xmlns:a="http://schemas.openxmlformats.org/drawingml/2006/main">
+            <a:spLocks noGrp="1"/>
+          </p:cNvSpPr>
+          <p:nvPr/>
+        </p:nvSpPr>
+        <p:spPr>
+          <a:xfrm>
             <a:off x="419100" y="1790700"/>
             <a:ext cx="8096250" cy="1524000"/>
           </a:xfrm>
-          <a:prstGeom xmlns:a="http://schemas.openxmlformats.org/drawingml/2006/main" prst="rect">
-            <a:avLst/>
-          </a:prstGeom>
-          <a:noFill xmlns:a="http://schemas.openxmlformats.org/drawingml/2006/main"/>
-          <a:ln xmlns:a="http://schemas.openxmlformats.org/drawingml/2006/main" w="0">
-            <a:noFill/>
-            <a:prstDash val="solid"/>
-          </a:ln>
-        </p:spPr>
-        <p:txBody>
-          <a:bodyPr xmlns:a="http://schemas.openxmlformats.org/drawingml/2006/main" anchor="b">
+          <a:prstGeom prst="rect">
+            <a:avLst/>
+          </a:prstGeom>
+          <a:noFill/>
+          <a:ln w="0">
+            <a:noFill/>
+            <a:prstDash val="solid"/>
+          </a:ln>
+        </p:spPr>
+        <p:txBody>
+          <a:bodyPr anchor="b">
             <a:normAutofit fontScale="97917"/>
           </a:bodyPr>
-          <a:lstStyle xmlns:a="http://schemas.openxmlformats.org/drawingml/2006/main"/>
-          <a:p xmlns:a="http://schemas.openxmlformats.org/drawingml/2006/main">
+          <a:lstStyle/>
+          <a:p>
             <a:pPr algn="l">
               <a:defRPr sz="4800" b="1">
                 <a:solidFill>
@@ -1505,38 +1212,38 @@
       </p:sp>
       <p:sp>
         <p:nvSpPr>
-          <p:cNvPr id="3" name="">
-            <a:extLst xmlns:a="http://schemas.openxmlformats.org/drawingml/2006/main">
+          <p:cNvPr id="3" name="Rectangle 2">
+            <a:extLst>
               <a:ext uri="{FF2B5EF4-FFF2-40B4-BE49-F238E27FC236}">
                 <a16:creationId xmlns:a16="http://schemas.microsoft.com/office/drawing/2014/main" id="{2392DECB-C3E4-4A9D-9327-D14AFB6362BD}"/>
               </a:ext>
             </a:extLst>
           </p:cNvPr>
           <p:cNvSpPr>
-            <a:spLocks xmlns:a="http://schemas.openxmlformats.org/drawingml/2006/main" noGrp="1"/>
-          </p:cNvSpPr>
-          <p:nvPr/>
-        </p:nvSpPr>
-        <p:spPr>
-          <a:xfrm xmlns:a="http://schemas.openxmlformats.org/drawingml/2006/main">
+            <a:spLocks noGrp="1"/>
+          </p:cNvSpPr>
+          <p:nvPr/>
+        </p:nvSpPr>
+        <p:spPr>
+          <a:xfrm>
             <a:off x="419100" y="3638550"/>
             <a:ext cx="6667500" cy="857250"/>
           </a:xfrm>
-          <a:prstGeom xmlns:a="http://schemas.openxmlformats.org/drawingml/2006/main" prst="rect">
-            <a:avLst/>
-          </a:prstGeom>
-          <a:noFill xmlns:a="http://schemas.openxmlformats.org/drawingml/2006/main"/>
-          <a:ln xmlns:a="http://schemas.openxmlformats.org/drawingml/2006/main" w="0">
-            <a:noFill/>
-            <a:prstDash val="solid"/>
-          </a:ln>
-        </p:spPr>
-        <p:txBody>
-          <a:bodyPr xmlns:a="http://schemas.openxmlformats.org/drawingml/2006/main" anchor="t">
-            <a:normAutofit fontScale="100000"/>
+          <a:prstGeom prst="rect">
+            <a:avLst/>
+          </a:prstGeom>
+          <a:noFill/>
+          <a:ln w="0">
+            <a:noFill/>
+            <a:prstDash val="solid"/>
+          </a:ln>
+        </p:spPr>
+        <p:txBody>
+          <a:bodyPr anchor="t">
+            <a:normAutofit/>
           </a:bodyPr>
-          <a:lstStyle xmlns:a="http://schemas.openxmlformats.org/drawingml/2006/main"/>
-          <a:p xmlns:a="http://schemas.openxmlformats.org/drawingml/2006/main">
+          <a:lstStyle/>
+          <a:p>
             <a:pPr algn="l">
               <a:defRPr sz="1950" b="0">
                 <a:solidFill>
@@ -1563,102 +1270,102 @@
       </p:sp>
       <p:sp>
         <p:nvSpPr>
-          <p:cNvPr id="4" name="">
-            <a:extLst xmlns:a="http://schemas.openxmlformats.org/drawingml/2006/main">
+          <p:cNvPr id="4" name="Rectangle 3">
+            <a:extLst>
               <a:ext uri="{FF2B5EF4-FFF2-40B4-BE49-F238E27FC236}">
                 <a16:creationId xmlns:a16="http://schemas.microsoft.com/office/drawing/2014/main" id="{DD5F2437-A96B-4A28-BAC9-CBD5BDDDE571}"/>
               </a:ext>
             </a:extLst>
           </p:cNvPr>
           <p:cNvSpPr>
-            <a:spLocks xmlns:a="http://schemas.openxmlformats.org/drawingml/2006/main" noGrp="1"/>
-          </p:cNvSpPr>
-          <p:nvPr/>
-        </p:nvSpPr>
-        <p:spPr>
-          <a:xfrm xmlns:a="http://schemas.openxmlformats.org/drawingml/2006/main">
+            <a:spLocks noGrp="1"/>
+          </p:cNvSpPr>
+          <p:nvPr/>
+        </p:nvSpPr>
+        <p:spPr>
+          <a:xfrm>
             <a:off x="8991600" y="381000"/>
             <a:ext cx="2781300" cy="5619750"/>
           </a:xfrm>
-          <a:prstGeom xmlns:a="http://schemas.openxmlformats.org/drawingml/2006/main" prst="rect">
-            <a:avLst/>
-          </a:prstGeom>
-          <a:solidFill xmlns:a="http://schemas.openxmlformats.org/drawingml/2006/main">
+          <a:prstGeom prst="rect">
+            <a:avLst/>
+          </a:prstGeom>
+          <a:solidFill>
             <a:srgbClr val="D9F0FB"/>
           </a:solidFill>
-          <a:ln xmlns:a="http://schemas.openxmlformats.org/drawingml/2006/main" w="0">
-            <a:noFill/>
-            <a:prstDash val="solid"/>
-          </a:ln>
-        </p:spPr>
-      </p:sp>
-      <p:sp>
-        <p:nvSpPr>
-          <p:cNvPr id="5" name="">
-            <a:extLst xmlns:a="http://schemas.openxmlformats.org/drawingml/2006/main">
+          <a:ln w="0">
+            <a:noFill/>
+            <a:prstDash val="solid"/>
+          </a:ln>
+        </p:spPr>
+      </p:sp>
+      <p:sp>
+        <p:nvSpPr>
+          <p:cNvPr id="5" name="Rounded Rectangle 4">
+            <a:extLst>
               <a:ext uri="{FF2B5EF4-FFF2-40B4-BE49-F238E27FC236}">
                 <a16:creationId xmlns:a16="http://schemas.microsoft.com/office/drawing/2014/main" id="{CE795C4C-9F81-4523-A550-13B1C082E319}"/>
               </a:ext>
             </a:extLst>
           </p:cNvPr>
           <p:cNvSpPr>
-            <a:spLocks xmlns:a="http://schemas.openxmlformats.org/drawingml/2006/main" noGrp="1"/>
-          </p:cNvSpPr>
-          <p:nvPr/>
-        </p:nvSpPr>
-        <p:spPr>
-          <a:xfrm xmlns:a="http://schemas.openxmlformats.org/drawingml/2006/main">
+            <a:spLocks noGrp="1"/>
+          </p:cNvSpPr>
+          <p:nvPr/>
+        </p:nvSpPr>
+        <p:spPr>
+          <a:xfrm>
             <a:off x="9525000" y="1504950"/>
             <a:ext cx="1714500" cy="1714500"/>
           </a:xfrm>
-          <a:prstGeom xmlns:a="http://schemas.openxmlformats.org/drawingml/2006/main" prst="roundRect">
+          <a:prstGeom prst="roundRect">
             <a:avLst>
               <a:gd name="adj" fmla="val 6667"/>
             </a:avLst>
           </a:prstGeom>
-          <a:solidFill xmlns:a="http://schemas.openxmlformats.org/drawingml/2006/main">
+          <a:solidFill>
             <a:srgbClr val="3D8DFF"/>
           </a:solidFill>
-          <a:ln xmlns:a="http://schemas.openxmlformats.org/drawingml/2006/main" w="0">
-            <a:noFill/>
-            <a:prstDash val="solid"/>
-          </a:ln>
-        </p:spPr>
-      </p:sp>
-      <p:sp>
-        <p:nvSpPr>
-          <p:cNvPr id="6" name="">
-            <a:extLst xmlns:a="http://schemas.openxmlformats.org/drawingml/2006/main">
+          <a:ln w="0">
+            <a:noFill/>
+            <a:prstDash val="solid"/>
+          </a:ln>
+        </p:spPr>
+      </p:sp>
+      <p:sp>
+        <p:nvSpPr>
+          <p:cNvPr id="6" name="Rectangle 5">
+            <a:extLst>
               <a:ext uri="{FF2B5EF4-FFF2-40B4-BE49-F238E27FC236}">
                 <a16:creationId xmlns:a16="http://schemas.microsoft.com/office/drawing/2014/main" id="{320D22BC-6CE2-4BDD-BF4A-8F277696396A}"/>
               </a:ext>
             </a:extLst>
           </p:cNvPr>
           <p:cNvSpPr>
-            <a:spLocks xmlns:a="http://schemas.openxmlformats.org/drawingml/2006/main" noGrp="1"/>
-          </p:cNvSpPr>
-          <p:nvPr/>
-        </p:nvSpPr>
-        <p:spPr>
-          <a:xfrm xmlns:a="http://schemas.openxmlformats.org/drawingml/2006/main">
+            <a:spLocks noGrp="1"/>
+          </p:cNvSpPr>
+          <p:nvPr/>
+        </p:nvSpPr>
+        <p:spPr>
+          <a:xfrm>
             <a:off x="9734550" y="2114550"/>
             <a:ext cx="1295400" cy="514350"/>
           </a:xfrm>
-          <a:prstGeom xmlns:a="http://schemas.openxmlformats.org/drawingml/2006/main" prst="rect">
-            <a:avLst/>
-          </a:prstGeom>
-          <a:noFill xmlns:a="http://schemas.openxmlformats.org/drawingml/2006/main"/>
-          <a:ln xmlns:a="http://schemas.openxmlformats.org/drawingml/2006/main" w="0">
-            <a:noFill/>
-            <a:prstDash val="solid"/>
-          </a:ln>
-        </p:spPr>
-        <p:txBody>
-          <a:bodyPr xmlns:a="http://schemas.openxmlformats.org/drawingml/2006/main" anchor="ctr">
-            <a:normAutofit fontScale="100000"/>
+          <a:prstGeom prst="rect">
+            <a:avLst/>
+          </a:prstGeom>
+          <a:noFill/>
+          <a:ln w="0">
+            <a:noFill/>
+            <a:prstDash val="solid"/>
+          </a:ln>
+        </p:spPr>
+        <p:txBody>
+          <a:bodyPr anchor="ctr">
+            <a:normAutofit/>
           </a:bodyPr>
-          <a:lstStyle xmlns:a="http://schemas.openxmlformats.org/drawingml/2006/main"/>
-          <a:p xmlns:a="http://schemas.openxmlformats.org/drawingml/2006/main">
+          <a:lstStyle/>
+          <a:p>
             <a:pPr algn="ctr">
               <a:defRPr sz="1875" b="1">
                 <a:solidFill>
@@ -1685,38 +1392,38 @@
       </p:sp>
       <p:sp>
         <p:nvSpPr>
-          <p:cNvPr id="7" name="">
-            <a:extLst xmlns:a="http://schemas.openxmlformats.org/drawingml/2006/main">
+          <p:cNvPr id="7" name="Rectangle 6">
+            <a:extLst>
               <a:ext uri="{FF2B5EF4-FFF2-40B4-BE49-F238E27FC236}">
                 <a16:creationId xmlns:a16="http://schemas.microsoft.com/office/drawing/2014/main" id="{4F30EBAA-98D3-4982-A153-3EABB3DF28D1}"/>
               </a:ext>
             </a:extLst>
           </p:cNvPr>
           <p:cNvSpPr>
-            <a:spLocks xmlns:a="http://schemas.openxmlformats.org/drawingml/2006/main" noGrp="1"/>
-          </p:cNvSpPr>
-          <p:nvPr/>
-        </p:nvSpPr>
-        <p:spPr>
-          <a:xfrm xmlns:a="http://schemas.openxmlformats.org/drawingml/2006/main">
+            <a:spLocks noGrp="1"/>
+          </p:cNvSpPr>
+          <p:nvPr/>
+        </p:nvSpPr>
+        <p:spPr>
+          <a:xfrm>
             <a:off x="419100" y="6419850"/>
             <a:ext cx="3429000" cy="209550"/>
           </a:xfrm>
-          <a:prstGeom xmlns:a="http://schemas.openxmlformats.org/drawingml/2006/main" prst="rect">
-            <a:avLst/>
-          </a:prstGeom>
-          <a:noFill xmlns:a="http://schemas.openxmlformats.org/drawingml/2006/main"/>
-          <a:ln xmlns:a="http://schemas.openxmlformats.org/drawingml/2006/main" w="0">
-            <a:noFill/>
-            <a:prstDash val="solid"/>
-          </a:ln>
-        </p:spPr>
-        <p:txBody>
-          <a:bodyPr xmlns:a="http://schemas.openxmlformats.org/drawingml/2006/main" anchor="t">
+          <a:prstGeom prst="rect">
+            <a:avLst/>
+          </a:prstGeom>
+          <a:noFill/>
+          <a:ln w="0">
+            <a:noFill/>
+            <a:prstDash val="solid"/>
+          </a:ln>
+        </p:spPr>
+        <p:txBody>
+          <a:bodyPr anchor="t">
             <a:normAutofit fontScale="86111"/>
           </a:bodyPr>
-          <a:lstStyle xmlns:a="http://schemas.openxmlformats.org/drawingml/2006/main"/>
-          <a:p xmlns:a="http://schemas.openxmlformats.org/drawingml/2006/main">
+          <a:lstStyle/>
+          <a:p>
             <a:pPr algn="l">
               <a:defRPr sz="900" b="0">
                 <a:solidFill>
@@ -1743,38 +1450,38 @@
       </p:sp>
       <p:sp>
         <p:nvSpPr>
-          <p:cNvPr id="8" name="">
-            <a:extLst xmlns:a="http://schemas.openxmlformats.org/drawingml/2006/main">
+          <p:cNvPr id="8" name="Rectangle 7">
+            <a:extLst>
               <a:ext uri="{FF2B5EF4-FFF2-40B4-BE49-F238E27FC236}">
                 <a16:creationId xmlns:a16="http://schemas.microsoft.com/office/drawing/2014/main" id="{7FCAAE1A-CFBE-4378-BFF9-3453705FBE51}"/>
               </a:ext>
             </a:extLst>
           </p:cNvPr>
           <p:cNvSpPr>
-            <a:spLocks xmlns:a="http://schemas.openxmlformats.org/drawingml/2006/main" noGrp="1"/>
-          </p:cNvSpPr>
-          <p:nvPr/>
-        </p:nvSpPr>
-        <p:spPr>
-          <a:xfrm xmlns:a="http://schemas.openxmlformats.org/drawingml/2006/main">
+            <a:spLocks noGrp="1"/>
+          </p:cNvSpPr>
+          <p:nvPr/>
+        </p:nvSpPr>
+        <p:spPr>
+          <a:xfrm>
             <a:off x="11239500" y="6419850"/>
             <a:ext cx="523875" cy="209550"/>
           </a:xfrm>
-          <a:prstGeom xmlns:a="http://schemas.openxmlformats.org/drawingml/2006/main" prst="rect">
-            <a:avLst/>
-          </a:prstGeom>
-          <a:noFill xmlns:a="http://schemas.openxmlformats.org/drawingml/2006/main"/>
-          <a:ln xmlns:a="http://schemas.openxmlformats.org/drawingml/2006/main" w="0">
-            <a:noFill/>
-            <a:prstDash val="solid"/>
-          </a:ln>
-        </p:spPr>
-        <p:txBody>
-          <a:bodyPr xmlns:a="http://schemas.openxmlformats.org/drawingml/2006/main" anchor="t">
+          <a:prstGeom prst="rect">
+            <a:avLst/>
+          </a:prstGeom>
+          <a:noFill/>
+          <a:ln w="0">
+            <a:noFill/>
+            <a:prstDash val="solid"/>
+          </a:ln>
+        </p:spPr>
+        <p:txBody>
+          <a:bodyPr anchor="t">
             <a:normAutofit fontScale="86111"/>
           </a:bodyPr>
-          <a:lstStyle xmlns:a="http://schemas.openxmlformats.org/drawingml/2006/main"/>
-          <a:p xmlns:a="http://schemas.openxmlformats.org/drawingml/2006/main">
+          <a:lstStyle/>
+          <a:p>
             <a:pPr algn="r">
               <a:defRPr sz="900" b="0">
                 <a:solidFill>
@@ -1806,17 +1513,21 @@
       </p:ext>
     </p:extLst>
   </p:cSld>
+  <p:clrMapOvr>
+    <a:masterClrMapping/>
+  </p:clrMapOvr>
 </p:sld>
 </file>
 
 <file path=ppt/slides/slide2.xml><?xml version="1.0" encoding="utf-8"?>
-<p:sld xmlns:p="http://schemas.openxmlformats.org/presentationml/2006/main">
+<p:sld xmlns:a="http://schemas.openxmlformats.org/drawingml/2006/main" xmlns:r="http://schemas.openxmlformats.org/officeDocument/2006/relationships" xmlns:p="http://schemas.openxmlformats.org/presentationml/2006/main">
   <p:cSld>
     <p:bg>
       <p:bgPr>
-        <a:solidFill xmlns:a="http://schemas.openxmlformats.org/drawingml/2006/main">
+        <a:solidFill>
           <a:srgbClr val="FFFFFF"/>
         </a:solidFill>
+        <a:effectLst/>
       </p:bgPr>
     </p:bg>
     <p:spTree>
@@ -1826,42 +1537,47 @@
         <p:nvPr/>
       </p:nvGrpSpPr>
       <p:grpSpPr>
-        <a:xfrm xmlns:a="http://schemas.openxmlformats.org/drawingml/2006/main"/>
+        <a:xfrm>
+          <a:off x="0" y="0"/>
+          <a:ext cx="0" cy="0"/>
+          <a:chOff x="0" y="0"/>
+          <a:chExt cx="0" cy="0"/>
+        </a:xfrm>
       </p:grpSpPr>
       <p:sp>
         <p:nvSpPr>
-          <p:cNvPr id="14" name="">
-            <a:extLst xmlns:a="http://schemas.openxmlformats.org/drawingml/2006/main">
+          <p:cNvPr id="14" name="Rectangle 13">
+            <a:extLst>
               <a:ext uri="{FF2B5EF4-FFF2-40B4-BE49-F238E27FC236}">
                 <a16:creationId xmlns:a16="http://schemas.microsoft.com/office/drawing/2014/main" id="{96405EE4-ED57-450B-AE1F-2F3ABE9D15F7}"/>
               </a:ext>
             </a:extLst>
           </p:cNvPr>
           <p:cNvSpPr>
-            <a:spLocks xmlns:a="http://schemas.openxmlformats.org/drawingml/2006/main" noGrp="1"/>
-          </p:cNvSpPr>
-          <p:nvPr/>
-        </p:nvSpPr>
-        <p:spPr>
-          <a:xfrm xmlns:a="http://schemas.openxmlformats.org/drawingml/2006/main">
+            <a:spLocks noGrp="1"/>
+          </p:cNvSpPr>
+          <p:nvPr/>
+        </p:nvSpPr>
+        <p:spPr>
+          <a:xfrm>
             <a:off x="419100" y="361950"/>
             <a:ext cx="10477500" cy="723900"/>
           </a:xfrm>
-          <a:prstGeom xmlns:a="http://schemas.openxmlformats.org/drawingml/2006/main" prst="rect">
-            <a:avLst/>
-          </a:prstGeom>
-          <a:noFill xmlns:a="http://schemas.openxmlformats.org/drawingml/2006/main"/>
-          <a:ln xmlns:a="http://schemas.openxmlformats.org/drawingml/2006/main" w="0">
-            <a:noFill/>
-            <a:prstDash val="solid"/>
-          </a:ln>
-        </p:spPr>
-        <p:txBody>
-          <a:bodyPr xmlns:a="http://schemas.openxmlformats.org/drawingml/2006/main" anchor="t">
-            <a:normAutofit fontScale="100000"/>
+          <a:prstGeom prst="rect">
+            <a:avLst/>
+          </a:prstGeom>
+          <a:noFill/>
+          <a:ln w="0">
+            <a:noFill/>
+            <a:prstDash val="solid"/>
+          </a:ln>
+        </p:spPr>
+        <p:txBody>
+          <a:bodyPr anchor="t">
+            <a:normAutofit/>
           </a:bodyPr>
-          <a:lstStyle xmlns:a="http://schemas.openxmlformats.org/drawingml/2006/main"/>
-          <a:p xmlns:a="http://schemas.openxmlformats.org/drawingml/2006/main">
+          <a:lstStyle/>
+          <a:p>
             <a:pPr algn="l">
               <a:defRPr sz="3000" b="1">
                 <a:solidFill>
@@ -1888,71 +1604,71 @@
       </p:sp>
       <p:sp>
         <p:nvSpPr>
-          <p:cNvPr id="2" name="">
-            <a:extLst xmlns:a="http://schemas.openxmlformats.org/drawingml/2006/main">
+          <p:cNvPr id="2" name="Rounded Rectangle 1">
+            <a:extLst>
               <a:ext uri="{FF2B5EF4-FFF2-40B4-BE49-F238E27FC236}">
                 <a16:creationId xmlns:a16="http://schemas.microsoft.com/office/drawing/2014/main" id="{E06A262D-8380-4A5D-963E-838781F05109}"/>
               </a:ext>
             </a:extLst>
           </p:cNvPr>
           <p:cNvSpPr>
-            <a:spLocks xmlns:a="http://schemas.openxmlformats.org/drawingml/2006/main" noGrp="1"/>
-          </p:cNvSpPr>
-          <p:nvPr/>
-        </p:nvSpPr>
-        <p:spPr>
-          <a:xfrm xmlns:a="http://schemas.openxmlformats.org/drawingml/2006/main">
+            <a:spLocks noGrp="1"/>
+          </p:cNvSpPr>
+          <p:nvPr/>
+        </p:nvSpPr>
+        <p:spPr>
+          <a:xfrm>
             <a:off x="419100" y="1714500"/>
             <a:ext cx="3505200" cy="2647950"/>
           </a:xfrm>
-          <a:prstGeom xmlns:a="http://schemas.openxmlformats.org/drawingml/2006/main" prst="roundRect">
+          <a:prstGeom prst="roundRect">
             <a:avLst>
               <a:gd name="adj" fmla="val 4317"/>
             </a:avLst>
           </a:prstGeom>
-          <a:solidFill xmlns:a="http://schemas.openxmlformats.org/drawingml/2006/main">
+          <a:solidFill>
             <a:srgbClr val="DDF6E8"/>
           </a:solidFill>
-          <a:ln xmlns:a="http://schemas.openxmlformats.org/drawingml/2006/main" w="0">
-            <a:noFill/>
-            <a:prstDash val="solid"/>
-          </a:ln>
-        </p:spPr>
-      </p:sp>
-      <p:sp>
-        <p:nvSpPr>
-          <p:cNvPr id="3" name="">
-            <a:extLst xmlns:a="http://schemas.openxmlformats.org/drawingml/2006/main">
+          <a:ln w="0">
+            <a:noFill/>
+            <a:prstDash val="solid"/>
+          </a:ln>
+        </p:spPr>
+      </p:sp>
+      <p:sp>
+        <p:nvSpPr>
+          <p:cNvPr id="3" name="Rectangle 2">
+            <a:extLst>
               <a:ext uri="{FF2B5EF4-FFF2-40B4-BE49-F238E27FC236}">
                 <a16:creationId xmlns:a16="http://schemas.microsoft.com/office/drawing/2014/main" id="{3F90BF53-1576-4DA9-AD63-D36F9E8314B3}"/>
               </a:ext>
             </a:extLst>
           </p:cNvPr>
           <p:cNvSpPr>
-            <a:spLocks xmlns:a="http://schemas.openxmlformats.org/drawingml/2006/main" noGrp="1"/>
-          </p:cNvSpPr>
-          <p:nvPr/>
-        </p:nvSpPr>
-        <p:spPr>
-          <a:xfrm xmlns:a="http://schemas.openxmlformats.org/drawingml/2006/main">
+            <a:spLocks noGrp="1"/>
+          </p:cNvSpPr>
+          <p:nvPr/>
+        </p:nvSpPr>
+        <p:spPr>
+          <a:xfrm>
             <a:off x="666750" y="2133600"/>
             <a:ext cx="2952750" cy="904875"/>
           </a:xfrm>
-          <a:prstGeom xmlns:a="http://schemas.openxmlformats.org/drawingml/2006/main" prst="rect">
-            <a:avLst/>
-          </a:prstGeom>
-          <a:noFill xmlns:a="http://schemas.openxmlformats.org/drawingml/2006/main"/>
-          <a:ln xmlns:a="http://schemas.openxmlformats.org/drawingml/2006/main" w="0">
-            <a:noFill/>
-            <a:prstDash val="solid"/>
-          </a:ln>
-        </p:spPr>
-        <p:txBody>
-          <a:bodyPr xmlns:a="http://schemas.openxmlformats.org/drawingml/2006/main" anchor="t">
-            <a:normAutofit fontScale="100000"/>
+          <a:prstGeom prst="rect">
+            <a:avLst/>
+          </a:prstGeom>
+          <a:noFill/>
+          <a:ln w="0">
+            <a:noFill/>
+            <a:prstDash val="solid"/>
+          </a:ln>
+        </p:spPr>
+        <p:txBody>
+          <a:bodyPr anchor="t">
+            <a:normAutofit/>
           </a:bodyPr>
-          <a:lstStyle xmlns:a="http://schemas.openxmlformats.org/drawingml/2006/main"/>
-          <a:p xmlns:a="http://schemas.openxmlformats.org/drawingml/2006/main">
+          <a:lstStyle/>
+          <a:p>
             <a:pPr algn="l">
               <a:defRPr sz="4650" b="1">
                 <a:solidFill>
@@ -1979,38 +1695,38 @@
       </p:sp>
       <p:sp>
         <p:nvSpPr>
-          <p:cNvPr id="4" name="">
-            <a:extLst xmlns:a="http://schemas.openxmlformats.org/drawingml/2006/main">
+          <p:cNvPr id="4" name="Rectangle 3">
+            <a:extLst>
               <a:ext uri="{FF2B5EF4-FFF2-40B4-BE49-F238E27FC236}">
                 <a16:creationId xmlns:a16="http://schemas.microsoft.com/office/drawing/2014/main" id="{D614C470-F2AF-4D5C-AEC7-B579794528AA}"/>
               </a:ext>
             </a:extLst>
           </p:cNvPr>
           <p:cNvSpPr>
-            <a:spLocks xmlns:a="http://schemas.openxmlformats.org/drawingml/2006/main" noGrp="1"/>
-          </p:cNvSpPr>
-          <p:nvPr/>
-        </p:nvSpPr>
-        <p:spPr>
-          <a:xfrm xmlns:a="http://schemas.openxmlformats.org/drawingml/2006/main">
+            <a:spLocks noGrp="1"/>
+          </p:cNvSpPr>
+          <p:nvPr/>
+        </p:nvSpPr>
+        <p:spPr>
+          <a:xfrm>
             <a:off x="666750" y="3257550"/>
             <a:ext cx="2952750" cy="457200"/>
           </a:xfrm>
-          <a:prstGeom xmlns:a="http://schemas.openxmlformats.org/drawingml/2006/main" prst="rect">
-            <a:avLst/>
-          </a:prstGeom>
-          <a:noFill xmlns:a="http://schemas.openxmlformats.org/drawingml/2006/main"/>
-          <a:ln xmlns:a="http://schemas.openxmlformats.org/drawingml/2006/main" w="0">
-            <a:noFill/>
-            <a:prstDash val="solid"/>
-          </a:ln>
-        </p:spPr>
-        <p:txBody>
-          <a:bodyPr xmlns:a="http://schemas.openxmlformats.org/drawingml/2006/main" anchor="t">
-            <a:normAutofit fontScale="100000"/>
+          <a:prstGeom prst="rect">
+            <a:avLst/>
+          </a:prstGeom>
+          <a:noFill/>
+          <a:ln w="0">
+            <a:noFill/>
+            <a:prstDash val="solid"/>
+          </a:ln>
+        </p:spPr>
+        <p:txBody>
+          <a:bodyPr anchor="t">
+            <a:normAutofit/>
           </a:bodyPr>
-          <a:lstStyle xmlns:a="http://schemas.openxmlformats.org/drawingml/2006/main"/>
-          <a:p xmlns:a="http://schemas.openxmlformats.org/drawingml/2006/main">
+          <a:lstStyle/>
+          <a:p>
             <a:pPr algn="l">
               <a:defRPr sz="1800" b="1">
                 <a:solidFill>
@@ -2037,71 +1753,71 @@
       </p:sp>
       <p:sp>
         <p:nvSpPr>
-          <p:cNvPr id="5" name="">
-            <a:extLst xmlns:a="http://schemas.openxmlformats.org/drawingml/2006/main">
+          <p:cNvPr id="5" name="Rounded Rectangle 4">
+            <a:extLst>
               <a:ext uri="{FF2B5EF4-FFF2-40B4-BE49-F238E27FC236}">
                 <a16:creationId xmlns:a16="http://schemas.microsoft.com/office/drawing/2014/main" id="{EDFE1931-0FA5-4AA0-BCC6-8BE4D10C16A4}"/>
               </a:ext>
             </a:extLst>
           </p:cNvPr>
           <p:cNvSpPr>
-            <a:spLocks xmlns:a="http://schemas.openxmlformats.org/drawingml/2006/main" noGrp="1"/>
-          </p:cNvSpPr>
-          <p:nvPr/>
-        </p:nvSpPr>
-        <p:spPr>
-          <a:xfrm xmlns:a="http://schemas.openxmlformats.org/drawingml/2006/main">
+            <a:spLocks noGrp="1"/>
+          </p:cNvSpPr>
+          <p:nvPr/>
+        </p:nvSpPr>
+        <p:spPr>
+          <a:xfrm>
             <a:off x="4343400" y="1714500"/>
             <a:ext cx="3505200" cy="2647950"/>
           </a:xfrm>
-          <a:prstGeom xmlns:a="http://schemas.openxmlformats.org/drawingml/2006/main" prst="roundRect">
+          <a:prstGeom prst="roundRect">
             <a:avLst>
               <a:gd name="adj" fmla="val 4317"/>
             </a:avLst>
           </a:prstGeom>
-          <a:solidFill xmlns:a="http://schemas.openxmlformats.org/drawingml/2006/main">
+          <a:solidFill>
             <a:srgbClr val="D9F0FB"/>
           </a:solidFill>
-          <a:ln xmlns:a="http://schemas.openxmlformats.org/drawingml/2006/main" w="0">
-            <a:noFill/>
-            <a:prstDash val="solid"/>
-          </a:ln>
-        </p:spPr>
-      </p:sp>
-      <p:sp>
-        <p:nvSpPr>
-          <p:cNvPr id="6" name="">
-            <a:extLst xmlns:a="http://schemas.openxmlformats.org/drawingml/2006/main">
+          <a:ln w="0">
+            <a:noFill/>
+            <a:prstDash val="solid"/>
+          </a:ln>
+        </p:spPr>
+      </p:sp>
+      <p:sp>
+        <p:nvSpPr>
+          <p:cNvPr id="6" name="Rectangle 5">
+            <a:extLst>
               <a:ext uri="{FF2B5EF4-FFF2-40B4-BE49-F238E27FC236}">
                 <a16:creationId xmlns:a16="http://schemas.microsoft.com/office/drawing/2014/main" id="{7B973502-79D9-4D57-A91A-543B53506BCC}"/>
               </a:ext>
             </a:extLst>
           </p:cNvPr>
           <p:cNvSpPr>
-            <a:spLocks xmlns:a="http://schemas.openxmlformats.org/drawingml/2006/main" noGrp="1"/>
-          </p:cNvSpPr>
-          <p:nvPr/>
-        </p:nvSpPr>
-        <p:spPr>
-          <a:xfrm xmlns:a="http://schemas.openxmlformats.org/drawingml/2006/main">
+            <a:spLocks noGrp="1"/>
+          </p:cNvSpPr>
+          <p:nvPr/>
+        </p:nvSpPr>
+        <p:spPr>
+          <a:xfrm>
             <a:off x="4591050" y="2133600"/>
             <a:ext cx="2952750" cy="904875"/>
           </a:xfrm>
-          <a:prstGeom xmlns:a="http://schemas.openxmlformats.org/drawingml/2006/main" prst="rect">
-            <a:avLst/>
-          </a:prstGeom>
-          <a:noFill xmlns:a="http://schemas.openxmlformats.org/drawingml/2006/main"/>
-          <a:ln xmlns:a="http://schemas.openxmlformats.org/drawingml/2006/main" w="0">
-            <a:noFill/>
-            <a:prstDash val="solid"/>
-          </a:ln>
-        </p:spPr>
-        <p:txBody>
-          <a:bodyPr xmlns:a="http://schemas.openxmlformats.org/drawingml/2006/main" anchor="t">
-            <a:normAutofit fontScale="100000"/>
+          <a:prstGeom prst="rect">
+            <a:avLst/>
+          </a:prstGeom>
+          <a:noFill/>
+          <a:ln w="0">
+            <a:noFill/>
+            <a:prstDash val="solid"/>
+          </a:ln>
+        </p:spPr>
+        <p:txBody>
+          <a:bodyPr anchor="t">
+            <a:normAutofit/>
           </a:bodyPr>
-          <a:lstStyle xmlns:a="http://schemas.openxmlformats.org/drawingml/2006/main"/>
-          <a:p xmlns:a="http://schemas.openxmlformats.org/drawingml/2006/main">
+          <a:lstStyle/>
+          <a:p>
             <a:pPr algn="l">
               <a:defRPr sz="4650" b="1">
                 <a:solidFill>
@@ -2128,38 +1844,38 @@
       </p:sp>
       <p:sp>
         <p:nvSpPr>
-          <p:cNvPr id="7" name="">
-            <a:extLst xmlns:a="http://schemas.openxmlformats.org/drawingml/2006/main">
+          <p:cNvPr id="7" name="Rectangle 6">
+            <a:extLst>
               <a:ext uri="{FF2B5EF4-FFF2-40B4-BE49-F238E27FC236}">
                 <a16:creationId xmlns:a16="http://schemas.microsoft.com/office/drawing/2014/main" id="{8A890805-7108-41D2-A6FC-06916F58A713}"/>
               </a:ext>
             </a:extLst>
           </p:cNvPr>
           <p:cNvSpPr>
-            <a:spLocks xmlns:a="http://schemas.openxmlformats.org/drawingml/2006/main" noGrp="1"/>
-          </p:cNvSpPr>
-          <p:nvPr/>
-        </p:nvSpPr>
-        <p:spPr>
-          <a:xfrm xmlns:a="http://schemas.openxmlformats.org/drawingml/2006/main">
+            <a:spLocks noGrp="1"/>
+          </p:cNvSpPr>
+          <p:nvPr/>
+        </p:nvSpPr>
+        <p:spPr>
+          <a:xfrm>
             <a:off x="4591050" y="3257550"/>
             <a:ext cx="2952750" cy="457200"/>
           </a:xfrm>
-          <a:prstGeom xmlns:a="http://schemas.openxmlformats.org/drawingml/2006/main" prst="rect">
-            <a:avLst/>
-          </a:prstGeom>
-          <a:noFill xmlns:a="http://schemas.openxmlformats.org/drawingml/2006/main"/>
-          <a:ln xmlns:a="http://schemas.openxmlformats.org/drawingml/2006/main" w="0">
-            <a:noFill/>
-            <a:prstDash val="solid"/>
-          </a:ln>
-        </p:spPr>
-        <p:txBody>
-          <a:bodyPr xmlns:a="http://schemas.openxmlformats.org/drawingml/2006/main" anchor="t">
-            <a:normAutofit fontScale="100000"/>
+          <a:prstGeom prst="rect">
+            <a:avLst/>
+          </a:prstGeom>
+          <a:noFill/>
+          <a:ln w="0">
+            <a:noFill/>
+            <a:prstDash val="solid"/>
+          </a:ln>
+        </p:spPr>
+        <p:txBody>
+          <a:bodyPr anchor="t">
+            <a:normAutofit/>
           </a:bodyPr>
-          <a:lstStyle xmlns:a="http://schemas.openxmlformats.org/drawingml/2006/main"/>
-          <a:p xmlns:a="http://schemas.openxmlformats.org/drawingml/2006/main">
+          <a:lstStyle/>
+          <a:p>
             <a:pPr algn="l">
               <a:defRPr sz="1800" b="1">
                 <a:solidFill>
@@ -2186,71 +1902,71 @@
       </p:sp>
       <p:sp>
         <p:nvSpPr>
-          <p:cNvPr id="8" name="">
-            <a:extLst xmlns:a="http://schemas.openxmlformats.org/drawingml/2006/main">
+          <p:cNvPr id="8" name="Rounded Rectangle 7">
+            <a:extLst>
               <a:ext uri="{FF2B5EF4-FFF2-40B4-BE49-F238E27FC236}">
                 <a16:creationId xmlns:a16="http://schemas.microsoft.com/office/drawing/2014/main" id="{123E5C7B-9F0B-4C7C-A5B0-A9B8222F6B68}"/>
               </a:ext>
             </a:extLst>
           </p:cNvPr>
           <p:cNvSpPr>
-            <a:spLocks xmlns:a="http://schemas.openxmlformats.org/drawingml/2006/main" noGrp="1"/>
-          </p:cNvSpPr>
-          <p:nvPr/>
-        </p:nvSpPr>
-        <p:spPr>
-          <a:xfrm xmlns:a="http://schemas.openxmlformats.org/drawingml/2006/main">
+            <a:spLocks noGrp="1"/>
+          </p:cNvSpPr>
+          <p:nvPr/>
+        </p:nvSpPr>
+        <p:spPr>
+          <a:xfrm>
             <a:off x="8267700" y="1714500"/>
             <a:ext cx="3505200" cy="2647950"/>
           </a:xfrm>
-          <a:prstGeom xmlns:a="http://schemas.openxmlformats.org/drawingml/2006/main" prst="roundRect">
+          <a:prstGeom prst="roundRect">
             <a:avLst>
               <a:gd name="adj" fmla="val 4317"/>
             </a:avLst>
           </a:prstGeom>
-          <a:solidFill xmlns:a="http://schemas.openxmlformats.org/drawingml/2006/main">
+          <a:solidFill>
             <a:srgbClr val="FDE2E2"/>
           </a:solidFill>
-          <a:ln xmlns:a="http://schemas.openxmlformats.org/drawingml/2006/main" w="0">
-            <a:noFill/>
-            <a:prstDash val="solid"/>
-          </a:ln>
-        </p:spPr>
-      </p:sp>
-      <p:sp>
-        <p:nvSpPr>
-          <p:cNvPr id="9" name="">
-            <a:extLst xmlns:a="http://schemas.openxmlformats.org/drawingml/2006/main">
+          <a:ln w="0">
+            <a:noFill/>
+            <a:prstDash val="solid"/>
+          </a:ln>
+        </p:spPr>
+      </p:sp>
+      <p:sp>
+        <p:nvSpPr>
+          <p:cNvPr id="9" name="Rectangle 8">
+            <a:extLst>
               <a:ext uri="{FF2B5EF4-FFF2-40B4-BE49-F238E27FC236}">
                 <a16:creationId xmlns:a16="http://schemas.microsoft.com/office/drawing/2014/main" id="{6015389C-2EF0-47D3-A214-552AD736194A}"/>
               </a:ext>
             </a:extLst>
           </p:cNvPr>
           <p:cNvSpPr>
-            <a:spLocks xmlns:a="http://schemas.openxmlformats.org/drawingml/2006/main" noGrp="1"/>
-          </p:cNvSpPr>
-          <p:nvPr/>
-        </p:nvSpPr>
-        <p:spPr>
-          <a:xfrm xmlns:a="http://schemas.openxmlformats.org/drawingml/2006/main">
+            <a:spLocks noGrp="1"/>
+          </p:cNvSpPr>
+          <p:nvPr/>
+        </p:nvSpPr>
+        <p:spPr>
+          <a:xfrm>
             <a:off x="8515350" y="2133600"/>
             <a:ext cx="2952750" cy="904875"/>
           </a:xfrm>
-          <a:prstGeom xmlns:a="http://schemas.openxmlformats.org/drawingml/2006/main" prst="rect">
-            <a:avLst/>
-          </a:prstGeom>
-          <a:noFill xmlns:a="http://schemas.openxmlformats.org/drawingml/2006/main"/>
-          <a:ln xmlns:a="http://schemas.openxmlformats.org/drawingml/2006/main" w="0">
-            <a:noFill/>
-            <a:prstDash val="solid"/>
-          </a:ln>
-        </p:spPr>
-        <p:txBody>
-          <a:bodyPr xmlns:a="http://schemas.openxmlformats.org/drawingml/2006/main" anchor="t">
-            <a:normAutofit fontScale="100000"/>
+          <a:prstGeom prst="rect">
+            <a:avLst/>
+          </a:prstGeom>
+          <a:noFill/>
+          <a:ln w="0">
+            <a:noFill/>
+            <a:prstDash val="solid"/>
+          </a:ln>
+        </p:spPr>
+        <p:txBody>
+          <a:bodyPr anchor="t">
+            <a:normAutofit/>
           </a:bodyPr>
-          <a:lstStyle xmlns:a="http://schemas.openxmlformats.org/drawingml/2006/main"/>
-          <a:p xmlns:a="http://schemas.openxmlformats.org/drawingml/2006/main">
+          <a:lstStyle/>
+          <a:p>
             <a:pPr algn="l">
               <a:defRPr sz="4650" b="1">
                 <a:solidFill>
@@ -2277,38 +1993,38 @@
       </p:sp>
       <p:sp>
         <p:nvSpPr>
-          <p:cNvPr id="10" name="">
-            <a:extLst xmlns:a="http://schemas.openxmlformats.org/drawingml/2006/main">
+          <p:cNvPr id="10" name="Rectangle 9">
+            <a:extLst>
               <a:ext uri="{FF2B5EF4-FFF2-40B4-BE49-F238E27FC236}">
                 <a16:creationId xmlns:a16="http://schemas.microsoft.com/office/drawing/2014/main" id="{5FC6CABD-2EC1-40B6-9A16-AB533F71E7CB}"/>
               </a:ext>
             </a:extLst>
           </p:cNvPr>
           <p:cNvSpPr>
-            <a:spLocks xmlns:a="http://schemas.openxmlformats.org/drawingml/2006/main" noGrp="1"/>
-          </p:cNvSpPr>
-          <p:nvPr/>
-        </p:nvSpPr>
-        <p:spPr>
-          <a:xfrm xmlns:a="http://schemas.openxmlformats.org/drawingml/2006/main">
+            <a:spLocks noGrp="1"/>
+          </p:cNvSpPr>
+          <p:nvPr/>
+        </p:nvSpPr>
+        <p:spPr>
+          <a:xfrm>
             <a:off x="8515350" y="3257550"/>
             <a:ext cx="2952750" cy="457200"/>
           </a:xfrm>
-          <a:prstGeom xmlns:a="http://schemas.openxmlformats.org/drawingml/2006/main" prst="rect">
-            <a:avLst/>
-          </a:prstGeom>
-          <a:noFill xmlns:a="http://schemas.openxmlformats.org/drawingml/2006/main"/>
-          <a:ln xmlns:a="http://schemas.openxmlformats.org/drawingml/2006/main" w="0">
-            <a:noFill/>
-            <a:prstDash val="solid"/>
-          </a:ln>
-        </p:spPr>
-        <p:txBody>
-          <a:bodyPr xmlns:a="http://schemas.openxmlformats.org/drawingml/2006/main" anchor="t">
-            <a:normAutofit fontScale="100000"/>
+          <a:prstGeom prst="rect">
+            <a:avLst/>
+          </a:prstGeom>
+          <a:noFill/>
+          <a:ln w="0">
+            <a:noFill/>
+            <a:prstDash val="solid"/>
+          </a:ln>
+        </p:spPr>
+        <p:txBody>
+          <a:bodyPr anchor="t">
+            <a:normAutofit/>
           </a:bodyPr>
-          <a:lstStyle xmlns:a="http://schemas.openxmlformats.org/drawingml/2006/main"/>
-          <a:p xmlns:a="http://schemas.openxmlformats.org/drawingml/2006/main">
+          <a:lstStyle/>
+          <a:p>
             <a:pPr algn="l">
               <a:defRPr sz="1800" b="1">
                 <a:solidFill>
@@ -2335,38 +2051,38 @@
       </p:sp>
       <p:sp>
         <p:nvSpPr>
-          <p:cNvPr id="11" name="">
-            <a:extLst xmlns:a="http://schemas.openxmlformats.org/drawingml/2006/main">
+          <p:cNvPr id="11" name="Rectangle 10">
+            <a:extLst>
               <a:ext uri="{FF2B5EF4-FFF2-40B4-BE49-F238E27FC236}">
                 <a16:creationId xmlns:a16="http://schemas.microsoft.com/office/drawing/2014/main" id="{EC1EEC81-93C9-47EA-A588-89B56EAFEC69}"/>
               </a:ext>
             </a:extLst>
           </p:cNvPr>
           <p:cNvSpPr>
-            <a:spLocks xmlns:a="http://schemas.openxmlformats.org/drawingml/2006/main" noGrp="1"/>
-          </p:cNvSpPr>
-          <p:nvPr/>
-        </p:nvSpPr>
-        <p:spPr>
-          <a:xfrm xmlns:a="http://schemas.openxmlformats.org/drawingml/2006/main">
+            <a:spLocks noGrp="1"/>
+          </p:cNvSpPr>
+          <p:nvPr/>
+        </p:nvSpPr>
+        <p:spPr>
+          <a:xfrm>
             <a:off x="419100" y="4857750"/>
             <a:ext cx="10668000" cy="895350"/>
           </a:xfrm>
-          <a:prstGeom xmlns:a="http://schemas.openxmlformats.org/drawingml/2006/main" prst="rect">
-            <a:avLst/>
-          </a:prstGeom>
-          <a:noFill xmlns:a="http://schemas.openxmlformats.org/drawingml/2006/main"/>
-          <a:ln xmlns:a="http://schemas.openxmlformats.org/drawingml/2006/main" w="0">
-            <a:noFill/>
-            <a:prstDash val="solid"/>
-          </a:ln>
-        </p:spPr>
-        <p:txBody>
-          <a:bodyPr xmlns:a="http://schemas.openxmlformats.org/drawingml/2006/main" anchor="t">
-            <a:normAutofit fontScale="100000"/>
+          <a:prstGeom prst="rect">
+            <a:avLst/>
+          </a:prstGeom>
+          <a:noFill/>
+          <a:ln w="0">
+            <a:noFill/>
+            <a:prstDash val="solid"/>
+          </a:ln>
+        </p:spPr>
+        <p:txBody>
+          <a:bodyPr anchor="t">
+            <a:normAutofit/>
           </a:bodyPr>
-          <a:lstStyle xmlns:a="http://schemas.openxmlformats.org/drawingml/2006/main"/>
-          <a:p xmlns:a="http://schemas.openxmlformats.org/drawingml/2006/main">
+          <a:lstStyle/>
+          <a:p>
             <a:pPr algn="l">
               <a:defRPr sz="1575" b="0">
                 <a:solidFill>
@@ -2393,38 +2109,38 @@
       </p:sp>
       <p:sp>
         <p:nvSpPr>
-          <p:cNvPr id="12" name="">
-            <a:extLst xmlns:a="http://schemas.openxmlformats.org/drawingml/2006/main">
+          <p:cNvPr id="12" name="Rectangle 11">
+            <a:extLst>
               <a:ext uri="{FF2B5EF4-FFF2-40B4-BE49-F238E27FC236}">
                 <a16:creationId xmlns:a16="http://schemas.microsoft.com/office/drawing/2014/main" id="{84E3B0EC-8534-4819-9BE5-9D2A10C277B2}"/>
               </a:ext>
             </a:extLst>
           </p:cNvPr>
           <p:cNvSpPr>
-            <a:spLocks xmlns:a="http://schemas.openxmlformats.org/drawingml/2006/main" noGrp="1"/>
-          </p:cNvSpPr>
-          <p:nvPr/>
-        </p:nvSpPr>
-        <p:spPr>
-          <a:xfrm xmlns:a="http://schemas.openxmlformats.org/drawingml/2006/main">
+            <a:spLocks noGrp="1"/>
+          </p:cNvSpPr>
+          <p:nvPr/>
+        </p:nvSpPr>
+        <p:spPr>
+          <a:xfrm>
             <a:off x="419100" y="6419850"/>
             <a:ext cx="3429000" cy="209550"/>
           </a:xfrm>
-          <a:prstGeom xmlns:a="http://schemas.openxmlformats.org/drawingml/2006/main" prst="rect">
-            <a:avLst/>
-          </a:prstGeom>
-          <a:noFill xmlns:a="http://schemas.openxmlformats.org/drawingml/2006/main"/>
-          <a:ln xmlns:a="http://schemas.openxmlformats.org/drawingml/2006/main" w="0">
-            <a:noFill/>
-            <a:prstDash val="solid"/>
-          </a:ln>
-        </p:spPr>
-        <p:txBody>
-          <a:bodyPr xmlns:a="http://schemas.openxmlformats.org/drawingml/2006/main" anchor="t">
+          <a:prstGeom prst="rect">
+            <a:avLst/>
+          </a:prstGeom>
+          <a:noFill/>
+          <a:ln w="0">
+            <a:noFill/>
+            <a:prstDash val="solid"/>
+          </a:ln>
+        </p:spPr>
+        <p:txBody>
+          <a:bodyPr anchor="t">
             <a:normAutofit fontScale="86111"/>
           </a:bodyPr>
-          <a:lstStyle xmlns:a="http://schemas.openxmlformats.org/drawingml/2006/main"/>
-          <a:p xmlns:a="http://schemas.openxmlformats.org/drawingml/2006/main">
+          <a:lstStyle/>
+          <a:p>
             <a:pPr algn="l">
               <a:defRPr sz="900" b="0">
                 <a:solidFill>
@@ -2451,38 +2167,38 @@
       </p:sp>
       <p:sp>
         <p:nvSpPr>
-          <p:cNvPr id="13" name="">
-            <a:extLst xmlns:a="http://schemas.openxmlformats.org/drawingml/2006/main">
+          <p:cNvPr id="13" name="Rectangle 12">
+            <a:extLst>
               <a:ext uri="{FF2B5EF4-FFF2-40B4-BE49-F238E27FC236}">
                 <a16:creationId xmlns:a16="http://schemas.microsoft.com/office/drawing/2014/main" id="{28069409-4BE3-40D8-8757-CBEA5A820570}"/>
               </a:ext>
             </a:extLst>
           </p:cNvPr>
           <p:cNvSpPr>
-            <a:spLocks xmlns:a="http://schemas.openxmlformats.org/drawingml/2006/main" noGrp="1"/>
-          </p:cNvSpPr>
-          <p:nvPr/>
-        </p:nvSpPr>
-        <p:spPr>
-          <a:xfrm xmlns:a="http://schemas.openxmlformats.org/drawingml/2006/main">
+            <a:spLocks noGrp="1"/>
+          </p:cNvSpPr>
+          <p:nvPr/>
+        </p:nvSpPr>
+        <p:spPr>
+          <a:xfrm>
             <a:off x="11239500" y="6419850"/>
             <a:ext cx="523875" cy="209550"/>
           </a:xfrm>
-          <a:prstGeom xmlns:a="http://schemas.openxmlformats.org/drawingml/2006/main" prst="rect">
-            <a:avLst/>
-          </a:prstGeom>
-          <a:noFill xmlns:a="http://schemas.openxmlformats.org/drawingml/2006/main"/>
-          <a:ln xmlns:a="http://schemas.openxmlformats.org/drawingml/2006/main" w="0">
-            <a:noFill/>
-            <a:prstDash val="solid"/>
-          </a:ln>
-        </p:spPr>
-        <p:txBody>
-          <a:bodyPr xmlns:a="http://schemas.openxmlformats.org/drawingml/2006/main" anchor="t">
+          <a:prstGeom prst="rect">
+            <a:avLst/>
+          </a:prstGeom>
+          <a:noFill/>
+          <a:ln w="0">
+            <a:noFill/>
+            <a:prstDash val="solid"/>
+          </a:ln>
+        </p:spPr>
+        <p:txBody>
+          <a:bodyPr anchor="t">
             <a:normAutofit fontScale="86111"/>
           </a:bodyPr>
-          <a:lstStyle xmlns:a="http://schemas.openxmlformats.org/drawingml/2006/main"/>
-          <a:p xmlns:a="http://schemas.openxmlformats.org/drawingml/2006/main">
+          <a:lstStyle/>
+          <a:p>
             <a:pPr algn="r">
               <a:defRPr sz="900" b="0">
                 <a:solidFill>
@@ -2514,17 +2230,21 @@
       </p:ext>
     </p:extLst>
   </p:cSld>
+  <p:clrMapOvr>
+    <a:masterClrMapping/>
+  </p:clrMapOvr>
 </p:sld>
 </file>
 
 <file path=ppt/slides/slide3.xml><?xml version="1.0" encoding="utf-8"?>
-<p:sld xmlns:p="http://schemas.openxmlformats.org/presentationml/2006/main">
+<p:sld xmlns:a="http://schemas.openxmlformats.org/drawingml/2006/main" xmlns:r="http://schemas.openxmlformats.org/officeDocument/2006/relationships" xmlns:p="http://schemas.openxmlformats.org/presentationml/2006/main">
   <p:cSld>
     <p:bg>
       <p:bgPr>
-        <a:solidFill xmlns:a="http://schemas.openxmlformats.org/drawingml/2006/main">
+        <a:solidFill>
           <a:srgbClr val="FFFFFF"/>
         </a:solidFill>
+        <a:effectLst/>
       </p:bgPr>
     </p:bg>
     <p:spTree>
@@ -2534,42 +2254,47 @@
         <p:nvPr/>
       </p:nvGrpSpPr>
       <p:grpSpPr>
-        <a:xfrm xmlns:a="http://schemas.openxmlformats.org/drawingml/2006/main"/>
+        <a:xfrm>
+          <a:off x="0" y="0"/>
+          <a:ext cx="0" cy="0"/>
+          <a:chOff x="0" y="0"/>
+          <a:chExt cx="0" cy="0"/>
+        </a:xfrm>
       </p:grpSpPr>
       <p:sp>
         <p:nvSpPr>
-          <p:cNvPr id="16" name="">
-            <a:extLst xmlns:a="http://schemas.openxmlformats.org/drawingml/2006/main">
+          <p:cNvPr id="16" name="Rectangle 15">
+            <a:extLst>
               <a:ext uri="{FF2B5EF4-FFF2-40B4-BE49-F238E27FC236}">
                 <a16:creationId xmlns:a16="http://schemas.microsoft.com/office/drawing/2014/main" id="{CD91F0F0-38E6-4CD8-8AFE-A4503F55FD3F}"/>
               </a:ext>
             </a:extLst>
           </p:cNvPr>
           <p:cNvSpPr>
-            <a:spLocks xmlns:a="http://schemas.openxmlformats.org/drawingml/2006/main" noGrp="1"/>
-          </p:cNvSpPr>
-          <p:nvPr/>
-        </p:nvSpPr>
-        <p:spPr>
-          <a:xfrm xmlns:a="http://schemas.openxmlformats.org/drawingml/2006/main">
+            <a:spLocks noGrp="1"/>
+          </p:cNvSpPr>
+          <p:nvPr/>
+        </p:nvSpPr>
+        <p:spPr>
+          <a:xfrm>
             <a:off x="419100" y="361950"/>
             <a:ext cx="10477500" cy="723900"/>
           </a:xfrm>
-          <a:prstGeom xmlns:a="http://schemas.openxmlformats.org/drawingml/2006/main" prst="rect">
-            <a:avLst/>
-          </a:prstGeom>
-          <a:noFill xmlns:a="http://schemas.openxmlformats.org/drawingml/2006/main"/>
-          <a:ln xmlns:a="http://schemas.openxmlformats.org/drawingml/2006/main" w="0">
-            <a:noFill/>
-            <a:prstDash val="solid"/>
-          </a:ln>
-        </p:spPr>
-        <p:txBody>
-          <a:bodyPr xmlns:a="http://schemas.openxmlformats.org/drawingml/2006/main" anchor="t">
-            <a:normAutofit fontScale="100000"/>
+          <a:prstGeom prst="rect">
+            <a:avLst/>
+          </a:prstGeom>
+          <a:noFill/>
+          <a:ln w="0">
+            <a:noFill/>
+            <a:prstDash val="solid"/>
+          </a:ln>
+        </p:spPr>
+        <p:txBody>
+          <a:bodyPr anchor="t">
+            <a:normAutofit/>
           </a:bodyPr>
-          <a:lstStyle xmlns:a="http://schemas.openxmlformats.org/drawingml/2006/main"/>
-          <a:p xmlns:a="http://schemas.openxmlformats.org/drawingml/2006/main">
+          <a:lstStyle/>
+          <a:p>
             <a:pPr algn="l">
               <a:defRPr sz="3000" b="1">
                 <a:solidFill>
@@ -2596,38 +2321,38 @@
       </p:sp>
       <p:sp>
         <p:nvSpPr>
-          <p:cNvPr id="2" name="">
-            <a:extLst xmlns:a="http://schemas.openxmlformats.org/drawingml/2006/main">
+          <p:cNvPr id="2" name="Rectangle 1">
+            <a:extLst>
               <a:ext uri="{FF2B5EF4-FFF2-40B4-BE49-F238E27FC236}">
                 <a16:creationId xmlns:a16="http://schemas.microsoft.com/office/drawing/2014/main" id="{3F241AA0-8C93-4E8F-A3FA-755FE02E47A1}"/>
               </a:ext>
             </a:extLst>
           </p:cNvPr>
           <p:cNvSpPr>
-            <a:spLocks xmlns:a="http://schemas.openxmlformats.org/drawingml/2006/main" noGrp="1"/>
-          </p:cNvSpPr>
-          <p:nvPr/>
-        </p:nvSpPr>
-        <p:spPr>
-          <a:xfrm xmlns:a="http://schemas.openxmlformats.org/drawingml/2006/main">
+            <a:spLocks noGrp="1"/>
+          </p:cNvSpPr>
+          <p:nvPr/>
+        </p:nvSpPr>
+        <p:spPr>
+          <a:xfrm>
             <a:off x="419100" y="1638300"/>
             <a:ext cx="952500" cy="419100"/>
           </a:xfrm>
-          <a:prstGeom xmlns:a="http://schemas.openxmlformats.org/drawingml/2006/main" prst="rect">
-            <a:avLst/>
-          </a:prstGeom>
-          <a:noFill xmlns:a="http://schemas.openxmlformats.org/drawingml/2006/main"/>
-          <a:ln xmlns:a="http://schemas.openxmlformats.org/drawingml/2006/main" w="0">
-            <a:noFill/>
-            <a:prstDash val="solid"/>
-          </a:ln>
-        </p:spPr>
-        <p:txBody>
-          <a:bodyPr xmlns:a="http://schemas.openxmlformats.org/drawingml/2006/main" anchor="t">
-            <a:normAutofit fontScale="100000"/>
+          <a:prstGeom prst="rect">
+            <a:avLst/>
+          </a:prstGeom>
+          <a:noFill/>
+          <a:ln w="0">
+            <a:noFill/>
+            <a:prstDash val="solid"/>
+          </a:ln>
+        </p:spPr>
+        <p:txBody>
+          <a:bodyPr anchor="t">
+            <a:normAutofit/>
           </a:bodyPr>
-          <a:lstStyle xmlns:a="http://schemas.openxmlformats.org/drawingml/2006/main"/>
-          <a:p xmlns:a="http://schemas.openxmlformats.org/drawingml/2006/main">
+          <a:lstStyle/>
+          <a:p>
             <a:pPr algn="l">
               <a:defRPr sz="1500" b="1">
                 <a:solidFill>
@@ -2654,38 +2379,38 @@
       </p:sp>
       <p:sp>
         <p:nvSpPr>
-          <p:cNvPr id="3" name="">
-            <a:extLst xmlns:a="http://schemas.openxmlformats.org/drawingml/2006/main">
+          <p:cNvPr id="3" name="Rectangle 2">
+            <a:extLst>
               <a:ext uri="{FF2B5EF4-FFF2-40B4-BE49-F238E27FC236}">
                 <a16:creationId xmlns:a16="http://schemas.microsoft.com/office/drawing/2014/main" id="{D9F12A4F-0FCC-4A75-A410-7DF01A3A74CF}"/>
               </a:ext>
             </a:extLst>
           </p:cNvPr>
           <p:cNvSpPr>
-            <a:spLocks xmlns:a="http://schemas.openxmlformats.org/drawingml/2006/main" noGrp="1"/>
-          </p:cNvSpPr>
-          <p:nvPr/>
-        </p:nvSpPr>
-        <p:spPr>
-          <a:xfrm xmlns:a="http://schemas.openxmlformats.org/drawingml/2006/main">
+            <a:spLocks noGrp="1"/>
+          </p:cNvSpPr>
+          <p:nvPr/>
+        </p:nvSpPr>
+        <p:spPr>
+          <a:xfrm>
             <a:off x="419100" y="2171700"/>
             <a:ext cx="3238500" cy="495300"/>
           </a:xfrm>
-          <a:prstGeom xmlns:a="http://schemas.openxmlformats.org/drawingml/2006/main" prst="rect">
-            <a:avLst/>
-          </a:prstGeom>
-          <a:noFill xmlns:a="http://schemas.openxmlformats.org/drawingml/2006/main"/>
-          <a:ln xmlns:a="http://schemas.openxmlformats.org/drawingml/2006/main" w="0">
-            <a:noFill/>
-            <a:prstDash val="solid"/>
-          </a:ln>
-        </p:spPr>
-        <p:txBody>
-          <a:bodyPr xmlns:a="http://schemas.openxmlformats.org/drawingml/2006/main" anchor="t">
-            <a:normAutofit fontScale="100000"/>
+          <a:prstGeom prst="rect">
+            <a:avLst/>
+          </a:prstGeom>
+          <a:noFill/>
+          <a:ln w="0">
+            <a:noFill/>
+            <a:prstDash val="solid"/>
+          </a:ln>
+        </p:spPr>
+        <p:txBody>
+          <a:bodyPr anchor="t">
+            <a:normAutofit/>
           </a:bodyPr>
-          <a:lstStyle xmlns:a="http://schemas.openxmlformats.org/drawingml/2006/main"/>
-          <a:p xmlns:a="http://schemas.openxmlformats.org/drawingml/2006/main">
+          <a:lstStyle/>
+          <a:p>
             <a:pPr algn="l">
               <a:defRPr sz="2100" b="1">
                 <a:solidFill>
@@ -2712,38 +2437,38 @@
       </p:sp>
       <p:sp>
         <p:nvSpPr>
-          <p:cNvPr id="4" name="">
-            <a:extLst xmlns:a="http://schemas.openxmlformats.org/drawingml/2006/main">
+          <p:cNvPr id="4" name="Rectangle 3">
+            <a:extLst>
               <a:ext uri="{FF2B5EF4-FFF2-40B4-BE49-F238E27FC236}">
                 <a16:creationId xmlns:a16="http://schemas.microsoft.com/office/drawing/2014/main" id="{3C653478-AE0B-4D1C-B20F-6566D137F34F}"/>
               </a:ext>
             </a:extLst>
           </p:cNvPr>
           <p:cNvSpPr>
-            <a:spLocks xmlns:a="http://schemas.openxmlformats.org/drawingml/2006/main" noGrp="1"/>
-          </p:cNvSpPr>
-          <p:nvPr/>
-        </p:nvSpPr>
-        <p:spPr>
-          <a:xfrm xmlns:a="http://schemas.openxmlformats.org/drawingml/2006/main">
+            <a:spLocks noGrp="1"/>
+          </p:cNvSpPr>
+          <p:nvPr/>
+        </p:nvSpPr>
+        <p:spPr>
+          <a:xfrm>
             <a:off x="419100" y="2952750"/>
             <a:ext cx="3143250" cy="1619250"/>
           </a:xfrm>
-          <a:prstGeom xmlns:a="http://schemas.openxmlformats.org/drawingml/2006/main" prst="rect">
-            <a:avLst/>
-          </a:prstGeom>
-          <a:noFill xmlns:a="http://schemas.openxmlformats.org/drawingml/2006/main"/>
-          <a:ln xmlns:a="http://schemas.openxmlformats.org/drawingml/2006/main" w="0">
-            <a:noFill/>
-            <a:prstDash val="solid"/>
-          </a:ln>
-        </p:spPr>
-        <p:txBody>
-          <a:bodyPr xmlns:a="http://schemas.openxmlformats.org/drawingml/2006/main" anchor="t">
-            <a:normAutofit fontScale="100000"/>
+          <a:prstGeom prst="rect">
+            <a:avLst/>
+          </a:prstGeom>
+          <a:noFill/>
+          <a:ln w="0">
+            <a:noFill/>
+            <a:prstDash val="solid"/>
+          </a:ln>
+        </p:spPr>
+        <p:txBody>
+          <a:bodyPr anchor="t">
+            <a:normAutofit/>
           </a:bodyPr>
-          <a:lstStyle xmlns:a="http://schemas.openxmlformats.org/drawingml/2006/main"/>
-          <a:p xmlns:a="http://schemas.openxmlformats.org/drawingml/2006/main">
+          <a:lstStyle/>
+          <a:p>
             <a:pPr algn="l">
               <a:defRPr sz="1575" b="0">
                 <a:solidFill>
@@ -2770,69 +2495,69 @@
       </p:sp>
       <p:sp>
         <p:nvSpPr>
-          <p:cNvPr id="5" name="">
-            <a:extLst xmlns:a="http://schemas.openxmlformats.org/drawingml/2006/main">
+          <p:cNvPr id="5" name="Rectangle 4">
+            <a:extLst>
               <a:ext uri="{FF2B5EF4-FFF2-40B4-BE49-F238E27FC236}">
                 <a16:creationId xmlns:a16="http://schemas.microsoft.com/office/drawing/2014/main" id="{35DC8E5B-704A-4FAF-AC1C-970D192B82EA}"/>
               </a:ext>
             </a:extLst>
           </p:cNvPr>
           <p:cNvSpPr>
-            <a:spLocks xmlns:a="http://schemas.openxmlformats.org/drawingml/2006/main" noGrp="1"/>
-          </p:cNvSpPr>
-          <p:nvPr/>
-        </p:nvSpPr>
-        <p:spPr>
-          <a:xfrm xmlns:a="http://schemas.openxmlformats.org/drawingml/2006/main">
+            <a:spLocks noGrp="1"/>
+          </p:cNvSpPr>
+          <p:nvPr/>
+        </p:nvSpPr>
+        <p:spPr>
+          <a:xfrm>
             <a:off x="419100" y="4819650"/>
             <a:ext cx="3143250" cy="76200"/>
           </a:xfrm>
-          <a:prstGeom xmlns:a="http://schemas.openxmlformats.org/drawingml/2006/main" prst="rect">
-            <a:avLst/>
-          </a:prstGeom>
-          <a:solidFill xmlns:a="http://schemas.openxmlformats.org/drawingml/2006/main">
+          <a:prstGeom prst="rect">
+            <a:avLst/>
+          </a:prstGeom>
+          <a:solidFill>
             <a:srgbClr val="3D8DFF"/>
           </a:solidFill>
-          <a:ln xmlns:a="http://schemas.openxmlformats.org/drawingml/2006/main" w="0">
-            <a:noFill/>
-            <a:prstDash val="solid"/>
-          </a:ln>
-        </p:spPr>
-      </p:sp>
-      <p:sp>
-        <p:nvSpPr>
-          <p:cNvPr id="6" name="">
-            <a:extLst xmlns:a="http://schemas.openxmlformats.org/drawingml/2006/main">
+          <a:ln w="0">
+            <a:noFill/>
+            <a:prstDash val="solid"/>
+          </a:ln>
+        </p:spPr>
+      </p:sp>
+      <p:sp>
+        <p:nvSpPr>
+          <p:cNvPr id="6" name="Rectangle 5">
+            <a:extLst>
               <a:ext uri="{FF2B5EF4-FFF2-40B4-BE49-F238E27FC236}">
                 <a16:creationId xmlns:a16="http://schemas.microsoft.com/office/drawing/2014/main" id="{B7952591-8884-45E9-ACED-9679CBF4F777}"/>
               </a:ext>
             </a:extLst>
           </p:cNvPr>
           <p:cNvSpPr>
-            <a:spLocks xmlns:a="http://schemas.openxmlformats.org/drawingml/2006/main" noGrp="1"/>
-          </p:cNvSpPr>
-          <p:nvPr/>
-        </p:nvSpPr>
-        <p:spPr>
-          <a:xfrm xmlns:a="http://schemas.openxmlformats.org/drawingml/2006/main">
+            <a:spLocks noGrp="1"/>
+          </p:cNvSpPr>
+          <p:nvPr/>
+        </p:nvSpPr>
+        <p:spPr>
+          <a:xfrm>
             <a:off x="4343400" y="1638300"/>
             <a:ext cx="952500" cy="419100"/>
           </a:xfrm>
-          <a:prstGeom xmlns:a="http://schemas.openxmlformats.org/drawingml/2006/main" prst="rect">
-            <a:avLst/>
-          </a:prstGeom>
-          <a:noFill xmlns:a="http://schemas.openxmlformats.org/drawingml/2006/main"/>
-          <a:ln xmlns:a="http://schemas.openxmlformats.org/drawingml/2006/main" w="0">
-            <a:noFill/>
-            <a:prstDash val="solid"/>
-          </a:ln>
-        </p:spPr>
-        <p:txBody>
-          <a:bodyPr xmlns:a="http://schemas.openxmlformats.org/drawingml/2006/main" anchor="t">
-            <a:normAutofit fontScale="100000"/>
+          <a:prstGeom prst="rect">
+            <a:avLst/>
+          </a:prstGeom>
+          <a:noFill/>
+          <a:ln w="0">
+            <a:noFill/>
+            <a:prstDash val="solid"/>
+          </a:ln>
+        </p:spPr>
+        <p:txBody>
+          <a:bodyPr anchor="t">
+            <a:normAutofit/>
           </a:bodyPr>
-          <a:lstStyle xmlns:a="http://schemas.openxmlformats.org/drawingml/2006/main"/>
-          <a:p xmlns:a="http://schemas.openxmlformats.org/drawingml/2006/main">
+          <a:lstStyle/>
+          <a:p>
             <a:pPr algn="l">
               <a:defRPr sz="1500" b="1">
                 <a:solidFill>
@@ -2859,38 +2584,38 @@
       </p:sp>
       <p:sp>
         <p:nvSpPr>
-          <p:cNvPr id="7" name="">
-            <a:extLst xmlns:a="http://schemas.openxmlformats.org/drawingml/2006/main">
+          <p:cNvPr id="7" name="Rectangle 6">
+            <a:extLst>
               <a:ext uri="{FF2B5EF4-FFF2-40B4-BE49-F238E27FC236}">
                 <a16:creationId xmlns:a16="http://schemas.microsoft.com/office/drawing/2014/main" id="{9C9AB84C-66D7-45B6-9857-BF68380E6230}"/>
               </a:ext>
             </a:extLst>
           </p:cNvPr>
           <p:cNvSpPr>
-            <a:spLocks xmlns:a="http://schemas.openxmlformats.org/drawingml/2006/main" noGrp="1"/>
-          </p:cNvSpPr>
-          <p:nvPr/>
-        </p:nvSpPr>
-        <p:spPr>
-          <a:xfrm xmlns:a="http://schemas.openxmlformats.org/drawingml/2006/main">
+            <a:spLocks noGrp="1"/>
+          </p:cNvSpPr>
+          <p:nvPr/>
+        </p:nvSpPr>
+        <p:spPr>
+          <a:xfrm>
             <a:off x="4343400" y="2171700"/>
             <a:ext cx="3238500" cy="495300"/>
           </a:xfrm>
-          <a:prstGeom xmlns:a="http://schemas.openxmlformats.org/drawingml/2006/main" prst="rect">
-            <a:avLst/>
-          </a:prstGeom>
-          <a:noFill xmlns:a="http://schemas.openxmlformats.org/drawingml/2006/main"/>
-          <a:ln xmlns:a="http://schemas.openxmlformats.org/drawingml/2006/main" w="0">
-            <a:noFill/>
-            <a:prstDash val="solid"/>
-          </a:ln>
-        </p:spPr>
-        <p:txBody>
-          <a:bodyPr xmlns:a="http://schemas.openxmlformats.org/drawingml/2006/main" anchor="t">
-            <a:normAutofit fontScale="100000"/>
+          <a:prstGeom prst="rect">
+            <a:avLst/>
+          </a:prstGeom>
+          <a:noFill/>
+          <a:ln w="0">
+            <a:noFill/>
+            <a:prstDash val="solid"/>
+          </a:ln>
+        </p:spPr>
+        <p:txBody>
+          <a:bodyPr anchor="t">
+            <a:normAutofit/>
           </a:bodyPr>
-          <a:lstStyle xmlns:a="http://schemas.openxmlformats.org/drawingml/2006/main"/>
-          <a:p xmlns:a="http://schemas.openxmlformats.org/drawingml/2006/main">
+          <a:lstStyle/>
+          <a:p>
             <a:pPr algn="l">
               <a:defRPr sz="2100" b="1">
                 <a:solidFill>
@@ -2917,38 +2642,38 @@
       </p:sp>
       <p:sp>
         <p:nvSpPr>
-          <p:cNvPr id="8" name="">
-            <a:extLst xmlns:a="http://schemas.openxmlformats.org/drawingml/2006/main">
+          <p:cNvPr id="8" name="Rectangle 7">
+            <a:extLst>
               <a:ext uri="{FF2B5EF4-FFF2-40B4-BE49-F238E27FC236}">
                 <a16:creationId xmlns:a16="http://schemas.microsoft.com/office/drawing/2014/main" id="{A390EB04-87D1-4E0B-AF9D-8CA076FAA6A8}"/>
               </a:ext>
             </a:extLst>
           </p:cNvPr>
           <p:cNvSpPr>
-            <a:spLocks xmlns:a="http://schemas.openxmlformats.org/drawingml/2006/main" noGrp="1"/>
-          </p:cNvSpPr>
-          <p:nvPr/>
-        </p:nvSpPr>
-        <p:spPr>
-          <a:xfrm xmlns:a="http://schemas.openxmlformats.org/drawingml/2006/main">
+            <a:spLocks noGrp="1"/>
+          </p:cNvSpPr>
+          <p:nvPr/>
+        </p:nvSpPr>
+        <p:spPr>
+          <a:xfrm>
             <a:off x="4343400" y="2952750"/>
             <a:ext cx="3143250" cy="1619250"/>
           </a:xfrm>
-          <a:prstGeom xmlns:a="http://schemas.openxmlformats.org/drawingml/2006/main" prst="rect">
-            <a:avLst/>
-          </a:prstGeom>
-          <a:noFill xmlns:a="http://schemas.openxmlformats.org/drawingml/2006/main"/>
-          <a:ln xmlns:a="http://schemas.openxmlformats.org/drawingml/2006/main" w="0">
-            <a:noFill/>
-            <a:prstDash val="solid"/>
-          </a:ln>
-        </p:spPr>
-        <p:txBody>
-          <a:bodyPr xmlns:a="http://schemas.openxmlformats.org/drawingml/2006/main" anchor="t">
-            <a:normAutofit fontScale="100000"/>
+          <a:prstGeom prst="rect">
+            <a:avLst/>
+          </a:prstGeom>
+          <a:noFill/>
+          <a:ln w="0">
+            <a:noFill/>
+            <a:prstDash val="solid"/>
+          </a:ln>
+        </p:spPr>
+        <p:txBody>
+          <a:bodyPr anchor="t">
+            <a:normAutofit/>
           </a:bodyPr>
-          <a:lstStyle xmlns:a="http://schemas.openxmlformats.org/drawingml/2006/main"/>
-          <a:p xmlns:a="http://schemas.openxmlformats.org/drawingml/2006/main">
+          <a:lstStyle/>
+          <a:p>
             <a:pPr algn="l">
               <a:defRPr sz="1575" b="0">
                 <a:solidFill>
@@ -2975,69 +2700,69 @@
       </p:sp>
       <p:sp>
         <p:nvSpPr>
-          <p:cNvPr id="9" name="">
-            <a:extLst xmlns:a="http://schemas.openxmlformats.org/drawingml/2006/main">
+          <p:cNvPr id="9" name="Rectangle 8">
+            <a:extLst>
               <a:ext uri="{FF2B5EF4-FFF2-40B4-BE49-F238E27FC236}">
                 <a16:creationId xmlns:a16="http://schemas.microsoft.com/office/drawing/2014/main" id="{1001514C-858C-4D11-AD1B-EE0DE813CFFF}"/>
               </a:ext>
             </a:extLst>
           </p:cNvPr>
           <p:cNvSpPr>
-            <a:spLocks xmlns:a="http://schemas.openxmlformats.org/drawingml/2006/main" noGrp="1"/>
-          </p:cNvSpPr>
-          <p:nvPr/>
-        </p:nvSpPr>
-        <p:spPr>
-          <a:xfrm xmlns:a="http://schemas.openxmlformats.org/drawingml/2006/main">
+            <a:spLocks noGrp="1"/>
+          </p:cNvSpPr>
+          <p:nvPr/>
+        </p:nvSpPr>
+        <p:spPr>
+          <a:xfrm>
             <a:off x="4343400" y="4819650"/>
             <a:ext cx="3143250" cy="76200"/>
           </a:xfrm>
-          <a:prstGeom xmlns:a="http://schemas.openxmlformats.org/drawingml/2006/main" prst="rect">
-            <a:avLst/>
-          </a:prstGeom>
-          <a:solidFill xmlns:a="http://schemas.openxmlformats.org/drawingml/2006/main">
+          <a:prstGeom prst="rect">
+            <a:avLst/>
+          </a:prstGeom>
+          <a:solidFill>
             <a:srgbClr val="3D8DFF"/>
           </a:solidFill>
-          <a:ln xmlns:a="http://schemas.openxmlformats.org/drawingml/2006/main" w="0">
-            <a:noFill/>
-            <a:prstDash val="solid"/>
-          </a:ln>
-        </p:spPr>
-      </p:sp>
-      <p:sp>
-        <p:nvSpPr>
-          <p:cNvPr id="10" name="">
-            <a:extLst xmlns:a="http://schemas.openxmlformats.org/drawingml/2006/main">
+          <a:ln w="0">
+            <a:noFill/>
+            <a:prstDash val="solid"/>
+          </a:ln>
+        </p:spPr>
+      </p:sp>
+      <p:sp>
+        <p:nvSpPr>
+          <p:cNvPr id="10" name="Rectangle 9">
+            <a:extLst>
               <a:ext uri="{FF2B5EF4-FFF2-40B4-BE49-F238E27FC236}">
                 <a16:creationId xmlns:a16="http://schemas.microsoft.com/office/drawing/2014/main" id="{B960F63A-77B9-41DE-9C83-FEC56DD507B9}"/>
               </a:ext>
             </a:extLst>
           </p:cNvPr>
           <p:cNvSpPr>
-            <a:spLocks xmlns:a="http://schemas.openxmlformats.org/drawingml/2006/main" noGrp="1"/>
-          </p:cNvSpPr>
-          <p:nvPr/>
-        </p:nvSpPr>
-        <p:spPr>
-          <a:xfrm xmlns:a="http://schemas.openxmlformats.org/drawingml/2006/main">
+            <a:spLocks noGrp="1"/>
+          </p:cNvSpPr>
+          <p:nvPr/>
+        </p:nvSpPr>
+        <p:spPr>
+          <a:xfrm>
             <a:off x="8267700" y="1638300"/>
             <a:ext cx="952500" cy="419100"/>
           </a:xfrm>
-          <a:prstGeom xmlns:a="http://schemas.openxmlformats.org/drawingml/2006/main" prst="rect">
-            <a:avLst/>
-          </a:prstGeom>
-          <a:noFill xmlns:a="http://schemas.openxmlformats.org/drawingml/2006/main"/>
-          <a:ln xmlns:a="http://schemas.openxmlformats.org/drawingml/2006/main" w="0">
-            <a:noFill/>
-            <a:prstDash val="solid"/>
-          </a:ln>
-        </p:spPr>
-        <p:txBody>
-          <a:bodyPr xmlns:a="http://schemas.openxmlformats.org/drawingml/2006/main" anchor="t">
-            <a:normAutofit fontScale="100000"/>
+          <a:prstGeom prst="rect">
+            <a:avLst/>
+          </a:prstGeom>
+          <a:noFill/>
+          <a:ln w="0">
+            <a:noFill/>
+            <a:prstDash val="solid"/>
+          </a:ln>
+        </p:spPr>
+        <p:txBody>
+          <a:bodyPr anchor="t">
+            <a:normAutofit/>
           </a:bodyPr>
-          <a:lstStyle xmlns:a="http://schemas.openxmlformats.org/drawingml/2006/main"/>
-          <a:p xmlns:a="http://schemas.openxmlformats.org/drawingml/2006/main">
+          <a:lstStyle/>
+          <a:p>
             <a:pPr algn="l">
               <a:defRPr sz="1500" b="1">
                 <a:solidFill>
@@ -3064,38 +2789,38 @@
       </p:sp>
       <p:sp>
         <p:nvSpPr>
-          <p:cNvPr id="11" name="">
-            <a:extLst xmlns:a="http://schemas.openxmlformats.org/drawingml/2006/main">
+          <p:cNvPr id="11" name="Rectangle 10">
+            <a:extLst>
               <a:ext uri="{FF2B5EF4-FFF2-40B4-BE49-F238E27FC236}">
                 <a16:creationId xmlns:a16="http://schemas.microsoft.com/office/drawing/2014/main" id="{035E7397-9FE2-4FA6-A05A-BA9AE69DE9D4}"/>
               </a:ext>
             </a:extLst>
           </p:cNvPr>
           <p:cNvSpPr>
-            <a:spLocks xmlns:a="http://schemas.openxmlformats.org/drawingml/2006/main" noGrp="1"/>
-          </p:cNvSpPr>
-          <p:nvPr/>
-        </p:nvSpPr>
-        <p:spPr>
-          <a:xfrm xmlns:a="http://schemas.openxmlformats.org/drawingml/2006/main">
+            <a:spLocks noGrp="1"/>
+          </p:cNvSpPr>
+          <p:nvPr/>
+        </p:nvSpPr>
+        <p:spPr>
+          <a:xfrm>
             <a:off x="8267700" y="2171700"/>
             <a:ext cx="3238500" cy="495300"/>
           </a:xfrm>
-          <a:prstGeom xmlns:a="http://schemas.openxmlformats.org/drawingml/2006/main" prst="rect">
-            <a:avLst/>
-          </a:prstGeom>
-          <a:noFill xmlns:a="http://schemas.openxmlformats.org/drawingml/2006/main"/>
-          <a:ln xmlns:a="http://schemas.openxmlformats.org/drawingml/2006/main" w="0">
-            <a:noFill/>
-            <a:prstDash val="solid"/>
-          </a:ln>
-        </p:spPr>
-        <p:txBody>
-          <a:bodyPr xmlns:a="http://schemas.openxmlformats.org/drawingml/2006/main" anchor="t">
-            <a:normAutofit fontScale="100000"/>
+          <a:prstGeom prst="rect">
+            <a:avLst/>
+          </a:prstGeom>
+          <a:noFill/>
+          <a:ln w="0">
+            <a:noFill/>
+            <a:prstDash val="solid"/>
+          </a:ln>
+        </p:spPr>
+        <p:txBody>
+          <a:bodyPr anchor="t">
+            <a:normAutofit/>
           </a:bodyPr>
-          <a:lstStyle xmlns:a="http://schemas.openxmlformats.org/drawingml/2006/main"/>
-          <a:p xmlns:a="http://schemas.openxmlformats.org/drawingml/2006/main">
+          <a:lstStyle/>
+          <a:p>
             <a:pPr algn="l">
               <a:defRPr sz="2100" b="1">
                 <a:solidFill>
@@ -3122,38 +2847,38 @@
       </p:sp>
       <p:sp>
         <p:nvSpPr>
-          <p:cNvPr id="12" name="">
-            <a:extLst xmlns:a="http://schemas.openxmlformats.org/drawingml/2006/main">
+          <p:cNvPr id="12" name="Rectangle 11">
+            <a:extLst>
               <a:ext uri="{FF2B5EF4-FFF2-40B4-BE49-F238E27FC236}">
                 <a16:creationId xmlns:a16="http://schemas.microsoft.com/office/drawing/2014/main" id="{7787EA88-22F8-406E-912E-44A2EC2DABDA}"/>
               </a:ext>
             </a:extLst>
           </p:cNvPr>
           <p:cNvSpPr>
-            <a:spLocks xmlns:a="http://schemas.openxmlformats.org/drawingml/2006/main" noGrp="1"/>
-          </p:cNvSpPr>
-          <p:nvPr/>
-        </p:nvSpPr>
-        <p:spPr>
-          <a:xfrm xmlns:a="http://schemas.openxmlformats.org/drawingml/2006/main">
+            <a:spLocks noGrp="1"/>
+          </p:cNvSpPr>
+          <p:nvPr/>
+        </p:nvSpPr>
+        <p:spPr>
+          <a:xfrm>
             <a:off x="8267700" y="2952750"/>
             <a:ext cx="3143250" cy="1619250"/>
           </a:xfrm>
-          <a:prstGeom xmlns:a="http://schemas.openxmlformats.org/drawingml/2006/main" prst="rect">
-            <a:avLst/>
-          </a:prstGeom>
-          <a:noFill xmlns:a="http://schemas.openxmlformats.org/drawingml/2006/main"/>
-          <a:ln xmlns:a="http://schemas.openxmlformats.org/drawingml/2006/main" w="0">
-            <a:noFill/>
-            <a:prstDash val="solid"/>
-          </a:ln>
-        </p:spPr>
-        <p:txBody>
-          <a:bodyPr xmlns:a="http://schemas.openxmlformats.org/drawingml/2006/main" anchor="t">
-            <a:normAutofit fontScale="100000"/>
+          <a:prstGeom prst="rect">
+            <a:avLst/>
+          </a:prstGeom>
+          <a:noFill/>
+          <a:ln w="0">
+            <a:noFill/>
+            <a:prstDash val="solid"/>
+          </a:ln>
+        </p:spPr>
+        <p:txBody>
+          <a:bodyPr anchor="t">
+            <a:normAutofit/>
           </a:bodyPr>
-          <a:lstStyle xmlns:a="http://schemas.openxmlformats.org/drawingml/2006/main"/>
-          <a:p xmlns:a="http://schemas.openxmlformats.org/drawingml/2006/main">
+          <a:lstStyle/>
+          <a:p>
             <a:pPr algn="l">
               <a:defRPr sz="1575" b="0">
                 <a:solidFill>
@@ -3180,69 +2905,69 @@
       </p:sp>
       <p:sp>
         <p:nvSpPr>
-          <p:cNvPr id="13" name="">
-            <a:extLst xmlns:a="http://schemas.openxmlformats.org/drawingml/2006/main">
+          <p:cNvPr id="13" name="Rectangle 12">
+            <a:extLst>
               <a:ext uri="{FF2B5EF4-FFF2-40B4-BE49-F238E27FC236}">
                 <a16:creationId xmlns:a16="http://schemas.microsoft.com/office/drawing/2014/main" id="{0492C9C3-5328-4764-ADAE-C9036C8E0433}"/>
               </a:ext>
             </a:extLst>
           </p:cNvPr>
           <p:cNvSpPr>
-            <a:spLocks xmlns:a="http://schemas.openxmlformats.org/drawingml/2006/main" noGrp="1"/>
-          </p:cNvSpPr>
-          <p:nvPr/>
-        </p:nvSpPr>
-        <p:spPr>
-          <a:xfrm xmlns:a="http://schemas.openxmlformats.org/drawingml/2006/main">
+            <a:spLocks noGrp="1"/>
+          </p:cNvSpPr>
+          <p:nvPr/>
+        </p:nvSpPr>
+        <p:spPr>
+          <a:xfrm>
             <a:off x="8267700" y="4819650"/>
             <a:ext cx="3143250" cy="76200"/>
           </a:xfrm>
-          <a:prstGeom xmlns:a="http://schemas.openxmlformats.org/drawingml/2006/main" prst="rect">
-            <a:avLst/>
-          </a:prstGeom>
-          <a:solidFill xmlns:a="http://schemas.openxmlformats.org/drawingml/2006/main">
+          <a:prstGeom prst="rect">
+            <a:avLst/>
+          </a:prstGeom>
+          <a:solidFill>
             <a:srgbClr val="3D8DFF"/>
           </a:solidFill>
-          <a:ln xmlns:a="http://schemas.openxmlformats.org/drawingml/2006/main" w="0">
-            <a:noFill/>
-            <a:prstDash val="solid"/>
-          </a:ln>
-        </p:spPr>
-      </p:sp>
-      <p:sp>
-        <p:nvSpPr>
-          <p:cNvPr id="14" name="">
-            <a:extLst xmlns:a="http://schemas.openxmlformats.org/drawingml/2006/main">
+          <a:ln w="0">
+            <a:noFill/>
+            <a:prstDash val="solid"/>
+          </a:ln>
+        </p:spPr>
+      </p:sp>
+      <p:sp>
+        <p:nvSpPr>
+          <p:cNvPr id="14" name="Rectangle 13">
+            <a:extLst>
               <a:ext uri="{FF2B5EF4-FFF2-40B4-BE49-F238E27FC236}">
                 <a16:creationId xmlns:a16="http://schemas.microsoft.com/office/drawing/2014/main" id="{E9CE6CFE-AFA3-400F-9D6C-650E171F5EEE}"/>
               </a:ext>
             </a:extLst>
           </p:cNvPr>
           <p:cNvSpPr>
-            <a:spLocks xmlns:a="http://schemas.openxmlformats.org/drawingml/2006/main" noGrp="1"/>
-          </p:cNvSpPr>
-          <p:nvPr/>
-        </p:nvSpPr>
-        <p:spPr>
-          <a:xfrm xmlns:a="http://schemas.openxmlformats.org/drawingml/2006/main">
+            <a:spLocks noGrp="1"/>
+          </p:cNvSpPr>
+          <p:nvPr/>
+        </p:nvSpPr>
+        <p:spPr>
+          <a:xfrm>
             <a:off x="419100" y="6419850"/>
             <a:ext cx="3429000" cy="209550"/>
           </a:xfrm>
-          <a:prstGeom xmlns:a="http://schemas.openxmlformats.org/drawingml/2006/main" prst="rect">
-            <a:avLst/>
-          </a:prstGeom>
-          <a:noFill xmlns:a="http://schemas.openxmlformats.org/drawingml/2006/main"/>
-          <a:ln xmlns:a="http://schemas.openxmlformats.org/drawingml/2006/main" w="0">
-            <a:noFill/>
-            <a:prstDash val="solid"/>
-          </a:ln>
-        </p:spPr>
-        <p:txBody>
-          <a:bodyPr xmlns:a="http://schemas.openxmlformats.org/drawingml/2006/main" anchor="t">
+          <a:prstGeom prst="rect">
+            <a:avLst/>
+          </a:prstGeom>
+          <a:noFill/>
+          <a:ln w="0">
+            <a:noFill/>
+            <a:prstDash val="solid"/>
+          </a:ln>
+        </p:spPr>
+        <p:txBody>
+          <a:bodyPr anchor="t">
             <a:normAutofit fontScale="86111"/>
           </a:bodyPr>
-          <a:lstStyle xmlns:a="http://schemas.openxmlformats.org/drawingml/2006/main"/>
-          <a:p xmlns:a="http://schemas.openxmlformats.org/drawingml/2006/main">
+          <a:lstStyle/>
+          <a:p>
             <a:pPr algn="l">
               <a:defRPr sz="900" b="0">
                 <a:solidFill>
@@ -3269,38 +2994,38 @@
       </p:sp>
       <p:sp>
         <p:nvSpPr>
-          <p:cNvPr id="15" name="">
-            <a:extLst xmlns:a="http://schemas.openxmlformats.org/drawingml/2006/main">
+          <p:cNvPr id="15" name="Rectangle 14">
+            <a:extLst>
               <a:ext uri="{FF2B5EF4-FFF2-40B4-BE49-F238E27FC236}">
                 <a16:creationId xmlns:a16="http://schemas.microsoft.com/office/drawing/2014/main" id="{42BEE2C1-5329-42D8-B689-E07344D4DFF0}"/>
               </a:ext>
             </a:extLst>
           </p:cNvPr>
           <p:cNvSpPr>
-            <a:spLocks xmlns:a="http://schemas.openxmlformats.org/drawingml/2006/main" noGrp="1"/>
-          </p:cNvSpPr>
-          <p:nvPr/>
-        </p:nvSpPr>
-        <p:spPr>
-          <a:xfrm xmlns:a="http://schemas.openxmlformats.org/drawingml/2006/main">
+            <a:spLocks noGrp="1"/>
+          </p:cNvSpPr>
+          <p:nvPr/>
+        </p:nvSpPr>
+        <p:spPr>
+          <a:xfrm>
             <a:off x="11239500" y="6419850"/>
             <a:ext cx="523875" cy="209550"/>
           </a:xfrm>
-          <a:prstGeom xmlns:a="http://schemas.openxmlformats.org/drawingml/2006/main" prst="rect">
-            <a:avLst/>
-          </a:prstGeom>
-          <a:noFill xmlns:a="http://schemas.openxmlformats.org/drawingml/2006/main"/>
-          <a:ln xmlns:a="http://schemas.openxmlformats.org/drawingml/2006/main" w="0">
-            <a:noFill/>
-            <a:prstDash val="solid"/>
-          </a:ln>
-        </p:spPr>
-        <p:txBody>
-          <a:bodyPr xmlns:a="http://schemas.openxmlformats.org/drawingml/2006/main" anchor="t">
+          <a:prstGeom prst="rect">
+            <a:avLst/>
+          </a:prstGeom>
+          <a:noFill/>
+          <a:ln w="0">
+            <a:noFill/>
+            <a:prstDash val="solid"/>
+          </a:ln>
+        </p:spPr>
+        <p:txBody>
+          <a:bodyPr anchor="t">
             <a:normAutofit fontScale="86111"/>
           </a:bodyPr>
-          <a:lstStyle xmlns:a="http://schemas.openxmlformats.org/drawingml/2006/main"/>
-          <a:p xmlns:a="http://schemas.openxmlformats.org/drawingml/2006/main">
+          <a:lstStyle/>
+          <a:p>
             <a:pPr algn="r">
               <a:defRPr sz="900" b="0">
                 <a:solidFill>
@@ -3332,17 +3057,21 @@
       </p:ext>
     </p:extLst>
   </p:cSld>
+  <p:clrMapOvr>
+    <a:masterClrMapping/>
+  </p:clrMapOvr>
 </p:sld>
 </file>
 
 <file path=ppt/slides/slide4.xml><?xml version="1.0" encoding="utf-8"?>
-<p:sld xmlns:p="http://schemas.openxmlformats.org/presentationml/2006/main">
+<p:sld xmlns:a="http://schemas.openxmlformats.org/drawingml/2006/main" xmlns:r="http://schemas.openxmlformats.org/officeDocument/2006/relationships" xmlns:p="http://schemas.openxmlformats.org/presentationml/2006/main">
   <p:cSld>
     <p:bg>
       <p:bgPr>
-        <a:solidFill xmlns:a="http://schemas.openxmlformats.org/drawingml/2006/main">
+        <a:solidFill>
           <a:srgbClr val="FFFFFF"/>
         </a:solidFill>
+        <a:effectLst/>
       </p:bgPr>
     </p:bg>
     <p:spTree>
@@ -3352,42 +3081,47 @@
         <p:nvPr/>
       </p:nvGrpSpPr>
       <p:grpSpPr>
-        <a:xfrm xmlns:a="http://schemas.openxmlformats.org/drawingml/2006/main"/>
+        <a:xfrm>
+          <a:off x="0" y="0"/>
+          <a:ext cx="0" cy="0"/>
+          <a:chOff x="0" y="0"/>
+          <a:chExt cx="0" cy="0"/>
+        </a:xfrm>
       </p:grpSpPr>
       <p:sp>
         <p:nvSpPr>
-          <p:cNvPr id="17" name="">
-            <a:extLst xmlns:a="http://schemas.openxmlformats.org/drawingml/2006/main">
+          <p:cNvPr id="17" name="Rectangle 16">
+            <a:extLst>
               <a:ext uri="{FF2B5EF4-FFF2-40B4-BE49-F238E27FC236}">
                 <a16:creationId xmlns:a16="http://schemas.microsoft.com/office/drawing/2014/main" id="{60E22E78-FB61-487D-96C1-CF53D098A223}"/>
               </a:ext>
             </a:extLst>
           </p:cNvPr>
           <p:cNvSpPr>
-            <a:spLocks xmlns:a="http://schemas.openxmlformats.org/drawingml/2006/main" noGrp="1"/>
-          </p:cNvSpPr>
-          <p:nvPr/>
-        </p:nvSpPr>
-        <p:spPr>
-          <a:xfrm xmlns:a="http://schemas.openxmlformats.org/drawingml/2006/main">
+            <a:spLocks noGrp="1"/>
+          </p:cNvSpPr>
+          <p:nvPr/>
+        </p:nvSpPr>
+        <p:spPr>
+          <a:xfrm>
             <a:off x="419100" y="361950"/>
             <a:ext cx="10477500" cy="723900"/>
           </a:xfrm>
-          <a:prstGeom xmlns:a="http://schemas.openxmlformats.org/drawingml/2006/main" prst="rect">
-            <a:avLst/>
-          </a:prstGeom>
-          <a:noFill xmlns:a="http://schemas.openxmlformats.org/drawingml/2006/main"/>
-          <a:ln xmlns:a="http://schemas.openxmlformats.org/drawingml/2006/main" w="0">
-            <a:noFill/>
-            <a:prstDash val="solid"/>
-          </a:ln>
-        </p:spPr>
-        <p:txBody>
-          <a:bodyPr xmlns:a="http://schemas.openxmlformats.org/drawingml/2006/main" anchor="t">
-            <a:normAutofit fontScale="100000"/>
+          <a:prstGeom prst="rect">
+            <a:avLst/>
+          </a:prstGeom>
+          <a:noFill/>
+          <a:ln w="0">
+            <a:noFill/>
+            <a:prstDash val="solid"/>
+          </a:ln>
+        </p:spPr>
+        <p:txBody>
+          <a:bodyPr anchor="t">
+            <a:normAutofit/>
           </a:bodyPr>
-          <a:lstStyle xmlns:a="http://schemas.openxmlformats.org/drawingml/2006/main"/>
-          <a:p xmlns:a="http://schemas.openxmlformats.org/drawingml/2006/main">
+          <a:lstStyle/>
+          <a:p>
             <a:pPr algn="l">
               <a:defRPr sz="3000" b="1">
                 <a:solidFill>
@@ -3414,102 +3148,102 @@
       </p:sp>
       <p:sp>
         <p:nvSpPr>
-          <p:cNvPr id="2" name="">
-            <a:extLst xmlns:a="http://schemas.openxmlformats.org/drawingml/2006/main">
+          <p:cNvPr id="2" name="Rectangle 1">
+            <a:extLst>
               <a:ext uri="{FF2B5EF4-FFF2-40B4-BE49-F238E27FC236}">
                 <a16:creationId xmlns:a16="http://schemas.microsoft.com/office/drawing/2014/main" id="{D1D422F1-CEA9-4AC5-B28A-A930E3AA2E12}"/>
               </a:ext>
             </a:extLst>
           </p:cNvPr>
           <p:cNvSpPr>
-            <a:spLocks xmlns:a="http://schemas.openxmlformats.org/drawingml/2006/main" noGrp="1"/>
-          </p:cNvSpPr>
-          <p:nvPr/>
-        </p:nvSpPr>
-        <p:spPr>
-          <a:xfrm xmlns:a="http://schemas.openxmlformats.org/drawingml/2006/main">
+            <a:spLocks noGrp="1"/>
+          </p:cNvSpPr>
+          <p:nvPr/>
+        </p:nvSpPr>
+        <p:spPr>
+          <a:xfrm>
             <a:off x="819150" y="2952750"/>
             <a:ext cx="10382250" cy="19050"/>
           </a:xfrm>
-          <a:prstGeom xmlns:a="http://schemas.openxmlformats.org/drawingml/2006/main" prst="rect">
-            <a:avLst/>
-          </a:prstGeom>
-          <a:solidFill xmlns:a="http://schemas.openxmlformats.org/drawingml/2006/main">
+          <a:prstGeom prst="rect">
+            <a:avLst/>
+          </a:prstGeom>
+          <a:solidFill>
             <a:srgbClr val="B8BCC4"/>
           </a:solidFill>
-          <a:ln xmlns:a="http://schemas.openxmlformats.org/drawingml/2006/main" w="0">
-            <a:noFill/>
-            <a:prstDash val="solid"/>
-          </a:ln>
-        </p:spPr>
-      </p:sp>
-      <p:sp>
-        <p:nvSpPr>
-          <p:cNvPr id="3" name="">
-            <a:extLst xmlns:a="http://schemas.openxmlformats.org/drawingml/2006/main">
+          <a:ln w="0">
+            <a:noFill/>
+            <a:prstDash val="solid"/>
+          </a:ln>
+        </p:spPr>
+      </p:sp>
+      <p:sp>
+        <p:nvSpPr>
+          <p:cNvPr id="3" name="Rounded Rectangle 2">
+            <a:extLst>
               <a:ext uri="{FF2B5EF4-FFF2-40B4-BE49-F238E27FC236}">
                 <a16:creationId xmlns:a16="http://schemas.microsoft.com/office/drawing/2014/main" id="{3A447896-BEFD-4BFC-8DAD-60324D6CEFC7}"/>
               </a:ext>
             </a:extLst>
           </p:cNvPr>
           <p:cNvSpPr>
-            <a:spLocks xmlns:a="http://schemas.openxmlformats.org/drawingml/2006/main" noGrp="1"/>
-          </p:cNvSpPr>
-          <p:nvPr/>
-        </p:nvSpPr>
-        <p:spPr>
-          <a:xfrm xmlns:a="http://schemas.openxmlformats.org/drawingml/2006/main">
+            <a:spLocks noGrp="1"/>
+          </p:cNvSpPr>
+          <p:nvPr/>
+        </p:nvSpPr>
+        <p:spPr>
+          <a:xfrm>
             <a:off x="1047750" y="2819400"/>
             <a:ext cx="266700" cy="266700"/>
           </a:xfrm>
-          <a:prstGeom xmlns:a="http://schemas.openxmlformats.org/drawingml/2006/main" prst="roundRect">
+          <a:prstGeom prst="roundRect">
             <a:avLst>
               <a:gd name="adj" fmla="val 42857"/>
             </a:avLst>
           </a:prstGeom>
-          <a:solidFill xmlns:a="http://schemas.openxmlformats.org/drawingml/2006/main">
+          <a:solidFill>
             <a:srgbClr val="3D8DFF"/>
           </a:solidFill>
-          <a:ln xmlns:a="http://schemas.openxmlformats.org/drawingml/2006/main" w="0">
-            <a:noFill/>
-            <a:prstDash val="solid"/>
-          </a:ln>
-        </p:spPr>
-      </p:sp>
-      <p:sp>
-        <p:nvSpPr>
-          <p:cNvPr id="4" name="">
-            <a:extLst xmlns:a="http://schemas.openxmlformats.org/drawingml/2006/main">
+          <a:ln w="0">
+            <a:noFill/>
+            <a:prstDash val="solid"/>
+          </a:ln>
+        </p:spPr>
+      </p:sp>
+      <p:sp>
+        <p:nvSpPr>
+          <p:cNvPr id="4" name="Rectangle 3">
+            <a:extLst>
               <a:ext uri="{FF2B5EF4-FFF2-40B4-BE49-F238E27FC236}">
                 <a16:creationId xmlns:a16="http://schemas.microsoft.com/office/drawing/2014/main" id="{483BD600-A4E5-4F09-865D-20EEAE9FA762}"/>
               </a:ext>
             </a:extLst>
           </p:cNvPr>
           <p:cNvSpPr>
-            <a:spLocks xmlns:a="http://schemas.openxmlformats.org/drawingml/2006/main" noGrp="1"/>
-          </p:cNvSpPr>
-          <p:nvPr/>
-        </p:nvSpPr>
-        <p:spPr>
-          <a:xfrm xmlns:a="http://schemas.openxmlformats.org/drawingml/2006/main">
+            <a:spLocks noGrp="1"/>
+          </p:cNvSpPr>
+          <p:nvPr/>
+        </p:nvSpPr>
+        <p:spPr>
+          <a:xfrm>
             <a:off x="857250" y="2095500"/>
             <a:ext cx="2095500" cy="400050"/>
           </a:xfrm>
-          <a:prstGeom xmlns:a="http://schemas.openxmlformats.org/drawingml/2006/main" prst="rect">
-            <a:avLst/>
-          </a:prstGeom>
-          <a:noFill xmlns:a="http://schemas.openxmlformats.org/drawingml/2006/main"/>
-          <a:ln xmlns:a="http://schemas.openxmlformats.org/drawingml/2006/main" w="0">
-            <a:noFill/>
-            <a:prstDash val="solid"/>
-          </a:ln>
-        </p:spPr>
-        <p:txBody>
-          <a:bodyPr xmlns:a="http://schemas.openxmlformats.org/drawingml/2006/main" anchor="t">
-            <a:normAutofit fontScale="100000"/>
+          <a:prstGeom prst="rect">
+            <a:avLst/>
+          </a:prstGeom>
+          <a:noFill/>
+          <a:ln w="0">
+            <a:noFill/>
+            <a:prstDash val="solid"/>
+          </a:ln>
+        </p:spPr>
+        <p:txBody>
+          <a:bodyPr anchor="t">
+            <a:normAutofit/>
           </a:bodyPr>
-          <a:lstStyle xmlns:a="http://schemas.openxmlformats.org/drawingml/2006/main"/>
-          <a:p xmlns:a="http://schemas.openxmlformats.org/drawingml/2006/main">
+          <a:lstStyle/>
+          <a:p>
             <a:pPr algn="l">
               <a:defRPr sz="1350" b="1">
                 <a:solidFill>
@@ -3536,38 +3270,38 @@
       </p:sp>
       <p:sp>
         <p:nvSpPr>
-          <p:cNvPr id="5" name="">
-            <a:extLst xmlns:a="http://schemas.openxmlformats.org/drawingml/2006/main">
+          <p:cNvPr id="5" name="Rectangle 4">
+            <a:extLst>
               <a:ext uri="{FF2B5EF4-FFF2-40B4-BE49-F238E27FC236}">
                 <a16:creationId xmlns:a16="http://schemas.microsoft.com/office/drawing/2014/main" id="{FBEF9908-DADD-488D-901A-3BC2621BEACA}"/>
               </a:ext>
             </a:extLst>
           </p:cNvPr>
           <p:cNvSpPr>
-            <a:spLocks xmlns:a="http://schemas.openxmlformats.org/drawingml/2006/main" noGrp="1"/>
-          </p:cNvSpPr>
-          <p:nvPr/>
-        </p:nvSpPr>
-        <p:spPr>
-          <a:xfrm xmlns:a="http://schemas.openxmlformats.org/drawingml/2006/main">
+            <a:spLocks noGrp="1"/>
+          </p:cNvSpPr>
+          <p:nvPr/>
+        </p:nvSpPr>
+        <p:spPr>
+          <a:xfrm>
             <a:off x="857250" y="3390900"/>
             <a:ext cx="2190750" cy="838200"/>
           </a:xfrm>
-          <a:prstGeom xmlns:a="http://schemas.openxmlformats.org/drawingml/2006/main" prst="rect">
-            <a:avLst/>
-          </a:prstGeom>
-          <a:noFill xmlns:a="http://schemas.openxmlformats.org/drawingml/2006/main"/>
-          <a:ln xmlns:a="http://schemas.openxmlformats.org/drawingml/2006/main" w="0">
-            <a:noFill/>
-            <a:prstDash val="solid"/>
-          </a:ln>
-        </p:spPr>
-        <p:txBody>
-          <a:bodyPr xmlns:a="http://schemas.openxmlformats.org/drawingml/2006/main" anchor="t">
-            <a:normAutofit fontScale="100000"/>
+          <a:prstGeom prst="rect">
+            <a:avLst/>
+          </a:prstGeom>
+          <a:noFill/>
+          <a:ln w="0">
+            <a:noFill/>
+            <a:prstDash val="solid"/>
+          </a:ln>
+        </p:spPr>
+        <p:txBody>
+          <a:bodyPr anchor="t">
+            <a:normAutofit/>
           </a:bodyPr>
-          <a:lstStyle xmlns:a="http://schemas.openxmlformats.org/drawingml/2006/main"/>
-          <a:p xmlns:a="http://schemas.openxmlformats.org/drawingml/2006/main">
+          <a:lstStyle/>
+          <a:p>
             <a:pPr algn="l">
               <a:defRPr sz="1650" b="0">
                 <a:solidFill>
@@ -3594,71 +3328,71 @@
       </p:sp>
       <p:sp>
         <p:nvSpPr>
-          <p:cNvPr id="6" name="">
-            <a:extLst xmlns:a="http://schemas.openxmlformats.org/drawingml/2006/main">
+          <p:cNvPr id="6" name="Rounded Rectangle 5">
+            <a:extLst>
               <a:ext uri="{FF2B5EF4-FFF2-40B4-BE49-F238E27FC236}">
                 <a16:creationId xmlns:a16="http://schemas.microsoft.com/office/drawing/2014/main" id="{D642290E-894E-4B03-8692-7E19327F8B78}"/>
               </a:ext>
             </a:extLst>
           </p:cNvPr>
           <p:cNvSpPr>
-            <a:spLocks xmlns:a="http://schemas.openxmlformats.org/drawingml/2006/main" noGrp="1"/>
-          </p:cNvSpPr>
-          <p:nvPr/>
-        </p:nvSpPr>
-        <p:spPr>
-          <a:xfrm xmlns:a="http://schemas.openxmlformats.org/drawingml/2006/main">
+            <a:spLocks noGrp="1"/>
+          </p:cNvSpPr>
+          <p:nvPr/>
+        </p:nvSpPr>
+        <p:spPr>
+          <a:xfrm>
             <a:off x="3762375" y="2819400"/>
             <a:ext cx="266700" cy="266700"/>
           </a:xfrm>
-          <a:prstGeom xmlns:a="http://schemas.openxmlformats.org/drawingml/2006/main" prst="roundRect">
+          <a:prstGeom prst="roundRect">
             <a:avLst>
               <a:gd name="adj" fmla="val 42857"/>
             </a:avLst>
           </a:prstGeom>
-          <a:solidFill xmlns:a="http://schemas.openxmlformats.org/drawingml/2006/main">
+          <a:solidFill>
             <a:srgbClr val="3D8DFF"/>
           </a:solidFill>
-          <a:ln xmlns:a="http://schemas.openxmlformats.org/drawingml/2006/main" w="0">
-            <a:noFill/>
-            <a:prstDash val="solid"/>
-          </a:ln>
-        </p:spPr>
-      </p:sp>
-      <p:sp>
-        <p:nvSpPr>
-          <p:cNvPr id="7" name="">
-            <a:extLst xmlns:a="http://schemas.openxmlformats.org/drawingml/2006/main">
+          <a:ln w="0">
+            <a:noFill/>
+            <a:prstDash val="solid"/>
+          </a:ln>
+        </p:spPr>
+      </p:sp>
+      <p:sp>
+        <p:nvSpPr>
+          <p:cNvPr id="7" name="Rectangle 6">
+            <a:extLst>
               <a:ext uri="{FF2B5EF4-FFF2-40B4-BE49-F238E27FC236}">
                 <a16:creationId xmlns:a16="http://schemas.microsoft.com/office/drawing/2014/main" id="{E396D8BB-F82F-4558-9116-A7DA682EFA0A}"/>
               </a:ext>
             </a:extLst>
           </p:cNvPr>
           <p:cNvSpPr>
-            <a:spLocks xmlns:a="http://schemas.openxmlformats.org/drawingml/2006/main" noGrp="1"/>
-          </p:cNvSpPr>
-          <p:nvPr/>
-        </p:nvSpPr>
-        <p:spPr>
-          <a:xfrm xmlns:a="http://schemas.openxmlformats.org/drawingml/2006/main">
+            <a:spLocks noGrp="1"/>
+          </p:cNvSpPr>
+          <p:nvPr/>
+        </p:nvSpPr>
+        <p:spPr>
+          <a:xfrm>
             <a:off x="3571875" y="2095500"/>
             <a:ext cx="2095500" cy="400050"/>
           </a:xfrm>
-          <a:prstGeom xmlns:a="http://schemas.openxmlformats.org/drawingml/2006/main" prst="rect">
-            <a:avLst/>
-          </a:prstGeom>
-          <a:noFill xmlns:a="http://schemas.openxmlformats.org/drawingml/2006/main"/>
-          <a:ln xmlns:a="http://schemas.openxmlformats.org/drawingml/2006/main" w="0">
-            <a:noFill/>
-            <a:prstDash val="solid"/>
-          </a:ln>
-        </p:spPr>
-        <p:txBody>
-          <a:bodyPr xmlns:a="http://schemas.openxmlformats.org/drawingml/2006/main" anchor="t">
-            <a:normAutofit fontScale="100000"/>
+          <a:prstGeom prst="rect">
+            <a:avLst/>
+          </a:prstGeom>
+          <a:noFill/>
+          <a:ln w="0">
+            <a:noFill/>
+            <a:prstDash val="solid"/>
+          </a:ln>
+        </p:spPr>
+        <p:txBody>
+          <a:bodyPr anchor="t">
+            <a:normAutofit/>
           </a:bodyPr>
-          <a:lstStyle xmlns:a="http://schemas.openxmlformats.org/drawingml/2006/main"/>
-          <a:p xmlns:a="http://schemas.openxmlformats.org/drawingml/2006/main">
+          <a:lstStyle/>
+          <a:p>
             <a:pPr algn="l">
               <a:defRPr sz="1350" b="1">
                 <a:solidFill>
@@ -3685,38 +3419,38 @@
       </p:sp>
       <p:sp>
         <p:nvSpPr>
-          <p:cNvPr id="8" name="">
-            <a:extLst xmlns:a="http://schemas.openxmlformats.org/drawingml/2006/main">
+          <p:cNvPr id="8" name="Rectangle 7">
+            <a:extLst>
               <a:ext uri="{FF2B5EF4-FFF2-40B4-BE49-F238E27FC236}">
                 <a16:creationId xmlns:a16="http://schemas.microsoft.com/office/drawing/2014/main" id="{DD7D4369-9BE3-4848-B7B5-F4C4C57B8C94}"/>
               </a:ext>
             </a:extLst>
           </p:cNvPr>
           <p:cNvSpPr>
-            <a:spLocks xmlns:a="http://schemas.openxmlformats.org/drawingml/2006/main" noGrp="1"/>
-          </p:cNvSpPr>
-          <p:nvPr/>
-        </p:nvSpPr>
-        <p:spPr>
-          <a:xfrm xmlns:a="http://schemas.openxmlformats.org/drawingml/2006/main">
+            <a:spLocks noGrp="1"/>
+          </p:cNvSpPr>
+          <p:nvPr/>
+        </p:nvSpPr>
+        <p:spPr>
+          <a:xfrm>
             <a:off x="3571875" y="3390900"/>
             <a:ext cx="2190750" cy="838200"/>
           </a:xfrm>
-          <a:prstGeom xmlns:a="http://schemas.openxmlformats.org/drawingml/2006/main" prst="rect">
-            <a:avLst/>
-          </a:prstGeom>
-          <a:noFill xmlns:a="http://schemas.openxmlformats.org/drawingml/2006/main"/>
-          <a:ln xmlns:a="http://schemas.openxmlformats.org/drawingml/2006/main" w="0">
-            <a:noFill/>
-            <a:prstDash val="solid"/>
-          </a:ln>
-        </p:spPr>
-        <p:txBody>
-          <a:bodyPr xmlns:a="http://schemas.openxmlformats.org/drawingml/2006/main" anchor="t">
-            <a:normAutofit fontScale="100000"/>
+          <a:prstGeom prst="rect">
+            <a:avLst/>
+          </a:prstGeom>
+          <a:noFill/>
+          <a:ln w="0">
+            <a:noFill/>
+            <a:prstDash val="solid"/>
+          </a:ln>
+        </p:spPr>
+        <p:txBody>
+          <a:bodyPr anchor="t">
+            <a:normAutofit/>
           </a:bodyPr>
-          <a:lstStyle xmlns:a="http://schemas.openxmlformats.org/drawingml/2006/main"/>
-          <a:p xmlns:a="http://schemas.openxmlformats.org/drawingml/2006/main">
+          <a:lstStyle/>
+          <a:p>
             <a:pPr algn="l">
               <a:defRPr sz="1650" b="0">
                 <a:solidFill>
@@ -3743,71 +3477,71 @@
       </p:sp>
       <p:sp>
         <p:nvSpPr>
-          <p:cNvPr id="9" name="">
-            <a:extLst xmlns:a="http://schemas.openxmlformats.org/drawingml/2006/main">
+          <p:cNvPr id="9" name="Rounded Rectangle 8">
+            <a:extLst>
               <a:ext uri="{FF2B5EF4-FFF2-40B4-BE49-F238E27FC236}">
                 <a16:creationId xmlns:a16="http://schemas.microsoft.com/office/drawing/2014/main" id="{78F34AA1-2373-494D-BE26-438CC91058E3}"/>
               </a:ext>
             </a:extLst>
           </p:cNvPr>
           <p:cNvSpPr>
-            <a:spLocks xmlns:a="http://schemas.openxmlformats.org/drawingml/2006/main" noGrp="1"/>
-          </p:cNvSpPr>
-          <p:nvPr/>
-        </p:nvSpPr>
-        <p:spPr>
-          <a:xfrm xmlns:a="http://schemas.openxmlformats.org/drawingml/2006/main">
+            <a:spLocks noGrp="1"/>
+          </p:cNvSpPr>
+          <p:nvPr/>
+        </p:nvSpPr>
+        <p:spPr>
+          <a:xfrm>
             <a:off x="6477000" y="2819400"/>
             <a:ext cx="266700" cy="266700"/>
           </a:xfrm>
-          <a:prstGeom xmlns:a="http://schemas.openxmlformats.org/drawingml/2006/main" prst="roundRect">
+          <a:prstGeom prst="roundRect">
             <a:avLst>
               <a:gd name="adj" fmla="val 42857"/>
             </a:avLst>
           </a:prstGeom>
-          <a:solidFill xmlns:a="http://schemas.openxmlformats.org/drawingml/2006/main">
+          <a:solidFill>
             <a:srgbClr val="3D8DFF"/>
           </a:solidFill>
-          <a:ln xmlns:a="http://schemas.openxmlformats.org/drawingml/2006/main" w="0">
-            <a:noFill/>
-            <a:prstDash val="solid"/>
-          </a:ln>
-        </p:spPr>
-      </p:sp>
-      <p:sp>
-        <p:nvSpPr>
-          <p:cNvPr id="10" name="">
-            <a:extLst xmlns:a="http://schemas.openxmlformats.org/drawingml/2006/main">
+          <a:ln w="0">
+            <a:noFill/>
+            <a:prstDash val="solid"/>
+          </a:ln>
+        </p:spPr>
+      </p:sp>
+      <p:sp>
+        <p:nvSpPr>
+          <p:cNvPr id="10" name="Rectangle 9">
+            <a:extLst>
               <a:ext uri="{FF2B5EF4-FFF2-40B4-BE49-F238E27FC236}">
                 <a16:creationId xmlns:a16="http://schemas.microsoft.com/office/drawing/2014/main" id="{64961033-FA8F-4D6B-8D34-F539AD2E9E0C}"/>
               </a:ext>
             </a:extLst>
           </p:cNvPr>
           <p:cNvSpPr>
-            <a:spLocks xmlns:a="http://schemas.openxmlformats.org/drawingml/2006/main" noGrp="1"/>
-          </p:cNvSpPr>
-          <p:nvPr/>
-        </p:nvSpPr>
-        <p:spPr>
-          <a:xfrm xmlns:a="http://schemas.openxmlformats.org/drawingml/2006/main">
+            <a:spLocks noGrp="1"/>
+          </p:cNvSpPr>
+          <p:nvPr/>
+        </p:nvSpPr>
+        <p:spPr>
+          <a:xfrm>
             <a:off x="6286500" y="2095500"/>
             <a:ext cx="2095500" cy="400050"/>
           </a:xfrm>
-          <a:prstGeom xmlns:a="http://schemas.openxmlformats.org/drawingml/2006/main" prst="rect">
-            <a:avLst/>
-          </a:prstGeom>
-          <a:noFill xmlns:a="http://schemas.openxmlformats.org/drawingml/2006/main"/>
-          <a:ln xmlns:a="http://schemas.openxmlformats.org/drawingml/2006/main" w="0">
-            <a:noFill/>
-            <a:prstDash val="solid"/>
-          </a:ln>
-        </p:spPr>
-        <p:txBody>
-          <a:bodyPr xmlns:a="http://schemas.openxmlformats.org/drawingml/2006/main" anchor="t">
-            <a:normAutofit fontScale="100000"/>
+          <a:prstGeom prst="rect">
+            <a:avLst/>
+          </a:prstGeom>
+          <a:noFill/>
+          <a:ln w="0">
+            <a:noFill/>
+            <a:prstDash val="solid"/>
+          </a:ln>
+        </p:spPr>
+        <p:txBody>
+          <a:bodyPr anchor="t">
+            <a:normAutofit/>
           </a:bodyPr>
-          <a:lstStyle xmlns:a="http://schemas.openxmlformats.org/drawingml/2006/main"/>
-          <a:p xmlns:a="http://schemas.openxmlformats.org/drawingml/2006/main">
+          <a:lstStyle/>
+          <a:p>
             <a:pPr algn="l">
               <a:defRPr sz="1350" b="1">
                 <a:solidFill>
@@ -3834,38 +3568,38 @@
       </p:sp>
       <p:sp>
         <p:nvSpPr>
-          <p:cNvPr id="11" name="">
-            <a:extLst xmlns:a="http://schemas.openxmlformats.org/drawingml/2006/main">
+          <p:cNvPr id="11" name="Rectangle 10">
+            <a:extLst>
               <a:ext uri="{FF2B5EF4-FFF2-40B4-BE49-F238E27FC236}">
                 <a16:creationId xmlns:a16="http://schemas.microsoft.com/office/drawing/2014/main" id="{E49ABE0E-91B4-466E-9679-1F3592FD70EE}"/>
               </a:ext>
             </a:extLst>
           </p:cNvPr>
           <p:cNvSpPr>
-            <a:spLocks xmlns:a="http://schemas.openxmlformats.org/drawingml/2006/main" noGrp="1"/>
-          </p:cNvSpPr>
-          <p:nvPr/>
-        </p:nvSpPr>
-        <p:spPr>
-          <a:xfrm xmlns:a="http://schemas.openxmlformats.org/drawingml/2006/main">
+            <a:spLocks noGrp="1"/>
+          </p:cNvSpPr>
+          <p:nvPr/>
+        </p:nvSpPr>
+        <p:spPr>
+          <a:xfrm>
             <a:off x="6286500" y="3390900"/>
             <a:ext cx="2190750" cy="838200"/>
           </a:xfrm>
-          <a:prstGeom xmlns:a="http://schemas.openxmlformats.org/drawingml/2006/main" prst="rect">
-            <a:avLst/>
-          </a:prstGeom>
-          <a:noFill xmlns:a="http://schemas.openxmlformats.org/drawingml/2006/main"/>
-          <a:ln xmlns:a="http://schemas.openxmlformats.org/drawingml/2006/main" w="0">
-            <a:noFill/>
-            <a:prstDash val="solid"/>
-          </a:ln>
-        </p:spPr>
-        <p:txBody>
-          <a:bodyPr xmlns:a="http://schemas.openxmlformats.org/drawingml/2006/main" anchor="t">
-            <a:normAutofit fontScale="100000"/>
+          <a:prstGeom prst="rect">
+            <a:avLst/>
+          </a:prstGeom>
+          <a:noFill/>
+          <a:ln w="0">
+            <a:noFill/>
+            <a:prstDash val="solid"/>
+          </a:ln>
+        </p:spPr>
+        <p:txBody>
+          <a:bodyPr anchor="t">
+            <a:normAutofit/>
           </a:bodyPr>
-          <a:lstStyle xmlns:a="http://schemas.openxmlformats.org/drawingml/2006/main"/>
-          <a:p xmlns:a="http://schemas.openxmlformats.org/drawingml/2006/main">
+          <a:lstStyle/>
+          <a:p>
             <a:pPr algn="l">
               <a:defRPr sz="1650" b="0">
                 <a:solidFill>
@@ -3892,71 +3626,71 @@
       </p:sp>
       <p:sp>
         <p:nvSpPr>
-          <p:cNvPr id="12" name="">
-            <a:extLst xmlns:a="http://schemas.openxmlformats.org/drawingml/2006/main">
+          <p:cNvPr id="12" name="Rounded Rectangle 11">
+            <a:extLst>
               <a:ext uri="{FF2B5EF4-FFF2-40B4-BE49-F238E27FC236}">
                 <a16:creationId xmlns:a16="http://schemas.microsoft.com/office/drawing/2014/main" id="{D19A2BE5-DDA1-4169-A799-38BC54231F7D}"/>
               </a:ext>
             </a:extLst>
           </p:cNvPr>
           <p:cNvSpPr>
-            <a:spLocks xmlns:a="http://schemas.openxmlformats.org/drawingml/2006/main" noGrp="1"/>
-          </p:cNvSpPr>
-          <p:nvPr/>
-        </p:nvSpPr>
-        <p:spPr>
-          <a:xfrm xmlns:a="http://schemas.openxmlformats.org/drawingml/2006/main">
+            <a:spLocks noGrp="1"/>
+          </p:cNvSpPr>
+          <p:nvPr/>
+        </p:nvSpPr>
+        <p:spPr>
+          <a:xfrm>
             <a:off x="9191625" y="2819400"/>
             <a:ext cx="266700" cy="266700"/>
           </a:xfrm>
-          <a:prstGeom xmlns:a="http://schemas.openxmlformats.org/drawingml/2006/main" prst="roundRect">
+          <a:prstGeom prst="roundRect">
             <a:avLst>
               <a:gd name="adj" fmla="val 42857"/>
             </a:avLst>
           </a:prstGeom>
-          <a:solidFill xmlns:a="http://schemas.openxmlformats.org/drawingml/2006/main">
+          <a:solidFill>
             <a:srgbClr val="3D8DFF"/>
           </a:solidFill>
-          <a:ln xmlns:a="http://schemas.openxmlformats.org/drawingml/2006/main" w="0">
-            <a:noFill/>
-            <a:prstDash val="solid"/>
-          </a:ln>
-        </p:spPr>
-      </p:sp>
-      <p:sp>
-        <p:nvSpPr>
-          <p:cNvPr id="13" name="">
-            <a:extLst xmlns:a="http://schemas.openxmlformats.org/drawingml/2006/main">
+          <a:ln w="0">
+            <a:noFill/>
+            <a:prstDash val="solid"/>
+          </a:ln>
+        </p:spPr>
+      </p:sp>
+      <p:sp>
+        <p:nvSpPr>
+          <p:cNvPr id="13" name="Rectangle 12">
+            <a:extLst>
               <a:ext uri="{FF2B5EF4-FFF2-40B4-BE49-F238E27FC236}">
                 <a16:creationId xmlns:a16="http://schemas.microsoft.com/office/drawing/2014/main" id="{A3877821-A539-4711-B3C0-AA3FDFA83259}"/>
               </a:ext>
             </a:extLst>
           </p:cNvPr>
           <p:cNvSpPr>
-            <a:spLocks xmlns:a="http://schemas.openxmlformats.org/drawingml/2006/main" noGrp="1"/>
-          </p:cNvSpPr>
-          <p:nvPr/>
-        </p:nvSpPr>
-        <p:spPr>
-          <a:xfrm xmlns:a="http://schemas.openxmlformats.org/drawingml/2006/main">
+            <a:spLocks noGrp="1"/>
+          </p:cNvSpPr>
+          <p:nvPr/>
+        </p:nvSpPr>
+        <p:spPr>
+          <a:xfrm>
             <a:off x="9001125" y="2095500"/>
             <a:ext cx="2095500" cy="400050"/>
           </a:xfrm>
-          <a:prstGeom xmlns:a="http://schemas.openxmlformats.org/drawingml/2006/main" prst="rect">
-            <a:avLst/>
-          </a:prstGeom>
-          <a:noFill xmlns:a="http://schemas.openxmlformats.org/drawingml/2006/main"/>
-          <a:ln xmlns:a="http://schemas.openxmlformats.org/drawingml/2006/main" w="0">
-            <a:noFill/>
-            <a:prstDash val="solid"/>
-          </a:ln>
-        </p:spPr>
-        <p:txBody>
-          <a:bodyPr xmlns:a="http://schemas.openxmlformats.org/drawingml/2006/main" anchor="t">
-            <a:normAutofit fontScale="100000"/>
+          <a:prstGeom prst="rect">
+            <a:avLst/>
+          </a:prstGeom>
+          <a:noFill/>
+          <a:ln w="0">
+            <a:noFill/>
+            <a:prstDash val="solid"/>
+          </a:ln>
+        </p:spPr>
+        <p:txBody>
+          <a:bodyPr anchor="t">
+            <a:normAutofit/>
           </a:bodyPr>
-          <a:lstStyle xmlns:a="http://schemas.openxmlformats.org/drawingml/2006/main"/>
-          <a:p xmlns:a="http://schemas.openxmlformats.org/drawingml/2006/main">
+          <a:lstStyle/>
+          <a:p>
             <a:pPr algn="l">
               <a:defRPr sz="1350" b="1">
                 <a:solidFill>
@@ -3983,38 +3717,38 @@
       </p:sp>
       <p:sp>
         <p:nvSpPr>
-          <p:cNvPr id="14" name="">
-            <a:extLst xmlns:a="http://schemas.openxmlformats.org/drawingml/2006/main">
+          <p:cNvPr id="14" name="Rectangle 13">
+            <a:extLst>
               <a:ext uri="{FF2B5EF4-FFF2-40B4-BE49-F238E27FC236}">
                 <a16:creationId xmlns:a16="http://schemas.microsoft.com/office/drawing/2014/main" id="{1EB1C33C-C7D3-4ECE-9A03-6267CE45A9B4}"/>
               </a:ext>
             </a:extLst>
           </p:cNvPr>
           <p:cNvSpPr>
-            <a:spLocks xmlns:a="http://schemas.openxmlformats.org/drawingml/2006/main" noGrp="1"/>
-          </p:cNvSpPr>
-          <p:nvPr/>
-        </p:nvSpPr>
-        <p:spPr>
-          <a:xfrm xmlns:a="http://schemas.openxmlformats.org/drawingml/2006/main">
+            <a:spLocks noGrp="1"/>
+          </p:cNvSpPr>
+          <p:nvPr/>
+        </p:nvSpPr>
+        <p:spPr>
+          <a:xfrm>
             <a:off x="9001125" y="3390900"/>
             <a:ext cx="2190750" cy="838200"/>
           </a:xfrm>
-          <a:prstGeom xmlns:a="http://schemas.openxmlformats.org/drawingml/2006/main" prst="rect">
-            <a:avLst/>
-          </a:prstGeom>
-          <a:noFill xmlns:a="http://schemas.openxmlformats.org/drawingml/2006/main"/>
-          <a:ln xmlns:a="http://schemas.openxmlformats.org/drawingml/2006/main" w="0">
-            <a:noFill/>
-            <a:prstDash val="solid"/>
-          </a:ln>
-        </p:spPr>
-        <p:txBody>
-          <a:bodyPr xmlns:a="http://schemas.openxmlformats.org/drawingml/2006/main" anchor="t">
-            <a:normAutofit fontScale="100000"/>
+          <a:prstGeom prst="rect">
+            <a:avLst/>
+          </a:prstGeom>
+          <a:noFill/>
+          <a:ln w="0">
+            <a:noFill/>
+            <a:prstDash val="solid"/>
+          </a:ln>
+        </p:spPr>
+        <p:txBody>
+          <a:bodyPr anchor="t">
+            <a:normAutofit/>
           </a:bodyPr>
-          <a:lstStyle xmlns:a="http://schemas.openxmlformats.org/drawingml/2006/main"/>
-          <a:p xmlns:a="http://schemas.openxmlformats.org/drawingml/2006/main">
+          <a:lstStyle/>
+          <a:p>
             <a:pPr algn="l">
               <a:defRPr sz="1650" b="0">
                 <a:solidFill>
@@ -4041,38 +3775,38 @@
       </p:sp>
       <p:sp>
         <p:nvSpPr>
-          <p:cNvPr id="15" name="">
-            <a:extLst xmlns:a="http://schemas.openxmlformats.org/drawingml/2006/main">
+          <p:cNvPr id="15" name="Rectangle 14">
+            <a:extLst>
               <a:ext uri="{FF2B5EF4-FFF2-40B4-BE49-F238E27FC236}">
                 <a16:creationId xmlns:a16="http://schemas.microsoft.com/office/drawing/2014/main" id="{97F1D53A-A99E-444E-B1F2-00014B0676E4}"/>
               </a:ext>
             </a:extLst>
           </p:cNvPr>
           <p:cNvSpPr>
-            <a:spLocks xmlns:a="http://schemas.openxmlformats.org/drawingml/2006/main" noGrp="1"/>
-          </p:cNvSpPr>
-          <p:nvPr/>
-        </p:nvSpPr>
-        <p:spPr>
-          <a:xfrm xmlns:a="http://schemas.openxmlformats.org/drawingml/2006/main">
+            <a:spLocks noGrp="1"/>
+          </p:cNvSpPr>
+          <p:nvPr/>
+        </p:nvSpPr>
+        <p:spPr>
+          <a:xfrm>
             <a:off x="419100" y="6419850"/>
             <a:ext cx="3429000" cy="209550"/>
           </a:xfrm>
-          <a:prstGeom xmlns:a="http://schemas.openxmlformats.org/drawingml/2006/main" prst="rect">
-            <a:avLst/>
-          </a:prstGeom>
-          <a:noFill xmlns:a="http://schemas.openxmlformats.org/drawingml/2006/main"/>
-          <a:ln xmlns:a="http://schemas.openxmlformats.org/drawingml/2006/main" w="0">
-            <a:noFill/>
-            <a:prstDash val="solid"/>
-          </a:ln>
-        </p:spPr>
-        <p:txBody>
-          <a:bodyPr xmlns:a="http://schemas.openxmlformats.org/drawingml/2006/main" anchor="t">
+          <a:prstGeom prst="rect">
+            <a:avLst/>
+          </a:prstGeom>
+          <a:noFill/>
+          <a:ln w="0">
+            <a:noFill/>
+            <a:prstDash val="solid"/>
+          </a:ln>
+        </p:spPr>
+        <p:txBody>
+          <a:bodyPr anchor="t">
             <a:normAutofit fontScale="86111"/>
           </a:bodyPr>
-          <a:lstStyle xmlns:a="http://schemas.openxmlformats.org/drawingml/2006/main"/>
-          <a:p xmlns:a="http://schemas.openxmlformats.org/drawingml/2006/main">
+          <a:lstStyle/>
+          <a:p>
             <a:pPr algn="l">
               <a:defRPr sz="900" b="0">
                 <a:solidFill>
@@ -4099,38 +3833,38 @@
       </p:sp>
       <p:sp>
         <p:nvSpPr>
-          <p:cNvPr id="16" name="">
-            <a:extLst xmlns:a="http://schemas.openxmlformats.org/drawingml/2006/main">
+          <p:cNvPr id="16" name="Rectangle 15">
+            <a:extLst>
               <a:ext uri="{FF2B5EF4-FFF2-40B4-BE49-F238E27FC236}">
                 <a16:creationId xmlns:a16="http://schemas.microsoft.com/office/drawing/2014/main" id="{3B27EC24-7615-4890-8803-EBE409005617}"/>
               </a:ext>
             </a:extLst>
           </p:cNvPr>
           <p:cNvSpPr>
-            <a:spLocks xmlns:a="http://schemas.openxmlformats.org/drawingml/2006/main" noGrp="1"/>
-          </p:cNvSpPr>
-          <p:nvPr/>
-        </p:nvSpPr>
-        <p:spPr>
-          <a:xfrm xmlns:a="http://schemas.openxmlformats.org/drawingml/2006/main">
+            <a:spLocks noGrp="1"/>
+          </p:cNvSpPr>
+          <p:nvPr/>
+        </p:nvSpPr>
+        <p:spPr>
+          <a:xfrm>
             <a:off x="11239500" y="6419850"/>
             <a:ext cx="523875" cy="209550"/>
           </a:xfrm>
-          <a:prstGeom xmlns:a="http://schemas.openxmlformats.org/drawingml/2006/main" prst="rect">
-            <a:avLst/>
-          </a:prstGeom>
-          <a:noFill xmlns:a="http://schemas.openxmlformats.org/drawingml/2006/main"/>
-          <a:ln xmlns:a="http://schemas.openxmlformats.org/drawingml/2006/main" w="0">
-            <a:noFill/>
-            <a:prstDash val="solid"/>
-          </a:ln>
-        </p:spPr>
-        <p:txBody>
-          <a:bodyPr xmlns:a="http://schemas.openxmlformats.org/drawingml/2006/main" anchor="t">
+          <a:prstGeom prst="rect">
+            <a:avLst/>
+          </a:prstGeom>
+          <a:noFill/>
+          <a:ln w="0">
+            <a:noFill/>
+            <a:prstDash val="solid"/>
+          </a:ln>
+        </p:spPr>
+        <p:txBody>
+          <a:bodyPr anchor="t">
             <a:normAutofit fontScale="86111"/>
           </a:bodyPr>
-          <a:lstStyle xmlns:a="http://schemas.openxmlformats.org/drawingml/2006/main"/>
-          <a:p xmlns:a="http://schemas.openxmlformats.org/drawingml/2006/main">
+          <a:lstStyle/>
+          <a:p>
             <a:pPr algn="r">
               <a:defRPr sz="900" b="0">
                 <a:solidFill>
@@ -4162,17 +3896,21 @@
       </p:ext>
     </p:extLst>
   </p:cSld>
+  <p:clrMapOvr>
+    <a:masterClrMapping/>
+  </p:clrMapOvr>
 </p:sld>
 </file>
 
 <file path=ppt/slides/slide5.xml><?xml version="1.0" encoding="utf-8"?>
-<p:sld xmlns:p="http://schemas.openxmlformats.org/presentationml/2006/main">
+<p:sld xmlns:a="http://schemas.openxmlformats.org/drawingml/2006/main" xmlns:r="http://schemas.openxmlformats.org/officeDocument/2006/relationships" xmlns:p="http://schemas.openxmlformats.org/presentationml/2006/main">
   <p:cSld>
     <p:bg>
       <p:bgPr>
-        <a:solidFill xmlns:a="http://schemas.openxmlformats.org/drawingml/2006/main">
+        <a:solidFill>
           <a:srgbClr val="FFFFFF"/>
         </a:solidFill>
+        <a:effectLst/>
       </p:bgPr>
     </p:bg>
     <p:spTree>
@@ -4182,42 +3920,47 @@
         <p:nvPr/>
       </p:nvGrpSpPr>
       <p:grpSpPr>
-        <a:xfrm xmlns:a="http://schemas.openxmlformats.org/drawingml/2006/main"/>
+        <a:xfrm>
+          <a:off x="0" y="0"/>
+          <a:ext cx="0" cy="0"/>
+          <a:chOff x="0" y="0"/>
+          <a:chExt cx="0" cy="0"/>
+        </a:xfrm>
       </p:grpSpPr>
       <p:sp>
         <p:nvSpPr>
-          <p:cNvPr id="36" name="">
-            <a:extLst xmlns:a="http://schemas.openxmlformats.org/drawingml/2006/main">
+          <p:cNvPr id="36" name="Rectangle 35">
+            <a:extLst>
               <a:ext uri="{FF2B5EF4-FFF2-40B4-BE49-F238E27FC236}">
                 <a16:creationId xmlns:a16="http://schemas.microsoft.com/office/drawing/2014/main" id="{2B2D9730-66DF-420B-BC89-10D5EEAD2633}"/>
               </a:ext>
             </a:extLst>
           </p:cNvPr>
           <p:cNvSpPr>
-            <a:spLocks xmlns:a="http://schemas.openxmlformats.org/drawingml/2006/main" noGrp="1"/>
-          </p:cNvSpPr>
-          <p:nvPr/>
-        </p:nvSpPr>
-        <p:spPr>
-          <a:xfrm xmlns:a="http://schemas.openxmlformats.org/drawingml/2006/main">
+            <a:spLocks noGrp="1"/>
+          </p:cNvSpPr>
+          <p:nvPr/>
+        </p:nvSpPr>
+        <p:spPr>
+          <a:xfrm>
             <a:off x="419100" y="361950"/>
             <a:ext cx="10477500" cy="723900"/>
           </a:xfrm>
-          <a:prstGeom xmlns:a="http://schemas.openxmlformats.org/drawingml/2006/main" prst="rect">
-            <a:avLst/>
-          </a:prstGeom>
-          <a:noFill xmlns:a="http://schemas.openxmlformats.org/drawingml/2006/main"/>
-          <a:ln xmlns:a="http://schemas.openxmlformats.org/drawingml/2006/main" w="0">
-            <a:noFill/>
-            <a:prstDash val="solid"/>
-          </a:ln>
-        </p:spPr>
-        <p:txBody>
-          <a:bodyPr xmlns:a="http://schemas.openxmlformats.org/drawingml/2006/main" anchor="t">
-            <a:normAutofit fontScale="100000"/>
+          <a:prstGeom prst="rect">
+            <a:avLst/>
+          </a:prstGeom>
+          <a:noFill/>
+          <a:ln w="0">
+            <a:noFill/>
+            <a:prstDash val="solid"/>
+          </a:ln>
+        </p:spPr>
+        <p:txBody>
+          <a:bodyPr anchor="t">
+            <a:normAutofit/>
           </a:bodyPr>
-          <a:lstStyle xmlns:a="http://schemas.openxmlformats.org/drawingml/2006/main"/>
-          <a:p xmlns:a="http://schemas.openxmlformats.org/drawingml/2006/main">
+          <a:lstStyle/>
+          <a:p>
             <a:pPr algn="l">
               <a:defRPr sz="3000" b="1">
                 <a:solidFill>
@@ -4244,30 +3987,30 @@
       </p:sp>
       <p:sp>
         <p:nvSpPr>
-          <p:cNvPr id="2" name="">
-            <a:extLst xmlns:a="http://schemas.openxmlformats.org/drawingml/2006/main">
+          <p:cNvPr id="2" name="Rectangle 1">
+            <a:extLst>
               <a:ext uri="{FF2B5EF4-FFF2-40B4-BE49-F238E27FC236}">
                 <a16:creationId xmlns:a16="http://schemas.microsoft.com/office/drawing/2014/main" id="{498D7990-77CB-47B0-A70A-C7044314D439}"/>
               </a:ext>
             </a:extLst>
           </p:cNvPr>
           <p:cNvSpPr>
-            <a:spLocks xmlns:a="http://schemas.openxmlformats.org/drawingml/2006/main" noGrp="1"/>
-          </p:cNvSpPr>
-          <p:nvPr/>
-        </p:nvSpPr>
-        <p:spPr>
-          <a:xfrm xmlns:a="http://schemas.openxmlformats.org/drawingml/2006/main">
+            <a:spLocks noGrp="1"/>
+          </p:cNvSpPr>
+          <p:nvPr/>
+        </p:nvSpPr>
+        <p:spPr>
+          <a:xfrm>
             <a:off x="419100" y="1619250"/>
             <a:ext cx="2857500" cy="781050"/>
           </a:xfrm>
-          <a:prstGeom xmlns:a="http://schemas.openxmlformats.org/drawingml/2006/main" prst="rect">
-            <a:avLst/>
-          </a:prstGeom>
-          <a:solidFill xmlns:a="http://schemas.openxmlformats.org/drawingml/2006/main">
+          <a:prstGeom prst="rect">
+            <a:avLst/>
+          </a:prstGeom>
+          <a:solidFill>
             <a:srgbClr val="111827"/>
           </a:solidFill>
-          <a:ln xmlns:a="http://schemas.openxmlformats.org/drawingml/2006/main" w="9525">
+          <a:ln w="9525">
             <a:solidFill>
               <a:srgbClr val="B8BCC4"/>
             </a:solidFill>
@@ -4277,38 +4020,38 @@
       </p:sp>
       <p:sp>
         <p:nvSpPr>
-          <p:cNvPr id="3" name="">
-            <a:extLst xmlns:a="http://schemas.openxmlformats.org/drawingml/2006/main">
+          <p:cNvPr id="3" name="Rectangle 2">
+            <a:extLst>
               <a:ext uri="{FF2B5EF4-FFF2-40B4-BE49-F238E27FC236}">
                 <a16:creationId xmlns:a16="http://schemas.microsoft.com/office/drawing/2014/main" id="{F7004FC6-DF88-4701-B863-ED7FB0E4C186}"/>
               </a:ext>
             </a:extLst>
           </p:cNvPr>
           <p:cNvSpPr>
-            <a:spLocks xmlns:a="http://schemas.openxmlformats.org/drawingml/2006/main" noGrp="1"/>
-          </p:cNvSpPr>
-          <p:nvPr/>
-        </p:nvSpPr>
-        <p:spPr>
-          <a:xfrm xmlns:a="http://schemas.openxmlformats.org/drawingml/2006/main">
+            <a:spLocks noGrp="1"/>
+          </p:cNvSpPr>
+          <p:nvPr/>
+        </p:nvSpPr>
+        <p:spPr>
+          <a:xfrm>
             <a:off x="552450" y="1790700"/>
             <a:ext cx="2590800" cy="552450"/>
           </a:xfrm>
-          <a:prstGeom xmlns:a="http://schemas.openxmlformats.org/drawingml/2006/main" prst="rect">
-            <a:avLst/>
-          </a:prstGeom>
-          <a:noFill xmlns:a="http://schemas.openxmlformats.org/drawingml/2006/main"/>
-          <a:ln xmlns:a="http://schemas.openxmlformats.org/drawingml/2006/main" w="0">
-            <a:noFill/>
-            <a:prstDash val="solid"/>
-          </a:ln>
-        </p:spPr>
-        <p:txBody>
-          <a:bodyPr xmlns:a="http://schemas.openxmlformats.org/drawingml/2006/main" anchor="ctr">
-            <a:normAutofit fontScale="100000"/>
+          <a:prstGeom prst="rect">
+            <a:avLst/>
+          </a:prstGeom>
+          <a:noFill/>
+          <a:ln w="0">
+            <a:noFill/>
+            <a:prstDash val="solid"/>
+          </a:ln>
+        </p:spPr>
+        <p:txBody>
+          <a:bodyPr anchor="ctr">
+            <a:normAutofit/>
           </a:bodyPr>
-          <a:lstStyle xmlns:a="http://schemas.openxmlformats.org/drawingml/2006/main"/>
-          <a:p xmlns:a="http://schemas.openxmlformats.org/drawingml/2006/main">
+          <a:lstStyle/>
+          <a:p>
             <a:pPr algn="l">
               <a:defRPr sz="1350" b="1">
                 <a:solidFill>
@@ -4335,30 +4078,30 @@
       </p:sp>
       <p:sp>
         <p:nvSpPr>
-          <p:cNvPr id="4" name="">
-            <a:extLst xmlns:a="http://schemas.openxmlformats.org/drawingml/2006/main">
+          <p:cNvPr id="4" name="Rectangle 3">
+            <a:extLst>
               <a:ext uri="{FF2B5EF4-FFF2-40B4-BE49-F238E27FC236}">
                 <a16:creationId xmlns:a16="http://schemas.microsoft.com/office/drawing/2014/main" id="{54BA8716-E3A1-414A-99A0-0F9F3D064053}"/>
               </a:ext>
             </a:extLst>
           </p:cNvPr>
           <p:cNvSpPr>
-            <a:spLocks xmlns:a="http://schemas.openxmlformats.org/drawingml/2006/main" noGrp="1"/>
-          </p:cNvSpPr>
-          <p:nvPr/>
-        </p:nvSpPr>
-        <p:spPr>
-          <a:xfrm xmlns:a="http://schemas.openxmlformats.org/drawingml/2006/main">
+            <a:spLocks noGrp="1"/>
+          </p:cNvSpPr>
+          <p:nvPr/>
+        </p:nvSpPr>
+        <p:spPr>
+          <a:xfrm>
             <a:off x="3276600" y="1619250"/>
             <a:ext cx="1619250" cy="781050"/>
           </a:xfrm>
-          <a:prstGeom xmlns:a="http://schemas.openxmlformats.org/drawingml/2006/main" prst="rect">
-            <a:avLst/>
-          </a:prstGeom>
-          <a:solidFill xmlns:a="http://schemas.openxmlformats.org/drawingml/2006/main">
+          <a:prstGeom prst="rect">
+            <a:avLst/>
+          </a:prstGeom>
+          <a:solidFill>
             <a:srgbClr val="111827"/>
           </a:solidFill>
-          <a:ln xmlns:a="http://schemas.openxmlformats.org/drawingml/2006/main" w="9525">
+          <a:ln w="9525">
             <a:solidFill>
               <a:srgbClr val="B8BCC4"/>
             </a:solidFill>
@@ -4368,38 +4111,38 @@
       </p:sp>
       <p:sp>
         <p:nvSpPr>
-          <p:cNvPr id="5" name="">
-            <a:extLst xmlns:a="http://schemas.openxmlformats.org/drawingml/2006/main">
+          <p:cNvPr id="5" name="Rectangle 4">
+            <a:extLst>
               <a:ext uri="{FF2B5EF4-FFF2-40B4-BE49-F238E27FC236}">
                 <a16:creationId xmlns:a16="http://schemas.microsoft.com/office/drawing/2014/main" id="{21034251-D90E-4BE2-8959-9A1D8865B923}"/>
               </a:ext>
             </a:extLst>
           </p:cNvPr>
           <p:cNvSpPr>
-            <a:spLocks xmlns:a="http://schemas.openxmlformats.org/drawingml/2006/main" noGrp="1"/>
-          </p:cNvSpPr>
-          <p:nvPr/>
-        </p:nvSpPr>
-        <p:spPr>
-          <a:xfrm xmlns:a="http://schemas.openxmlformats.org/drawingml/2006/main">
+            <a:spLocks noGrp="1"/>
+          </p:cNvSpPr>
+          <p:nvPr/>
+        </p:nvSpPr>
+        <p:spPr>
+          <a:xfrm>
             <a:off x="3409950" y="1790700"/>
             <a:ext cx="1352550" cy="552450"/>
           </a:xfrm>
-          <a:prstGeom xmlns:a="http://schemas.openxmlformats.org/drawingml/2006/main" prst="rect">
-            <a:avLst/>
-          </a:prstGeom>
-          <a:noFill xmlns:a="http://schemas.openxmlformats.org/drawingml/2006/main"/>
-          <a:ln xmlns:a="http://schemas.openxmlformats.org/drawingml/2006/main" w="0">
-            <a:noFill/>
-            <a:prstDash val="solid"/>
-          </a:ln>
-        </p:spPr>
-        <p:txBody>
-          <a:bodyPr xmlns:a="http://schemas.openxmlformats.org/drawingml/2006/main" anchor="ctr">
-            <a:normAutofit fontScale="100000"/>
+          <a:prstGeom prst="rect">
+            <a:avLst/>
+          </a:prstGeom>
+          <a:noFill/>
+          <a:ln w="0">
+            <a:noFill/>
+            <a:prstDash val="solid"/>
+          </a:ln>
+        </p:spPr>
+        <p:txBody>
+          <a:bodyPr anchor="ctr">
+            <a:normAutofit/>
           </a:bodyPr>
-          <a:lstStyle xmlns:a="http://schemas.openxmlformats.org/drawingml/2006/main"/>
-          <a:p xmlns:a="http://schemas.openxmlformats.org/drawingml/2006/main">
+          <a:lstStyle/>
+          <a:p>
             <a:pPr algn="l">
               <a:defRPr sz="1350" b="1">
                 <a:solidFill>
@@ -4426,30 +4169,30 @@
       </p:sp>
       <p:sp>
         <p:nvSpPr>
-          <p:cNvPr id="6" name="">
-            <a:extLst xmlns:a="http://schemas.openxmlformats.org/drawingml/2006/main">
+          <p:cNvPr id="6" name="Rectangle 5">
+            <a:extLst>
               <a:ext uri="{FF2B5EF4-FFF2-40B4-BE49-F238E27FC236}">
                 <a16:creationId xmlns:a16="http://schemas.microsoft.com/office/drawing/2014/main" id="{2EB70728-868B-472F-A5B6-9F5B390968F1}"/>
               </a:ext>
             </a:extLst>
           </p:cNvPr>
           <p:cNvSpPr>
-            <a:spLocks xmlns:a="http://schemas.openxmlformats.org/drawingml/2006/main" noGrp="1"/>
-          </p:cNvSpPr>
-          <p:nvPr/>
-        </p:nvSpPr>
-        <p:spPr>
-          <a:xfrm xmlns:a="http://schemas.openxmlformats.org/drawingml/2006/main">
+            <a:spLocks noGrp="1"/>
+          </p:cNvSpPr>
+          <p:nvPr/>
+        </p:nvSpPr>
+        <p:spPr>
+          <a:xfrm>
             <a:off x="4895850" y="1619250"/>
             <a:ext cx="2476500" cy="781050"/>
           </a:xfrm>
-          <a:prstGeom xmlns:a="http://schemas.openxmlformats.org/drawingml/2006/main" prst="rect">
-            <a:avLst/>
-          </a:prstGeom>
-          <a:solidFill xmlns:a="http://schemas.openxmlformats.org/drawingml/2006/main">
+          <a:prstGeom prst="rect">
+            <a:avLst/>
+          </a:prstGeom>
+          <a:solidFill>
             <a:srgbClr val="111827"/>
           </a:solidFill>
-          <a:ln xmlns:a="http://schemas.openxmlformats.org/drawingml/2006/main" w="9525">
+          <a:ln w="9525">
             <a:solidFill>
               <a:srgbClr val="B8BCC4"/>
             </a:solidFill>
@@ -4459,38 +4202,38 @@
       </p:sp>
       <p:sp>
         <p:nvSpPr>
-          <p:cNvPr id="7" name="">
-            <a:extLst xmlns:a="http://schemas.openxmlformats.org/drawingml/2006/main">
+          <p:cNvPr id="7" name="Rectangle 6">
+            <a:extLst>
               <a:ext uri="{FF2B5EF4-FFF2-40B4-BE49-F238E27FC236}">
                 <a16:creationId xmlns:a16="http://schemas.microsoft.com/office/drawing/2014/main" id="{12DCC428-0DAD-49F9-AAD5-F0E3AE9D19F1}"/>
               </a:ext>
             </a:extLst>
           </p:cNvPr>
           <p:cNvSpPr>
-            <a:spLocks xmlns:a="http://schemas.openxmlformats.org/drawingml/2006/main" noGrp="1"/>
-          </p:cNvSpPr>
-          <p:nvPr/>
-        </p:nvSpPr>
-        <p:spPr>
-          <a:xfrm xmlns:a="http://schemas.openxmlformats.org/drawingml/2006/main">
+            <a:spLocks noGrp="1"/>
+          </p:cNvSpPr>
+          <p:nvPr/>
+        </p:nvSpPr>
+        <p:spPr>
+          <a:xfrm>
             <a:off x="5029200" y="1790700"/>
             <a:ext cx="2209800" cy="552450"/>
           </a:xfrm>
-          <a:prstGeom xmlns:a="http://schemas.openxmlformats.org/drawingml/2006/main" prst="rect">
-            <a:avLst/>
-          </a:prstGeom>
-          <a:noFill xmlns:a="http://schemas.openxmlformats.org/drawingml/2006/main"/>
-          <a:ln xmlns:a="http://schemas.openxmlformats.org/drawingml/2006/main" w="0">
-            <a:noFill/>
-            <a:prstDash val="solid"/>
-          </a:ln>
-        </p:spPr>
-        <p:txBody>
-          <a:bodyPr xmlns:a="http://schemas.openxmlformats.org/drawingml/2006/main" anchor="ctr">
-            <a:normAutofit fontScale="100000"/>
+          <a:prstGeom prst="rect">
+            <a:avLst/>
+          </a:prstGeom>
+          <a:noFill/>
+          <a:ln w="0">
+            <a:noFill/>
+            <a:prstDash val="solid"/>
+          </a:ln>
+        </p:spPr>
+        <p:txBody>
+          <a:bodyPr anchor="ctr">
+            <a:normAutofit/>
           </a:bodyPr>
-          <a:lstStyle xmlns:a="http://schemas.openxmlformats.org/drawingml/2006/main"/>
-          <a:p xmlns:a="http://schemas.openxmlformats.org/drawingml/2006/main">
+          <a:lstStyle/>
+          <a:p>
             <a:pPr algn="l">
               <a:defRPr sz="1350" b="1">
                 <a:solidFill>
@@ -4517,30 +4260,30 @@
       </p:sp>
       <p:sp>
         <p:nvSpPr>
-          <p:cNvPr id="8" name="">
-            <a:extLst xmlns:a="http://schemas.openxmlformats.org/drawingml/2006/main">
+          <p:cNvPr id="8" name="Rectangle 7">
+            <a:extLst>
               <a:ext uri="{FF2B5EF4-FFF2-40B4-BE49-F238E27FC236}">
                 <a16:creationId xmlns:a16="http://schemas.microsoft.com/office/drawing/2014/main" id="{E5FA432D-23D2-48B5-9DEB-1D7C7A8C6482}"/>
               </a:ext>
             </a:extLst>
           </p:cNvPr>
           <p:cNvSpPr>
-            <a:spLocks xmlns:a="http://schemas.openxmlformats.org/drawingml/2006/main" noGrp="1"/>
-          </p:cNvSpPr>
-          <p:nvPr/>
-        </p:nvSpPr>
-        <p:spPr>
-          <a:xfrm xmlns:a="http://schemas.openxmlformats.org/drawingml/2006/main">
+            <a:spLocks noGrp="1"/>
+          </p:cNvSpPr>
+          <p:nvPr/>
+        </p:nvSpPr>
+        <p:spPr>
+          <a:xfrm>
             <a:off x="7372350" y="1619250"/>
             <a:ext cx="3981450" cy="781050"/>
           </a:xfrm>
-          <a:prstGeom xmlns:a="http://schemas.openxmlformats.org/drawingml/2006/main" prst="rect">
-            <a:avLst/>
-          </a:prstGeom>
-          <a:solidFill xmlns:a="http://schemas.openxmlformats.org/drawingml/2006/main">
+          <a:prstGeom prst="rect">
+            <a:avLst/>
+          </a:prstGeom>
+          <a:solidFill>
             <a:srgbClr val="111827"/>
           </a:solidFill>
-          <a:ln xmlns:a="http://schemas.openxmlformats.org/drawingml/2006/main" w="9525">
+          <a:ln w="9525">
             <a:solidFill>
               <a:srgbClr val="B8BCC4"/>
             </a:solidFill>
@@ -4550,38 +4293,38 @@
       </p:sp>
       <p:sp>
         <p:nvSpPr>
-          <p:cNvPr id="9" name="">
-            <a:extLst xmlns:a="http://schemas.openxmlformats.org/drawingml/2006/main">
+          <p:cNvPr id="9" name="Rectangle 8">
+            <a:extLst>
               <a:ext uri="{FF2B5EF4-FFF2-40B4-BE49-F238E27FC236}">
                 <a16:creationId xmlns:a16="http://schemas.microsoft.com/office/drawing/2014/main" id="{8075F93A-F269-4F91-8BDA-FE926F676030}"/>
               </a:ext>
             </a:extLst>
           </p:cNvPr>
           <p:cNvSpPr>
-            <a:spLocks xmlns:a="http://schemas.openxmlformats.org/drawingml/2006/main" noGrp="1"/>
-          </p:cNvSpPr>
-          <p:nvPr/>
-        </p:nvSpPr>
-        <p:spPr>
-          <a:xfrm xmlns:a="http://schemas.openxmlformats.org/drawingml/2006/main">
+            <a:spLocks noGrp="1"/>
+          </p:cNvSpPr>
+          <p:nvPr/>
+        </p:nvSpPr>
+        <p:spPr>
+          <a:xfrm>
             <a:off x="7505700" y="1790700"/>
             <a:ext cx="3714750" cy="552450"/>
           </a:xfrm>
-          <a:prstGeom xmlns:a="http://schemas.openxmlformats.org/drawingml/2006/main" prst="rect">
-            <a:avLst/>
-          </a:prstGeom>
-          <a:noFill xmlns:a="http://schemas.openxmlformats.org/drawingml/2006/main"/>
-          <a:ln xmlns:a="http://schemas.openxmlformats.org/drawingml/2006/main" w="0">
-            <a:noFill/>
-            <a:prstDash val="solid"/>
-          </a:ln>
-        </p:spPr>
-        <p:txBody>
-          <a:bodyPr xmlns:a="http://schemas.openxmlformats.org/drawingml/2006/main" anchor="ctr">
-            <a:normAutofit fontScale="100000"/>
+          <a:prstGeom prst="rect">
+            <a:avLst/>
+          </a:prstGeom>
+          <a:noFill/>
+          <a:ln w="0">
+            <a:noFill/>
+            <a:prstDash val="solid"/>
+          </a:ln>
+        </p:spPr>
+        <p:txBody>
+          <a:bodyPr anchor="ctr">
+            <a:normAutofit/>
           </a:bodyPr>
-          <a:lstStyle xmlns:a="http://schemas.openxmlformats.org/drawingml/2006/main"/>
-          <a:p xmlns:a="http://schemas.openxmlformats.org/drawingml/2006/main">
+          <a:lstStyle/>
+          <a:p>
             <a:pPr algn="l">
               <a:defRPr sz="1350" b="1">
                 <a:solidFill>
@@ -4608,30 +4351,30 @@
       </p:sp>
       <p:sp>
         <p:nvSpPr>
-          <p:cNvPr id="10" name="">
-            <a:extLst xmlns:a="http://schemas.openxmlformats.org/drawingml/2006/main">
+          <p:cNvPr id="10" name="Rectangle 9">
+            <a:extLst>
               <a:ext uri="{FF2B5EF4-FFF2-40B4-BE49-F238E27FC236}">
                 <a16:creationId xmlns:a16="http://schemas.microsoft.com/office/drawing/2014/main" id="{A6B95B18-219C-420D-91C3-9C4F310DD6BE}"/>
               </a:ext>
             </a:extLst>
           </p:cNvPr>
           <p:cNvSpPr>
-            <a:spLocks xmlns:a="http://schemas.openxmlformats.org/drawingml/2006/main" noGrp="1"/>
-          </p:cNvSpPr>
-          <p:nvPr/>
-        </p:nvSpPr>
-        <p:spPr>
-          <a:xfrm xmlns:a="http://schemas.openxmlformats.org/drawingml/2006/main">
+            <a:spLocks noGrp="1"/>
+          </p:cNvSpPr>
+          <p:nvPr/>
+        </p:nvSpPr>
+        <p:spPr>
+          <a:xfrm>
             <a:off x="419100" y="2400300"/>
             <a:ext cx="2857500" cy="781050"/>
           </a:xfrm>
-          <a:prstGeom xmlns:a="http://schemas.openxmlformats.org/drawingml/2006/main" prst="rect">
-            <a:avLst/>
-          </a:prstGeom>
-          <a:solidFill xmlns:a="http://schemas.openxmlformats.org/drawingml/2006/main">
+          <a:prstGeom prst="rect">
+            <a:avLst/>
+          </a:prstGeom>
+          <a:solidFill>
             <a:srgbClr val="FFFFFF"/>
           </a:solidFill>
-          <a:ln xmlns:a="http://schemas.openxmlformats.org/drawingml/2006/main" w="9525">
+          <a:ln w="9525">
             <a:solidFill>
               <a:srgbClr val="B8BCC4"/>
             </a:solidFill>
@@ -4641,38 +4384,38 @@
       </p:sp>
       <p:sp>
         <p:nvSpPr>
-          <p:cNvPr id="11" name="">
-            <a:extLst xmlns:a="http://schemas.openxmlformats.org/drawingml/2006/main">
+          <p:cNvPr id="11" name="Rectangle 10">
+            <a:extLst>
               <a:ext uri="{FF2B5EF4-FFF2-40B4-BE49-F238E27FC236}">
                 <a16:creationId xmlns:a16="http://schemas.microsoft.com/office/drawing/2014/main" id="{11DDE5D7-CF45-4330-9BD2-7BAC9787F442}"/>
               </a:ext>
             </a:extLst>
           </p:cNvPr>
           <p:cNvSpPr>
-            <a:spLocks xmlns:a="http://schemas.openxmlformats.org/drawingml/2006/main" noGrp="1"/>
-          </p:cNvSpPr>
-          <p:nvPr/>
-        </p:nvSpPr>
-        <p:spPr>
-          <a:xfrm xmlns:a="http://schemas.openxmlformats.org/drawingml/2006/main">
+            <a:spLocks noGrp="1"/>
+          </p:cNvSpPr>
+          <p:nvPr/>
+        </p:nvSpPr>
+        <p:spPr>
+          <a:xfrm>
             <a:off x="552450" y="2571750"/>
             <a:ext cx="2590800" cy="552450"/>
           </a:xfrm>
-          <a:prstGeom xmlns:a="http://schemas.openxmlformats.org/drawingml/2006/main" prst="rect">
-            <a:avLst/>
-          </a:prstGeom>
-          <a:noFill xmlns:a="http://schemas.openxmlformats.org/drawingml/2006/main"/>
-          <a:ln xmlns:a="http://schemas.openxmlformats.org/drawingml/2006/main" w="0">
-            <a:noFill/>
-            <a:prstDash val="solid"/>
-          </a:ln>
-        </p:spPr>
-        <p:txBody>
-          <a:bodyPr xmlns:a="http://schemas.openxmlformats.org/drawingml/2006/main" anchor="ctr">
-            <a:normAutofit fontScale="100000"/>
+          <a:prstGeom prst="rect">
+            <a:avLst/>
+          </a:prstGeom>
+          <a:noFill/>
+          <a:ln w="0">
+            <a:noFill/>
+            <a:prstDash val="solid"/>
+          </a:ln>
+        </p:spPr>
+        <p:txBody>
+          <a:bodyPr anchor="ctr">
+            <a:normAutofit/>
           </a:bodyPr>
-          <a:lstStyle xmlns:a="http://schemas.openxmlformats.org/drawingml/2006/main"/>
-          <a:p xmlns:a="http://schemas.openxmlformats.org/drawingml/2006/main">
+          <a:lstStyle/>
+          <a:p>
             <a:pPr algn="l">
               <a:defRPr sz="1275" b="0">
                 <a:solidFill>
@@ -4699,30 +4442,30 @@
       </p:sp>
       <p:sp>
         <p:nvSpPr>
-          <p:cNvPr id="12" name="">
-            <a:extLst xmlns:a="http://schemas.openxmlformats.org/drawingml/2006/main">
+          <p:cNvPr id="12" name="Rectangle 11">
+            <a:extLst>
               <a:ext uri="{FF2B5EF4-FFF2-40B4-BE49-F238E27FC236}">
                 <a16:creationId xmlns:a16="http://schemas.microsoft.com/office/drawing/2014/main" id="{EE64E986-9F58-465F-A21D-346324425AB1}"/>
               </a:ext>
             </a:extLst>
           </p:cNvPr>
           <p:cNvSpPr>
-            <a:spLocks xmlns:a="http://schemas.openxmlformats.org/drawingml/2006/main" noGrp="1"/>
-          </p:cNvSpPr>
-          <p:nvPr/>
-        </p:nvSpPr>
-        <p:spPr>
-          <a:xfrm xmlns:a="http://schemas.openxmlformats.org/drawingml/2006/main">
+            <a:spLocks noGrp="1"/>
+          </p:cNvSpPr>
+          <p:nvPr/>
+        </p:nvSpPr>
+        <p:spPr>
+          <a:xfrm>
             <a:off x="3276600" y="2400300"/>
             <a:ext cx="1619250" cy="781050"/>
           </a:xfrm>
-          <a:prstGeom xmlns:a="http://schemas.openxmlformats.org/drawingml/2006/main" prst="rect">
-            <a:avLst/>
-          </a:prstGeom>
-          <a:solidFill xmlns:a="http://schemas.openxmlformats.org/drawingml/2006/main">
+          <a:prstGeom prst="rect">
+            <a:avLst/>
+          </a:prstGeom>
+          <a:solidFill>
             <a:srgbClr val="FFFFFF"/>
           </a:solidFill>
-          <a:ln xmlns:a="http://schemas.openxmlformats.org/drawingml/2006/main" w="9525">
+          <a:ln w="9525">
             <a:solidFill>
               <a:srgbClr val="B8BCC4"/>
             </a:solidFill>
@@ -4732,38 +4475,38 @@
       </p:sp>
       <p:sp>
         <p:nvSpPr>
-          <p:cNvPr id="13" name="">
-            <a:extLst xmlns:a="http://schemas.openxmlformats.org/drawingml/2006/main">
+          <p:cNvPr id="13" name="Rectangle 12">
+            <a:extLst>
               <a:ext uri="{FF2B5EF4-FFF2-40B4-BE49-F238E27FC236}">
                 <a16:creationId xmlns:a16="http://schemas.microsoft.com/office/drawing/2014/main" id="{8E4F343E-BE1E-4823-A4D6-90E40617BD07}"/>
               </a:ext>
             </a:extLst>
           </p:cNvPr>
           <p:cNvSpPr>
-            <a:spLocks xmlns:a="http://schemas.openxmlformats.org/drawingml/2006/main" noGrp="1"/>
-          </p:cNvSpPr>
-          <p:nvPr/>
-        </p:nvSpPr>
-        <p:spPr>
-          <a:xfrm xmlns:a="http://schemas.openxmlformats.org/drawingml/2006/main">
+            <a:spLocks noGrp="1"/>
+          </p:cNvSpPr>
+          <p:nvPr/>
+        </p:nvSpPr>
+        <p:spPr>
+          <a:xfrm>
             <a:off x="3409950" y="2571750"/>
             <a:ext cx="1352550" cy="552450"/>
           </a:xfrm>
-          <a:prstGeom xmlns:a="http://schemas.openxmlformats.org/drawingml/2006/main" prst="rect">
-            <a:avLst/>
-          </a:prstGeom>
-          <a:noFill xmlns:a="http://schemas.openxmlformats.org/drawingml/2006/main"/>
-          <a:ln xmlns:a="http://schemas.openxmlformats.org/drawingml/2006/main" w="0">
-            <a:noFill/>
-            <a:prstDash val="solid"/>
-          </a:ln>
-        </p:spPr>
-        <p:txBody>
-          <a:bodyPr xmlns:a="http://schemas.openxmlformats.org/drawingml/2006/main" anchor="ctr">
-            <a:normAutofit fontScale="100000"/>
+          <a:prstGeom prst="rect">
+            <a:avLst/>
+          </a:prstGeom>
+          <a:noFill/>
+          <a:ln w="0">
+            <a:noFill/>
+            <a:prstDash val="solid"/>
+          </a:ln>
+        </p:spPr>
+        <p:txBody>
+          <a:bodyPr anchor="ctr">
+            <a:normAutofit/>
           </a:bodyPr>
-          <a:lstStyle xmlns:a="http://schemas.openxmlformats.org/drawingml/2006/main"/>
-          <a:p xmlns:a="http://schemas.openxmlformats.org/drawingml/2006/main">
+          <a:lstStyle/>
+          <a:p>
             <a:pPr algn="l">
               <a:defRPr sz="1275" b="0">
                 <a:solidFill>
@@ -4790,30 +4533,30 @@
       </p:sp>
       <p:sp>
         <p:nvSpPr>
-          <p:cNvPr id="14" name="">
-            <a:extLst xmlns:a="http://schemas.openxmlformats.org/drawingml/2006/main">
+          <p:cNvPr id="14" name="Rectangle 13">
+            <a:extLst>
               <a:ext uri="{FF2B5EF4-FFF2-40B4-BE49-F238E27FC236}">
                 <a16:creationId xmlns:a16="http://schemas.microsoft.com/office/drawing/2014/main" id="{860867F6-72C9-40AB-88B2-1F7F7479AFA5}"/>
               </a:ext>
             </a:extLst>
           </p:cNvPr>
           <p:cNvSpPr>
-            <a:spLocks xmlns:a="http://schemas.openxmlformats.org/drawingml/2006/main" noGrp="1"/>
-          </p:cNvSpPr>
-          <p:nvPr/>
-        </p:nvSpPr>
-        <p:spPr>
-          <a:xfrm xmlns:a="http://schemas.openxmlformats.org/drawingml/2006/main">
+            <a:spLocks noGrp="1"/>
+          </p:cNvSpPr>
+          <p:nvPr/>
+        </p:nvSpPr>
+        <p:spPr>
+          <a:xfrm>
             <a:off x="4895850" y="2400300"/>
             <a:ext cx="2476500" cy="781050"/>
           </a:xfrm>
-          <a:prstGeom xmlns:a="http://schemas.openxmlformats.org/drawingml/2006/main" prst="rect">
-            <a:avLst/>
-          </a:prstGeom>
-          <a:solidFill xmlns:a="http://schemas.openxmlformats.org/drawingml/2006/main">
+          <a:prstGeom prst="rect">
+            <a:avLst/>
+          </a:prstGeom>
+          <a:solidFill>
             <a:srgbClr val="FFFFFF"/>
           </a:solidFill>
-          <a:ln xmlns:a="http://schemas.openxmlformats.org/drawingml/2006/main" w="9525">
+          <a:ln w="9525">
             <a:solidFill>
               <a:srgbClr val="B8BCC4"/>
             </a:solidFill>
@@ -4823,38 +4566,38 @@
       </p:sp>
       <p:sp>
         <p:nvSpPr>
-          <p:cNvPr id="15" name="">
-            <a:extLst xmlns:a="http://schemas.openxmlformats.org/drawingml/2006/main">
+          <p:cNvPr id="15" name="Rectangle 14">
+            <a:extLst>
               <a:ext uri="{FF2B5EF4-FFF2-40B4-BE49-F238E27FC236}">
                 <a16:creationId xmlns:a16="http://schemas.microsoft.com/office/drawing/2014/main" id="{2FFF63D6-531E-4AE6-ACB3-A929AA9561B7}"/>
               </a:ext>
             </a:extLst>
           </p:cNvPr>
           <p:cNvSpPr>
-            <a:spLocks xmlns:a="http://schemas.openxmlformats.org/drawingml/2006/main" noGrp="1"/>
-          </p:cNvSpPr>
-          <p:nvPr/>
-        </p:nvSpPr>
-        <p:spPr>
-          <a:xfrm xmlns:a="http://schemas.openxmlformats.org/drawingml/2006/main">
+            <a:spLocks noGrp="1"/>
+          </p:cNvSpPr>
+          <p:nvPr/>
+        </p:nvSpPr>
+        <p:spPr>
+          <a:xfrm>
             <a:off x="5029200" y="2571750"/>
             <a:ext cx="2209800" cy="552450"/>
           </a:xfrm>
-          <a:prstGeom xmlns:a="http://schemas.openxmlformats.org/drawingml/2006/main" prst="rect">
-            <a:avLst/>
-          </a:prstGeom>
-          <a:noFill xmlns:a="http://schemas.openxmlformats.org/drawingml/2006/main"/>
-          <a:ln xmlns:a="http://schemas.openxmlformats.org/drawingml/2006/main" w="0">
-            <a:noFill/>
-            <a:prstDash val="solid"/>
-          </a:ln>
-        </p:spPr>
-        <p:txBody>
-          <a:bodyPr xmlns:a="http://schemas.openxmlformats.org/drawingml/2006/main" anchor="ctr">
-            <a:normAutofit fontScale="100000"/>
+          <a:prstGeom prst="rect">
+            <a:avLst/>
+          </a:prstGeom>
+          <a:noFill/>
+          <a:ln w="0">
+            <a:noFill/>
+            <a:prstDash val="solid"/>
+          </a:ln>
+        </p:spPr>
+        <p:txBody>
+          <a:bodyPr anchor="ctr">
+            <a:normAutofit/>
           </a:bodyPr>
-          <a:lstStyle xmlns:a="http://schemas.openxmlformats.org/drawingml/2006/main"/>
-          <a:p xmlns:a="http://schemas.openxmlformats.org/drawingml/2006/main">
+          <a:lstStyle/>
+          <a:p>
             <a:pPr algn="l">
               <a:defRPr sz="1275" b="0">
                 <a:solidFill>
@@ -4881,30 +4624,30 @@
       </p:sp>
       <p:sp>
         <p:nvSpPr>
-          <p:cNvPr id="16" name="">
-            <a:extLst xmlns:a="http://schemas.openxmlformats.org/drawingml/2006/main">
+          <p:cNvPr id="16" name="Rectangle 15">
+            <a:extLst>
               <a:ext uri="{FF2B5EF4-FFF2-40B4-BE49-F238E27FC236}">
                 <a16:creationId xmlns:a16="http://schemas.microsoft.com/office/drawing/2014/main" id="{DDBAF508-9484-4A0B-B6C9-9D3793DBF435}"/>
               </a:ext>
             </a:extLst>
           </p:cNvPr>
           <p:cNvSpPr>
-            <a:spLocks xmlns:a="http://schemas.openxmlformats.org/drawingml/2006/main" noGrp="1"/>
-          </p:cNvSpPr>
-          <p:nvPr/>
-        </p:nvSpPr>
-        <p:spPr>
-          <a:xfrm xmlns:a="http://schemas.openxmlformats.org/drawingml/2006/main">
+            <a:spLocks noGrp="1"/>
+          </p:cNvSpPr>
+          <p:nvPr/>
+        </p:nvSpPr>
+        <p:spPr>
+          <a:xfrm>
             <a:off x="7372350" y="2400300"/>
             <a:ext cx="3981450" cy="781050"/>
           </a:xfrm>
-          <a:prstGeom xmlns:a="http://schemas.openxmlformats.org/drawingml/2006/main" prst="rect">
-            <a:avLst/>
-          </a:prstGeom>
-          <a:solidFill xmlns:a="http://schemas.openxmlformats.org/drawingml/2006/main">
+          <a:prstGeom prst="rect">
+            <a:avLst/>
+          </a:prstGeom>
+          <a:solidFill>
             <a:srgbClr val="FFFFFF"/>
           </a:solidFill>
-          <a:ln xmlns:a="http://schemas.openxmlformats.org/drawingml/2006/main" w="9525">
+          <a:ln w="9525">
             <a:solidFill>
               <a:srgbClr val="B8BCC4"/>
             </a:solidFill>
@@ -4914,38 +4657,38 @@
       </p:sp>
       <p:sp>
         <p:nvSpPr>
-          <p:cNvPr id="17" name="">
-            <a:extLst xmlns:a="http://schemas.openxmlformats.org/drawingml/2006/main">
+          <p:cNvPr id="17" name="Rectangle 16">
+            <a:extLst>
               <a:ext uri="{FF2B5EF4-FFF2-40B4-BE49-F238E27FC236}">
                 <a16:creationId xmlns:a16="http://schemas.microsoft.com/office/drawing/2014/main" id="{2B0BD3AE-C376-473F-99A4-2D61604969DC}"/>
               </a:ext>
             </a:extLst>
           </p:cNvPr>
           <p:cNvSpPr>
-            <a:spLocks xmlns:a="http://schemas.openxmlformats.org/drawingml/2006/main" noGrp="1"/>
-          </p:cNvSpPr>
-          <p:nvPr/>
-        </p:nvSpPr>
-        <p:spPr>
-          <a:xfrm xmlns:a="http://schemas.openxmlformats.org/drawingml/2006/main">
+            <a:spLocks noGrp="1"/>
+          </p:cNvSpPr>
+          <p:nvPr/>
+        </p:nvSpPr>
+        <p:spPr>
+          <a:xfrm>
             <a:off x="7505700" y="2571750"/>
             <a:ext cx="3714750" cy="552450"/>
           </a:xfrm>
-          <a:prstGeom xmlns:a="http://schemas.openxmlformats.org/drawingml/2006/main" prst="rect">
-            <a:avLst/>
-          </a:prstGeom>
-          <a:noFill xmlns:a="http://schemas.openxmlformats.org/drawingml/2006/main"/>
-          <a:ln xmlns:a="http://schemas.openxmlformats.org/drawingml/2006/main" w="0">
-            <a:noFill/>
-            <a:prstDash val="solid"/>
-          </a:ln>
-        </p:spPr>
-        <p:txBody>
-          <a:bodyPr xmlns:a="http://schemas.openxmlformats.org/drawingml/2006/main" anchor="ctr">
-            <a:normAutofit fontScale="100000"/>
+          <a:prstGeom prst="rect">
+            <a:avLst/>
+          </a:prstGeom>
+          <a:noFill/>
+          <a:ln w="0">
+            <a:noFill/>
+            <a:prstDash val="solid"/>
+          </a:ln>
+        </p:spPr>
+        <p:txBody>
+          <a:bodyPr anchor="ctr">
+            <a:normAutofit/>
           </a:bodyPr>
-          <a:lstStyle xmlns:a="http://schemas.openxmlformats.org/drawingml/2006/main"/>
-          <a:p xmlns:a="http://schemas.openxmlformats.org/drawingml/2006/main">
+          <a:lstStyle/>
+          <a:p>
             <a:pPr algn="l">
               <a:defRPr sz="1275" b="0">
                 <a:solidFill>
@@ -4972,30 +4715,30 @@
       </p:sp>
       <p:sp>
         <p:nvSpPr>
-          <p:cNvPr id="18" name="">
-            <a:extLst xmlns:a="http://schemas.openxmlformats.org/drawingml/2006/main">
+          <p:cNvPr id="18" name="Rectangle 17">
+            <a:extLst>
               <a:ext uri="{FF2B5EF4-FFF2-40B4-BE49-F238E27FC236}">
                 <a16:creationId xmlns:a16="http://schemas.microsoft.com/office/drawing/2014/main" id="{6286AD0A-18F8-4966-848F-037A4CF48996}"/>
               </a:ext>
             </a:extLst>
           </p:cNvPr>
           <p:cNvSpPr>
-            <a:spLocks xmlns:a="http://schemas.openxmlformats.org/drawingml/2006/main" noGrp="1"/>
-          </p:cNvSpPr>
-          <p:nvPr/>
-        </p:nvSpPr>
-        <p:spPr>
-          <a:xfrm xmlns:a="http://schemas.openxmlformats.org/drawingml/2006/main">
+            <a:spLocks noGrp="1"/>
+          </p:cNvSpPr>
+          <p:nvPr/>
+        </p:nvSpPr>
+        <p:spPr>
+          <a:xfrm>
             <a:off x="419100" y="3181350"/>
             <a:ext cx="2857500" cy="781050"/>
           </a:xfrm>
-          <a:prstGeom xmlns:a="http://schemas.openxmlformats.org/drawingml/2006/main" prst="rect">
-            <a:avLst/>
-          </a:prstGeom>
-          <a:solidFill xmlns:a="http://schemas.openxmlformats.org/drawingml/2006/main">
+          <a:prstGeom prst="rect">
+            <a:avLst/>
+          </a:prstGeom>
+          <a:solidFill>
             <a:srgbClr val="FFFFFF"/>
           </a:solidFill>
-          <a:ln xmlns:a="http://schemas.openxmlformats.org/drawingml/2006/main" w="9525">
+          <a:ln w="9525">
             <a:solidFill>
               <a:srgbClr val="B8BCC4"/>
             </a:solidFill>
@@ -5005,38 +4748,38 @@
       </p:sp>
       <p:sp>
         <p:nvSpPr>
-          <p:cNvPr id="19" name="">
-            <a:extLst xmlns:a="http://schemas.openxmlformats.org/drawingml/2006/main">
+          <p:cNvPr id="19" name="Rectangle 18">
+            <a:extLst>
               <a:ext uri="{FF2B5EF4-FFF2-40B4-BE49-F238E27FC236}">
                 <a16:creationId xmlns:a16="http://schemas.microsoft.com/office/drawing/2014/main" id="{F6788769-3580-4F5C-8A83-38A8E9B25A84}"/>
               </a:ext>
             </a:extLst>
           </p:cNvPr>
           <p:cNvSpPr>
-            <a:spLocks xmlns:a="http://schemas.openxmlformats.org/drawingml/2006/main" noGrp="1"/>
-          </p:cNvSpPr>
-          <p:nvPr/>
-        </p:nvSpPr>
-        <p:spPr>
-          <a:xfrm xmlns:a="http://schemas.openxmlformats.org/drawingml/2006/main">
+            <a:spLocks noGrp="1"/>
+          </p:cNvSpPr>
+          <p:nvPr/>
+        </p:nvSpPr>
+        <p:spPr>
+          <a:xfrm>
             <a:off x="552450" y="3352800"/>
             <a:ext cx="2590800" cy="552450"/>
           </a:xfrm>
-          <a:prstGeom xmlns:a="http://schemas.openxmlformats.org/drawingml/2006/main" prst="rect">
-            <a:avLst/>
-          </a:prstGeom>
-          <a:noFill xmlns:a="http://schemas.openxmlformats.org/drawingml/2006/main"/>
-          <a:ln xmlns:a="http://schemas.openxmlformats.org/drawingml/2006/main" w="0">
-            <a:noFill/>
-            <a:prstDash val="solid"/>
-          </a:ln>
-        </p:spPr>
-        <p:txBody>
-          <a:bodyPr xmlns:a="http://schemas.openxmlformats.org/drawingml/2006/main" anchor="ctr">
-            <a:normAutofit fontScale="100000"/>
+          <a:prstGeom prst="rect">
+            <a:avLst/>
+          </a:prstGeom>
+          <a:noFill/>
+          <a:ln w="0">
+            <a:noFill/>
+            <a:prstDash val="solid"/>
+          </a:ln>
+        </p:spPr>
+        <p:txBody>
+          <a:bodyPr anchor="ctr">
+            <a:normAutofit/>
           </a:bodyPr>
-          <a:lstStyle xmlns:a="http://schemas.openxmlformats.org/drawingml/2006/main"/>
-          <a:p xmlns:a="http://schemas.openxmlformats.org/drawingml/2006/main">
+          <a:lstStyle/>
+          <a:p>
             <a:pPr algn="l">
               <a:defRPr sz="1275" b="0">
                 <a:solidFill>
@@ -5063,30 +4806,30 @@
       </p:sp>
       <p:sp>
         <p:nvSpPr>
-          <p:cNvPr id="20" name="">
-            <a:extLst xmlns:a="http://schemas.openxmlformats.org/drawingml/2006/main">
+          <p:cNvPr id="20" name="Rectangle 19">
+            <a:extLst>
               <a:ext uri="{FF2B5EF4-FFF2-40B4-BE49-F238E27FC236}">
                 <a16:creationId xmlns:a16="http://schemas.microsoft.com/office/drawing/2014/main" id="{3743F057-F805-4784-AD5E-9123F05ADCCA}"/>
               </a:ext>
             </a:extLst>
           </p:cNvPr>
           <p:cNvSpPr>
-            <a:spLocks xmlns:a="http://schemas.openxmlformats.org/drawingml/2006/main" noGrp="1"/>
-          </p:cNvSpPr>
-          <p:nvPr/>
-        </p:nvSpPr>
-        <p:spPr>
-          <a:xfrm xmlns:a="http://schemas.openxmlformats.org/drawingml/2006/main">
+            <a:spLocks noGrp="1"/>
+          </p:cNvSpPr>
+          <p:nvPr/>
+        </p:nvSpPr>
+        <p:spPr>
+          <a:xfrm>
             <a:off x="3276600" y="3181350"/>
             <a:ext cx="1619250" cy="781050"/>
           </a:xfrm>
-          <a:prstGeom xmlns:a="http://schemas.openxmlformats.org/drawingml/2006/main" prst="rect">
-            <a:avLst/>
-          </a:prstGeom>
-          <a:solidFill xmlns:a="http://schemas.openxmlformats.org/drawingml/2006/main">
+          <a:prstGeom prst="rect">
+            <a:avLst/>
+          </a:prstGeom>
+          <a:solidFill>
             <a:srgbClr val="FDE2E2"/>
           </a:solidFill>
-          <a:ln xmlns:a="http://schemas.openxmlformats.org/drawingml/2006/main" w="9525">
+          <a:ln w="9525">
             <a:solidFill>
               <a:srgbClr val="B8BCC4"/>
             </a:solidFill>
@@ -5096,38 +4839,38 @@
       </p:sp>
       <p:sp>
         <p:nvSpPr>
-          <p:cNvPr id="21" name="">
-            <a:extLst xmlns:a="http://schemas.openxmlformats.org/drawingml/2006/main">
+          <p:cNvPr id="21" name="Rectangle 20">
+            <a:extLst>
               <a:ext uri="{FF2B5EF4-FFF2-40B4-BE49-F238E27FC236}">
                 <a16:creationId xmlns:a16="http://schemas.microsoft.com/office/drawing/2014/main" id="{9C850D8A-0BC3-465C-A567-3A5B895E5815}"/>
               </a:ext>
             </a:extLst>
           </p:cNvPr>
           <p:cNvSpPr>
-            <a:spLocks xmlns:a="http://schemas.openxmlformats.org/drawingml/2006/main" noGrp="1"/>
-          </p:cNvSpPr>
-          <p:nvPr/>
-        </p:nvSpPr>
-        <p:spPr>
-          <a:xfrm xmlns:a="http://schemas.openxmlformats.org/drawingml/2006/main">
+            <a:spLocks noGrp="1"/>
+          </p:cNvSpPr>
+          <p:nvPr/>
+        </p:nvSpPr>
+        <p:spPr>
+          <a:xfrm>
             <a:off x="3409950" y="3352800"/>
             <a:ext cx="1352550" cy="552450"/>
           </a:xfrm>
-          <a:prstGeom xmlns:a="http://schemas.openxmlformats.org/drawingml/2006/main" prst="rect">
-            <a:avLst/>
-          </a:prstGeom>
-          <a:noFill xmlns:a="http://schemas.openxmlformats.org/drawingml/2006/main"/>
-          <a:ln xmlns:a="http://schemas.openxmlformats.org/drawingml/2006/main" w="0">
-            <a:noFill/>
-            <a:prstDash val="solid"/>
-          </a:ln>
-        </p:spPr>
-        <p:txBody>
-          <a:bodyPr xmlns:a="http://schemas.openxmlformats.org/drawingml/2006/main" anchor="ctr">
-            <a:normAutofit fontScale="100000"/>
+          <a:prstGeom prst="rect">
+            <a:avLst/>
+          </a:prstGeom>
+          <a:noFill/>
+          <a:ln w="0">
+            <a:noFill/>
+            <a:prstDash val="solid"/>
+          </a:ln>
+        </p:spPr>
+        <p:txBody>
+          <a:bodyPr anchor="ctr">
+            <a:normAutofit/>
           </a:bodyPr>
-          <a:lstStyle xmlns:a="http://schemas.openxmlformats.org/drawingml/2006/main"/>
-          <a:p xmlns:a="http://schemas.openxmlformats.org/drawingml/2006/main">
+          <a:lstStyle/>
+          <a:p>
             <a:pPr algn="l">
               <a:defRPr sz="1275" b="0">
                 <a:solidFill>
@@ -5154,30 +4897,30 @@
       </p:sp>
       <p:sp>
         <p:nvSpPr>
-          <p:cNvPr id="22" name="">
-            <a:extLst xmlns:a="http://schemas.openxmlformats.org/drawingml/2006/main">
+          <p:cNvPr id="22" name="Rectangle 21">
+            <a:extLst>
               <a:ext uri="{FF2B5EF4-FFF2-40B4-BE49-F238E27FC236}">
                 <a16:creationId xmlns:a16="http://schemas.microsoft.com/office/drawing/2014/main" id="{7B0C3276-7BCA-477C-8F3B-74BA20C45368}"/>
               </a:ext>
             </a:extLst>
           </p:cNvPr>
           <p:cNvSpPr>
-            <a:spLocks xmlns:a="http://schemas.openxmlformats.org/drawingml/2006/main" noGrp="1"/>
-          </p:cNvSpPr>
-          <p:nvPr/>
-        </p:nvSpPr>
-        <p:spPr>
-          <a:xfrm xmlns:a="http://schemas.openxmlformats.org/drawingml/2006/main">
+            <a:spLocks noGrp="1"/>
+          </p:cNvSpPr>
+          <p:nvPr/>
+        </p:nvSpPr>
+        <p:spPr>
+          <a:xfrm>
             <a:off x="4895850" y="3181350"/>
             <a:ext cx="2476500" cy="781050"/>
           </a:xfrm>
-          <a:prstGeom xmlns:a="http://schemas.openxmlformats.org/drawingml/2006/main" prst="rect">
-            <a:avLst/>
-          </a:prstGeom>
-          <a:solidFill xmlns:a="http://schemas.openxmlformats.org/drawingml/2006/main">
+          <a:prstGeom prst="rect">
+            <a:avLst/>
+          </a:prstGeom>
+          <a:solidFill>
             <a:srgbClr val="FFFFFF"/>
           </a:solidFill>
-          <a:ln xmlns:a="http://schemas.openxmlformats.org/drawingml/2006/main" w="9525">
+          <a:ln w="9525">
             <a:solidFill>
               <a:srgbClr val="B8BCC4"/>
             </a:solidFill>
@@ -5187,38 +4930,38 @@
       </p:sp>
       <p:sp>
         <p:nvSpPr>
-          <p:cNvPr id="23" name="">
-            <a:extLst xmlns:a="http://schemas.openxmlformats.org/drawingml/2006/main">
+          <p:cNvPr id="23" name="Rectangle 22">
+            <a:extLst>
               <a:ext uri="{FF2B5EF4-FFF2-40B4-BE49-F238E27FC236}">
                 <a16:creationId xmlns:a16="http://schemas.microsoft.com/office/drawing/2014/main" id="{EFC6E759-7E34-4508-B8FF-F0A1EA4B6DAF}"/>
               </a:ext>
             </a:extLst>
           </p:cNvPr>
           <p:cNvSpPr>
-            <a:spLocks xmlns:a="http://schemas.openxmlformats.org/drawingml/2006/main" noGrp="1"/>
-          </p:cNvSpPr>
-          <p:nvPr/>
-        </p:nvSpPr>
-        <p:spPr>
-          <a:xfrm xmlns:a="http://schemas.openxmlformats.org/drawingml/2006/main">
+            <a:spLocks noGrp="1"/>
+          </p:cNvSpPr>
+          <p:nvPr/>
+        </p:nvSpPr>
+        <p:spPr>
+          <a:xfrm>
             <a:off x="5029200" y="3352800"/>
             <a:ext cx="2209800" cy="552450"/>
           </a:xfrm>
-          <a:prstGeom xmlns:a="http://schemas.openxmlformats.org/drawingml/2006/main" prst="rect">
-            <a:avLst/>
-          </a:prstGeom>
-          <a:noFill xmlns:a="http://schemas.openxmlformats.org/drawingml/2006/main"/>
-          <a:ln xmlns:a="http://schemas.openxmlformats.org/drawingml/2006/main" w="0">
-            <a:noFill/>
-            <a:prstDash val="solid"/>
-          </a:ln>
-        </p:spPr>
-        <p:txBody>
-          <a:bodyPr xmlns:a="http://schemas.openxmlformats.org/drawingml/2006/main" anchor="ctr">
-            <a:normAutofit fontScale="100000"/>
+          <a:prstGeom prst="rect">
+            <a:avLst/>
+          </a:prstGeom>
+          <a:noFill/>
+          <a:ln w="0">
+            <a:noFill/>
+            <a:prstDash val="solid"/>
+          </a:ln>
+        </p:spPr>
+        <p:txBody>
+          <a:bodyPr anchor="ctr">
+            <a:normAutofit/>
           </a:bodyPr>
-          <a:lstStyle xmlns:a="http://schemas.openxmlformats.org/drawingml/2006/main"/>
-          <a:p xmlns:a="http://schemas.openxmlformats.org/drawingml/2006/main">
+          <a:lstStyle/>
+          <a:p>
             <a:pPr algn="l">
               <a:defRPr sz="1275" b="0">
                 <a:solidFill>
@@ -5245,30 +4988,30 @@
       </p:sp>
       <p:sp>
         <p:nvSpPr>
-          <p:cNvPr id="24" name="">
-            <a:extLst xmlns:a="http://schemas.openxmlformats.org/drawingml/2006/main">
+          <p:cNvPr id="24" name="Rectangle 23">
+            <a:extLst>
               <a:ext uri="{FF2B5EF4-FFF2-40B4-BE49-F238E27FC236}">
                 <a16:creationId xmlns:a16="http://schemas.microsoft.com/office/drawing/2014/main" id="{4F1039E6-E30D-444A-A635-413FA62F6282}"/>
               </a:ext>
             </a:extLst>
           </p:cNvPr>
           <p:cNvSpPr>
-            <a:spLocks xmlns:a="http://schemas.openxmlformats.org/drawingml/2006/main" noGrp="1"/>
-          </p:cNvSpPr>
-          <p:nvPr/>
-        </p:nvSpPr>
-        <p:spPr>
-          <a:xfrm xmlns:a="http://schemas.openxmlformats.org/drawingml/2006/main">
+            <a:spLocks noGrp="1"/>
+          </p:cNvSpPr>
+          <p:nvPr/>
+        </p:nvSpPr>
+        <p:spPr>
+          <a:xfrm>
             <a:off x="7372350" y="3181350"/>
             <a:ext cx="3981450" cy="781050"/>
           </a:xfrm>
-          <a:prstGeom xmlns:a="http://schemas.openxmlformats.org/drawingml/2006/main" prst="rect">
-            <a:avLst/>
-          </a:prstGeom>
-          <a:solidFill xmlns:a="http://schemas.openxmlformats.org/drawingml/2006/main">
+          <a:prstGeom prst="rect">
+            <a:avLst/>
+          </a:prstGeom>
+          <a:solidFill>
             <a:srgbClr val="FFFFFF"/>
           </a:solidFill>
-          <a:ln xmlns:a="http://schemas.openxmlformats.org/drawingml/2006/main" w="9525">
+          <a:ln w="9525">
             <a:solidFill>
               <a:srgbClr val="B8BCC4"/>
             </a:solidFill>
@@ -5278,38 +5021,38 @@
       </p:sp>
       <p:sp>
         <p:nvSpPr>
-          <p:cNvPr id="25" name="">
-            <a:extLst xmlns:a="http://schemas.openxmlformats.org/drawingml/2006/main">
+          <p:cNvPr id="25" name="Rectangle 24">
+            <a:extLst>
               <a:ext uri="{FF2B5EF4-FFF2-40B4-BE49-F238E27FC236}">
                 <a16:creationId xmlns:a16="http://schemas.microsoft.com/office/drawing/2014/main" id="{E76F01B9-75D8-44A7-A28B-6EC1E4BA06D7}"/>
               </a:ext>
             </a:extLst>
           </p:cNvPr>
           <p:cNvSpPr>
-            <a:spLocks xmlns:a="http://schemas.openxmlformats.org/drawingml/2006/main" noGrp="1"/>
-          </p:cNvSpPr>
-          <p:nvPr/>
-        </p:nvSpPr>
-        <p:spPr>
-          <a:xfrm xmlns:a="http://schemas.openxmlformats.org/drawingml/2006/main">
+            <a:spLocks noGrp="1"/>
+          </p:cNvSpPr>
+          <p:nvPr/>
+        </p:nvSpPr>
+        <p:spPr>
+          <a:xfrm>
             <a:off x="7505700" y="3352800"/>
             <a:ext cx="3714750" cy="552450"/>
           </a:xfrm>
-          <a:prstGeom xmlns:a="http://schemas.openxmlformats.org/drawingml/2006/main" prst="rect">
-            <a:avLst/>
-          </a:prstGeom>
-          <a:noFill xmlns:a="http://schemas.openxmlformats.org/drawingml/2006/main"/>
-          <a:ln xmlns:a="http://schemas.openxmlformats.org/drawingml/2006/main" w="0">
-            <a:noFill/>
-            <a:prstDash val="solid"/>
-          </a:ln>
-        </p:spPr>
-        <p:txBody>
-          <a:bodyPr xmlns:a="http://schemas.openxmlformats.org/drawingml/2006/main" anchor="ctr">
-            <a:normAutofit fontScale="100000"/>
+          <a:prstGeom prst="rect">
+            <a:avLst/>
+          </a:prstGeom>
+          <a:noFill/>
+          <a:ln w="0">
+            <a:noFill/>
+            <a:prstDash val="solid"/>
+          </a:ln>
+        </p:spPr>
+        <p:txBody>
+          <a:bodyPr anchor="ctr">
+            <a:normAutofit/>
           </a:bodyPr>
-          <a:lstStyle xmlns:a="http://schemas.openxmlformats.org/drawingml/2006/main"/>
-          <a:p xmlns:a="http://schemas.openxmlformats.org/drawingml/2006/main">
+          <a:lstStyle/>
+          <a:p>
             <a:pPr algn="l">
               <a:defRPr sz="1275" b="0">
                 <a:solidFill>
@@ -5336,30 +5079,30 @@
       </p:sp>
       <p:sp>
         <p:nvSpPr>
-          <p:cNvPr id="26" name="">
-            <a:extLst xmlns:a="http://schemas.openxmlformats.org/drawingml/2006/main">
+          <p:cNvPr id="26" name="Rectangle 25">
+            <a:extLst>
               <a:ext uri="{FF2B5EF4-FFF2-40B4-BE49-F238E27FC236}">
                 <a16:creationId xmlns:a16="http://schemas.microsoft.com/office/drawing/2014/main" id="{67FC279C-DFF6-4D3D-84B1-951EE52D7764}"/>
               </a:ext>
             </a:extLst>
           </p:cNvPr>
           <p:cNvSpPr>
-            <a:spLocks xmlns:a="http://schemas.openxmlformats.org/drawingml/2006/main" noGrp="1"/>
-          </p:cNvSpPr>
-          <p:nvPr/>
-        </p:nvSpPr>
-        <p:spPr>
-          <a:xfrm xmlns:a="http://schemas.openxmlformats.org/drawingml/2006/main">
+            <a:spLocks noGrp="1"/>
+          </p:cNvSpPr>
+          <p:nvPr/>
+        </p:nvSpPr>
+        <p:spPr>
+          <a:xfrm>
             <a:off x="419100" y="3962400"/>
             <a:ext cx="2857500" cy="781050"/>
           </a:xfrm>
-          <a:prstGeom xmlns:a="http://schemas.openxmlformats.org/drawingml/2006/main" prst="rect">
-            <a:avLst/>
-          </a:prstGeom>
-          <a:solidFill xmlns:a="http://schemas.openxmlformats.org/drawingml/2006/main">
+          <a:prstGeom prst="rect">
+            <a:avLst/>
+          </a:prstGeom>
+          <a:solidFill>
             <a:srgbClr val="FFFFFF"/>
           </a:solidFill>
-          <a:ln xmlns:a="http://schemas.openxmlformats.org/drawingml/2006/main" w="9525">
+          <a:ln w="9525">
             <a:solidFill>
               <a:srgbClr val="B8BCC4"/>
             </a:solidFill>
@@ -5369,38 +5112,38 @@
       </p:sp>
       <p:sp>
         <p:nvSpPr>
-          <p:cNvPr id="27" name="">
-            <a:extLst xmlns:a="http://schemas.openxmlformats.org/drawingml/2006/main">
+          <p:cNvPr id="27" name="Rectangle 26">
+            <a:extLst>
               <a:ext uri="{FF2B5EF4-FFF2-40B4-BE49-F238E27FC236}">
                 <a16:creationId xmlns:a16="http://schemas.microsoft.com/office/drawing/2014/main" id="{25F1AC55-06C4-4AD5-8303-AA33853AFDBB}"/>
               </a:ext>
             </a:extLst>
           </p:cNvPr>
           <p:cNvSpPr>
-            <a:spLocks xmlns:a="http://schemas.openxmlformats.org/drawingml/2006/main" noGrp="1"/>
-          </p:cNvSpPr>
-          <p:nvPr/>
-        </p:nvSpPr>
-        <p:spPr>
-          <a:xfrm xmlns:a="http://schemas.openxmlformats.org/drawingml/2006/main">
+            <a:spLocks noGrp="1"/>
+          </p:cNvSpPr>
+          <p:nvPr/>
+        </p:nvSpPr>
+        <p:spPr>
+          <a:xfrm>
             <a:off x="552450" y="4133850"/>
             <a:ext cx="2590800" cy="552450"/>
           </a:xfrm>
-          <a:prstGeom xmlns:a="http://schemas.openxmlformats.org/drawingml/2006/main" prst="rect">
-            <a:avLst/>
-          </a:prstGeom>
-          <a:noFill xmlns:a="http://schemas.openxmlformats.org/drawingml/2006/main"/>
-          <a:ln xmlns:a="http://schemas.openxmlformats.org/drawingml/2006/main" w="0">
-            <a:noFill/>
-            <a:prstDash val="solid"/>
-          </a:ln>
-        </p:spPr>
-        <p:txBody>
-          <a:bodyPr xmlns:a="http://schemas.openxmlformats.org/drawingml/2006/main" anchor="ctr">
-            <a:normAutofit fontScale="100000"/>
+          <a:prstGeom prst="rect">
+            <a:avLst/>
+          </a:prstGeom>
+          <a:noFill/>
+          <a:ln w="0">
+            <a:noFill/>
+            <a:prstDash val="solid"/>
+          </a:ln>
+        </p:spPr>
+        <p:txBody>
+          <a:bodyPr anchor="ctr">
+            <a:normAutofit/>
           </a:bodyPr>
-          <a:lstStyle xmlns:a="http://schemas.openxmlformats.org/drawingml/2006/main"/>
-          <a:p xmlns:a="http://schemas.openxmlformats.org/drawingml/2006/main">
+          <a:lstStyle/>
+          <a:p>
             <a:pPr algn="l">
               <a:defRPr sz="1275" b="0">
                 <a:solidFill>
@@ -5427,30 +5170,30 @@
       </p:sp>
       <p:sp>
         <p:nvSpPr>
-          <p:cNvPr id="28" name="">
-            <a:extLst xmlns:a="http://schemas.openxmlformats.org/drawingml/2006/main">
+          <p:cNvPr id="28" name="Rectangle 27">
+            <a:extLst>
               <a:ext uri="{FF2B5EF4-FFF2-40B4-BE49-F238E27FC236}">
                 <a16:creationId xmlns:a16="http://schemas.microsoft.com/office/drawing/2014/main" id="{9F100850-55DA-4593-AC77-24825BAFACAD}"/>
               </a:ext>
             </a:extLst>
           </p:cNvPr>
           <p:cNvSpPr>
-            <a:spLocks xmlns:a="http://schemas.openxmlformats.org/drawingml/2006/main" noGrp="1"/>
-          </p:cNvSpPr>
-          <p:nvPr/>
-        </p:nvSpPr>
-        <p:spPr>
-          <a:xfrm xmlns:a="http://schemas.openxmlformats.org/drawingml/2006/main">
+            <a:spLocks noGrp="1"/>
+          </p:cNvSpPr>
+          <p:nvPr/>
+        </p:nvSpPr>
+        <p:spPr>
+          <a:xfrm>
             <a:off x="3276600" y="3962400"/>
             <a:ext cx="1619250" cy="781050"/>
           </a:xfrm>
-          <a:prstGeom xmlns:a="http://schemas.openxmlformats.org/drawingml/2006/main" prst="rect">
-            <a:avLst/>
-          </a:prstGeom>
-          <a:solidFill xmlns:a="http://schemas.openxmlformats.org/drawingml/2006/main">
+          <a:prstGeom prst="rect">
+            <a:avLst/>
+          </a:prstGeom>
+          <a:solidFill>
             <a:srgbClr val="FFFFFF"/>
           </a:solidFill>
-          <a:ln xmlns:a="http://schemas.openxmlformats.org/drawingml/2006/main" w="9525">
+          <a:ln w="9525">
             <a:solidFill>
               <a:srgbClr val="B8BCC4"/>
             </a:solidFill>
@@ -5460,38 +5203,38 @@
       </p:sp>
       <p:sp>
         <p:nvSpPr>
-          <p:cNvPr id="29" name="">
-            <a:extLst xmlns:a="http://schemas.openxmlformats.org/drawingml/2006/main">
+          <p:cNvPr id="29" name="Rectangle 28">
+            <a:extLst>
               <a:ext uri="{FF2B5EF4-FFF2-40B4-BE49-F238E27FC236}">
                 <a16:creationId xmlns:a16="http://schemas.microsoft.com/office/drawing/2014/main" id="{E86CD224-57E1-4F40-BACA-8BAD62A4182C}"/>
               </a:ext>
             </a:extLst>
           </p:cNvPr>
           <p:cNvSpPr>
-            <a:spLocks xmlns:a="http://schemas.openxmlformats.org/drawingml/2006/main" noGrp="1"/>
-          </p:cNvSpPr>
-          <p:nvPr/>
-        </p:nvSpPr>
-        <p:spPr>
-          <a:xfrm xmlns:a="http://schemas.openxmlformats.org/drawingml/2006/main">
+            <a:spLocks noGrp="1"/>
+          </p:cNvSpPr>
+          <p:nvPr/>
+        </p:nvSpPr>
+        <p:spPr>
+          <a:xfrm>
             <a:off x="3409950" y="4133850"/>
             <a:ext cx="1352550" cy="552450"/>
           </a:xfrm>
-          <a:prstGeom xmlns:a="http://schemas.openxmlformats.org/drawingml/2006/main" prst="rect">
-            <a:avLst/>
-          </a:prstGeom>
-          <a:noFill xmlns:a="http://schemas.openxmlformats.org/drawingml/2006/main"/>
-          <a:ln xmlns:a="http://schemas.openxmlformats.org/drawingml/2006/main" w="0">
-            <a:noFill/>
-            <a:prstDash val="solid"/>
-          </a:ln>
-        </p:spPr>
-        <p:txBody>
-          <a:bodyPr xmlns:a="http://schemas.openxmlformats.org/drawingml/2006/main" anchor="ctr">
-            <a:normAutofit fontScale="100000"/>
+          <a:prstGeom prst="rect">
+            <a:avLst/>
+          </a:prstGeom>
+          <a:noFill/>
+          <a:ln w="0">
+            <a:noFill/>
+            <a:prstDash val="solid"/>
+          </a:ln>
+        </p:spPr>
+        <p:txBody>
+          <a:bodyPr anchor="ctr">
+            <a:normAutofit/>
           </a:bodyPr>
-          <a:lstStyle xmlns:a="http://schemas.openxmlformats.org/drawingml/2006/main"/>
-          <a:p xmlns:a="http://schemas.openxmlformats.org/drawingml/2006/main">
+          <a:lstStyle/>
+          <a:p>
             <a:pPr algn="l">
               <a:defRPr sz="1275" b="0">
                 <a:solidFill>
@@ -5518,30 +5261,30 @@
       </p:sp>
       <p:sp>
         <p:nvSpPr>
-          <p:cNvPr id="30" name="">
-            <a:extLst xmlns:a="http://schemas.openxmlformats.org/drawingml/2006/main">
+          <p:cNvPr id="30" name="Rectangle 29">
+            <a:extLst>
               <a:ext uri="{FF2B5EF4-FFF2-40B4-BE49-F238E27FC236}">
                 <a16:creationId xmlns:a16="http://schemas.microsoft.com/office/drawing/2014/main" id="{5A6C2723-87FC-4317-9C87-836C0589B353}"/>
               </a:ext>
             </a:extLst>
           </p:cNvPr>
           <p:cNvSpPr>
-            <a:spLocks xmlns:a="http://schemas.openxmlformats.org/drawingml/2006/main" noGrp="1"/>
-          </p:cNvSpPr>
-          <p:nvPr/>
-        </p:nvSpPr>
-        <p:spPr>
-          <a:xfrm xmlns:a="http://schemas.openxmlformats.org/drawingml/2006/main">
+            <a:spLocks noGrp="1"/>
+          </p:cNvSpPr>
+          <p:nvPr/>
+        </p:nvSpPr>
+        <p:spPr>
+          <a:xfrm>
             <a:off x="4895850" y="3962400"/>
             <a:ext cx="2476500" cy="781050"/>
           </a:xfrm>
-          <a:prstGeom xmlns:a="http://schemas.openxmlformats.org/drawingml/2006/main" prst="rect">
-            <a:avLst/>
-          </a:prstGeom>
-          <a:solidFill xmlns:a="http://schemas.openxmlformats.org/drawingml/2006/main">
+          <a:prstGeom prst="rect">
+            <a:avLst/>
+          </a:prstGeom>
+          <a:solidFill>
             <a:srgbClr val="FFFFFF"/>
           </a:solidFill>
-          <a:ln xmlns:a="http://schemas.openxmlformats.org/drawingml/2006/main" w="9525">
+          <a:ln w="9525">
             <a:solidFill>
               <a:srgbClr val="B8BCC4"/>
             </a:solidFill>
@@ -5551,38 +5294,38 @@
       </p:sp>
       <p:sp>
         <p:nvSpPr>
-          <p:cNvPr id="31" name="">
-            <a:extLst xmlns:a="http://schemas.openxmlformats.org/drawingml/2006/main">
+          <p:cNvPr id="31" name="Rectangle 30">
+            <a:extLst>
               <a:ext uri="{FF2B5EF4-FFF2-40B4-BE49-F238E27FC236}">
                 <a16:creationId xmlns:a16="http://schemas.microsoft.com/office/drawing/2014/main" id="{FDD12736-CDF9-4054-8E4A-8FB614E34846}"/>
               </a:ext>
             </a:extLst>
           </p:cNvPr>
           <p:cNvSpPr>
-            <a:spLocks xmlns:a="http://schemas.openxmlformats.org/drawingml/2006/main" noGrp="1"/>
-          </p:cNvSpPr>
-          <p:nvPr/>
-        </p:nvSpPr>
-        <p:spPr>
-          <a:xfrm xmlns:a="http://schemas.openxmlformats.org/drawingml/2006/main">
+            <a:spLocks noGrp="1"/>
+          </p:cNvSpPr>
+          <p:nvPr/>
+        </p:nvSpPr>
+        <p:spPr>
+          <a:xfrm>
             <a:off x="5029200" y="4133850"/>
             <a:ext cx="2209800" cy="552450"/>
           </a:xfrm>
-          <a:prstGeom xmlns:a="http://schemas.openxmlformats.org/drawingml/2006/main" prst="rect">
-            <a:avLst/>
-          </a:prstGeom>
-          <a:noFill xmlns:a="http://schemas.openxmlformats.org/drawingml/2006/main"/>
-          <a:ln xmlns:a="http://schemas.openxmlformats.org/drawingml/2006/main" w="0">
-            <a:noFill/>
-            <a:prstDash val="solid"/>
-          </a:ln>
-        </p:spPr>
-        <p:txBody>
-          <a:bodyPr xmlns:a="http://schemas.openxmlformats.org/drawingml/2006/main" anchor="ctr">
-            <a:normAutofit fontScale="100000"/>
+          <a:prstGeom prst="rect">
+            <a:avLst/>
+          </a:prstGeom>
+          <a:noFill/>
+          <a:ln w="0">
+            <a:noFill/>
+            <a:prstDash val="solid"/>
+          </a:ln>
+        </p:spPr>
+        <p:txBody>
+          <a:bodyPr anchor="ctr">
+            <a:normAutofit/>
           </a:bodyPr>
-          <a:lstStyle xmlns:a="http://schemas.openxmlformats.org/drawingml/2006/main"/>
-          <a:p xmlns:a="http://schemas.openxmlformats.org/drawingml/2006/main">
+          <a:lstStyle/>
+          <a:p>
             <a:pPr algn="l">
               <a:defRPr sz="1275" b="0">
                 <a:solidFill>
@@ -5609,30 +5352,30 @@
       </p:sp>
       <p:sp>
         <p:nvSpPr>
-          <p:cNvPr id="32" name="">
-            <a:extLst xmlns:a="http://schemas.openxmlformats.org/drawingml/2006/main">
+          <p:cNvPr id="32" name="Rectangle 31">
+            <a:extLst>
               <a:ext uri="{FF2B5EF4-FFF2-40B4-BE49-F238E27FC236}">
                 <a16:creationId xmlns:a16="http://schemas.microsoft.com/office/drawing/2014/main" id="{E587083D-C873-4AFF-90B4-744338F80F37}"/>
               </a:ext>
             </a:extLst>
           </p:cNvPr>
           <p:cNvSpPr>
-            <a:spLocks xmlns:a="http://schemas.openxmlformats.org/drawingml/2006/main" noGrp="1"/>
-          </p:cNvSpPr>
-          <p:nvPr/>
-        </p:nvSpPr>
-        <p:spPr>
-          <a:xfrm xmlns:a="http://schemas.openxmlformats.org/drawingml/2006/main">
+            <a:spLocks noGrp="1"/>
+          </p:cNvSpPr>
+          <p:nvPr/>
+        </p:nvSpPr>
+        <p:spPr>
+          <a:xfrm>
             <a:off x="7372350" y="3962400"/>
             <a:ext cx="3981450" cy="781050"/>
           </a:xfrm>
-          <a:prstGeom xmlns:a="http://schemas.openxmlformats.org/drawingml/2006/main" prst="rect">
-            <a:avLst/>
-          </a:prstGeom>
-          <a:solidFill xmlns:a="http://schemas.openxmlformats.org/drawingml/2006/main">
+          <a:prstGeom prst="rect">
+            <a:avLst/>
+          </a:prstGeom>
+          <a:solidFill>
             <a:srgbClr val="FFFFFF"/>
           </a:solidFill>
-          <a:ln xmlns:a="http://schemas.openxmlformats.org/drawingml/2006/main" w="9525">
+          <a:ln w="9525">
             <a:solidFill>
               <a:srgbClr val="B8BCC4"/>
             </a:solidFill>
@@ -5642,38 +5385,38 @@
       </p:sp>
       <p:sp>
         <p:nvSpPr>
-          <p:cNvPr id="33" name="">
-            <a:extLst xmlns:a="http://schemas.openxmlformats.org/drawingml/2006/main">
+          <p:cNvPr id="33" name="Rectangle 32">
+            <a:extLst>
               <a:ext uri="{FF2B5EF4-FFF2-40B4-BE49-F238E27FC236}">
                 <a16:creationId xmlns:a16="http://schemas.microsoft.com/office/drawing/2014/main" id="{238C6CA4-1410-47B5-AF44-87A693E3353E}"/>
               </a:ext>
             </a:extLst>
           </p:cNvPr>
           <p:cNvSpPr>
-            <a:spLocks xmlns:a="http://schemas.openxmlformats.org/drawingml/2006/main" noGrp="1"/>
-          </p:cNvSpPr>
-          <p:nvPr/>
-        </p:nvSpPr>
-        <p:spPr>
-          <a:xfrm xmlns:a="http://schemas.openxmlformats.org/drawingml/2006/main">
+            <a:spLocks noGrp="1"/>
+          </p:cNvSpPr>
+          <p:nvPr/>
+        </p:nvSpPr>
+        <p:spPr>
+          <a:xfrm>
             <a:off x="7505700" y="4133850"/>
             <a:ext cx="3714750" cy="552450"/>
           </a:xfrm>
-          <a:prstGeom xmlns:a="http://schemas.openxmlformats.org/drawingml/2006/main" prst="rect">
-            <a:avLst/>
-          </a:prstGeom>
-          <a:noFill xmlns:a="http://schemas.openxmlformats.org/drawingml/2006/main"/>
-          <a:ln xmlns:a="http://schemas.openxmlformats.org/drawingml/2006/main" w="0">
-            <a:noFill/>
-            <a:prstDash val="solid"/>
-          </a:ln>
-        </p:spPr>
-        <p:txBody>
-          <a:bodyPr xmlns:a="http://schemas.openxmlformats.org/drawingml/2006/main" anchor="ctr">
-            <a:normAutofit fontScale="100000"/>
+          <a:prstGeom prst="rect">
+            <a:avLst/>
+          </a:prstGeom>
+          <a:noFill/>
+          <a:ln w="0">
+            <a:noFill/>
+            <a:prstDash val="solid"/>
+          </a:ln>
+        </p:spPr>
+        <p:txBody>
+          <a:bodyPr anchor="ctr">
+            <a:normAutofit/>
           </a:bodyPr>
-          <a:lstStyle xmlns:a="http://schemas.openxmlformats.org/drawingml/2006/main"/>
-          <a:p xmlns:a="http://schemas.openxmlformats.org/drawingml/2006/main">
+          <a:lstStyle/>
+          <a:p>
             <a:pPr algn="l">
               <a:defRPr sz="1275" b="0">
                 <a:solidFill>
@@ -5700,38 +5443,38 @@
       </p:sp>
       <p:sp>
         <p:nvSpPr>
-          <p:cNvPr id="34" name="">
-            <a:extLst xmlns:a="http://schemas.openxmlformats.org/drawingml/2006/main">
+          <p:cNvPr id="34" name="Rectangle 33">
+            <a:extLst>
               <a:ext uri="{FF2B5EF4-FFF2-40B4-BE49-F238E27FC236}">
                 <a16:creationId xmlns:a16="http://schemas.microsoft.com/office/drawing/2014/main" id="{872F820F-2EC4-4B4C-90D9-D99BB6F65824}"/>
               </a:ext>
             </a:extLst>
           </p:cNvPr>
           <p:cNvSpPr>
-            <a:spLocks xmlns:a="http://schemas.openxmlformats.org/drawingml/2006/main" noGrp="1"/>
-          </p:cNvSpPr>
-          <p:nvPr/>
-        </p:nvSpPr>
-        <p:spPr>
-          <a:xfrm xmlns:a="http://schemas.openxmlformats.org/drawingml/2006/main">
+            <a:spLocks noGrp="1"/>
+          </p:cNvSpPr>
+          <p:nvPr/>
+        </p:nvSpPr>
+        <p:spPr>
+          <a:xfrm>
             <a:off x="419100" y="6419850"/>
             <a:ext cx="3429000" cy="209550"/>
           </a:xfrm>
-          <a:prstGeom xmlns:a="http://schemas.openxmlformats.org/drawingml/2006/main" prst="rect">
-            <a:avLst/>
-          </a:prstGeom>
-          <a:noFill xmlns:a="http://schemas.openxmlformats.org/drawingml/2006/main"/>
-          <a:ln xmlns:a="http://schemas.openxmlformats.org/drawingml/2006/main" w="0">
-            <a:noFill/>
-            <a:prstDash val="solid"/>
-          </a:ln>
-        </p:spPr>
-        <p:txBody>
-          <a:bodyPr xmlns:a="http://schemas.openxmlformats.org/drawingml/2006/main" anchor="t">
+          <a:prstGeom prst="rect">
+            <a:avLst/>
+          </a:prstGeom>
+          <a:noFill/>
+          <a:ln w="0">
+            <a:noFill/>
+            <a:prstDash val="solid"/>
+          </a:ln>
+        </p:spPr>
+        <p:txBody>
+          <a:bodyPr anchor="t">
             <a:normAutofit fontScale="86111"/>
           </a:bodyPr>
-          <a:lstStyle xmlns:a="http://schemas.openxmlformats.org/drawingml/2006/main"/>
-          <a:p xmlns:a="http://schemas.openxmlformats.org/drawingml/2006/main">
+          <a:lstStyle/>
+          <a:p>
             <a:pPr algn="l">
               <a:defRPr sz="900" b="0">
                 <a:solidFill>
@@ -5758,38 +5501,38 @@
       </p:sp>
       <p:sp>
         <p:nvSpPr>
-          <p:cNvPr id="35" name="">
-            <a:extLst xmlns:a="http://schemas.openxmlformats.org/drawingml/2006/main">
+          <p:cNvPr id="35" name="Rectangle 34">
+            <a:extLst>
               <a:ext uri="{FF2B5EF4-FFF2-40B4-BE49-F238E27FC236}">
                 <a16:creationId xmlns:a16="http://schemas.microsoft.com/office/drawing/2014/main" id="{1480C231-795C-4A68-85E5-B8AB8E8895A1}"/>
               </a:ext>
             </a:extLst>
           </p:cNvPr>
           <p:cNvSpPr>
-            <a:spLocks xmlns:a="http://schemas.openxmlformats.org/drawingml/2006/main" noGrp="1"/>
-          </p:cNvSpPr>
-          <p:nvPr/>
-        </p:nvSpPr>
-        <p:spPr>
-          <a:xfrm xmlns:a="http://schemas.openxmlformats.org/drawingml/2006/main">
+            <a:spLocks noGrp="1"/>
+          </p:cNvSpPr>
+          <p:nvPr/>
+        </p:nvSpPr>
+        <p:spPr>
+          <a:xfrm>
             <a:off x="11239500" y="6419850"/>
             <a:ext cx="523875" cy="209550"/>
           </a:xfrm>
-          <a:prstGeom xmlns:a="http://schemas.openxmlformats.org/drawingml/2006/main" prst="rect">
-            <a:avLst/>
-          </a:prstGeom>
-          <a:noFill xmlns:a="http://schemas.openxmlformats.org/drawingml/2006/main"/>
-          <a:ln xmlns:a="http://schemas.openxmlformats.org/drawingml/2006/main" w="0">
-            <a:noFill/>
-            <a:prstDash val="solid"/>
-          </a:ln>
-        </p:spPr>
-        <p:txBody>
-          <a:bodyPr xmlns:a="http://schemas.openxmlformats.org/drawingml/2006/main" anchor="t">
+          <a:prstGeom prst="rect">
+            <a:avLst/>
+          </a:prstGeom>
+          <a:noFill/>
+          <a:ln w="0">
+            <a:noFill/>
+            <a:prstDash val="solid"/>
+          </a:ln>
+        </p:spPr>
+        <p:txBody>
+          <a:bodyPr anchor="t">
             <a:normAutofit fontScale="86111"/>
           </a:bodyPr>
-          <a:lstStyle xmlns:a="http://schemas.openxmlformats.org/drawingml/2006/main"/>
-          <a:p xmlns:a="http://schemas.openxmlformats.org/drawingml/2006/main">
+          <a:lstStyle/>
+          <a:p>
             <a:pPr algn="r">
               <a:defRPr sz="900" b="0">
                 <a:solidFill>
@@ -5821,17 +5564,21 @@
       </p:ext>
     </p:extLst>
   </p:cSld>
+  <p:clrMapOvr>
+    <a:masterClrMapping/>
+  </p:clrMapOvr>
 </p:sld>
 </file>
 
 <file path=ppt/slides/slide6.xml><?xml version="1.0" encoding="utf-8"?>
-<p:sld xmlns:p="http://schemas.openxmlformats.org/presentationml/2006/main">
+<p:sld xmlns:a="http://schemas.openxmlformats.org/drawingml/2006/main" xmlns:r="http://schemas.openxmlformats.org/officeDocument/2006/relationships" xmlns:p="http://schemas.openxmlformats.org/presentationml/2006/main">
   <p:cSld>
     <p:bg>
       <p:bgPr>
-        <a:solidFill xmlns:a="http://schemas.openxmlformats.org/drawingml/2006/main">
+        <a:solidFill>
           <a:srgbClr val="FFFFFF"/>
         </a:solidFill>
+        <a:effectLst/>
       </p:bgPr>
     </p:bg>
     <p:spTree>
@@ -5841,42 +5588,47 @@
         <p:nvPr/>
       </p:nvGrpSpPr>
       <p:grpSpPr>
-        <a:xfrm xmlns:a="http://schemas.openxmlformats.org/drawingml/2006/main"/>
+        <a:xfrm>
+          <a:off x="0" y="0"/>
+          <a:ext cx="0" cy="0"/>
+          <a:chOff x="0" y="0"/>
+          <a:chExt cx="0" cy="0"/>
+        </a:xfrm>
       </p:grpSpPr>
       <p:sp>
         <p:nvSpPr>
-          <p:cNvPr id="16" name="">
-            <a:extLst xmlns:a="http://schemas.openxmlformats.org/drawingml/2006/main">
+          <p:cNvPr id="16" name="Rectangle 15">
+            <a:extLst>
               <a:ext uri="{FF2B5EF4-FFF2-40B4-BE49-F238E27FC236}">
                 <a16:creationId xmlns:a16="http://schemas.microsoft.com/office/drawing/2014/main" id="{11FB1C39-F941-4393-83AD-0AD2BDCB8FDA}"/>
               </a:ext>
             </a:extLst>
           </p:cNvPr>
           <p:cNvSpPr>
-            <a:spLocks xmlns:a="http://schemas.openxmlformats.org/drawingml/2006/main" noGrp="1"/>
-          </p:cNvSpPr>
-          <p:nvPr/>
-        </p:nvSpPr>
-        <p:spPr>
-          <a:xfrm xmlns:a="http://schemas.openxmlformats.org/drawingml/2006/main">
+            <a:spLocks noGrp="1"/>
+          </p:cNvSpPr>
+          <p:nvPr/>
+        </p:nvSpPr>
+        <p:spPr>
+          <a:xfrm>
             <a:off x="419100" y="361950"/>
             <a:ext cx="10477500" cy="723900"/>
           </a:xfrm>
-          <a:prstGeom xmlns:a="http://schemas.openxmlformats.org/drawingml/2006/main" prst="rect">
-            <a:avLst/>
-          </a:prstGeom>
-          <a:noFill xmlns:a="http://schemas.openxmlformats.org/drawingml/2006/main"/>
-          <a:ln xmlns:a="http://schemas.openxmlformats.org/drawingml/2006/main" w="0">
-            <a:noFill/>
-            <a:prstDash val="solid"/>
-          </a:ln>
-        </p:spPr>
-        <p:txBody>
-          <a:bodyPr xmlns:a="http://schemas.openxmlformats.org/drawingml/2006/main" anchor="t">
-            <a:normAutofit fontScale="100000"/>
+          <a:prstGeom prst="rect">
+            <a:avLst/>
+          </a:prstGeom>
+          <a:noFill/>
+          <a:ln w="0">
+            <a:noFill/>
+            <a:prstDash val="solid"/>
+          </a:ln>
+        </p:spPr>
+        <p:txBody>
+          <a:bodyPr anchor="t">
+            <a:normAutofit/>
           </a:bodyPr>
-          <a:lstStyle xmlns:a="http://schemas.openxmlformats.org/drawingml/2006/main"/>
-          <a:p xmlns:a="http://schemas.openxmlformats.org/drawingml/2006/main">
+          <a:lstStyle/>
+          <a:p>
             <a:pPr algn="l">
               <a:defRPr sz="3000" b="1">
                 <a:solidFill>
@@ -5903,71 +5655,71 @@
       </p:sp>
       <p:sp>
         <p:nvSpPr>
-          <p:cNvPr id="2" name="">
-            <a:extLst xmlns:a="http://schemas.openxmlformats.org/drawingml/2006/main">
+          <p:cNvPr id="2" name="Rounded Rectangle 1">
+            <a:extLst>
               <a:ext uri="{FF2B5EF4-FFF2-40B4-BE49-F238E27FC236}">
                 <a16:creationId xmlns:a16="http://schemas.microsoft.com/office/drawing/2014/main" id="{C5B78A1C-0677-4F44-BFB3-AFD5AFF16C1D}"/>
               </a:ext>
             </a:extLst>
           </p:cNvPr>
           <p:cNvSpPr>
-            <a:spLocks xmlns:a="http://schemas.openxmlformats.org/drawingml/2006/main" noGrp="1"/>
-          </p:cNvSpPr>
-          <p:nvPr/>
-        </p:nvSpPr>
-        <p:spPr>
-          <a:xfrm xmlns:a="http://schemas.openxmlformats.org/drawingml/2006/main">
+            <a:spLocks noGrp="1"/>
+          </p:cNvSpPr>
+          <p:nvPr/>
+        </p:nvSpPr>
+        <p:spPr>
+          <a:xfrm>
             <a:off x="419100" y="1657350"/>
             <a:ext cx="552450" cy="552450"/>
           </a:xfrm>
-          <a:prstGeom xmlns:a="http://schemas.openxmlformats.org/drawingml/2006/main" prst="roundRect">
+          <a:prstGeom prst="roundRect">
             <a:avLst>
               <a:gd name="adj" fmla="val 20690"/>
             </a:avLst>
           </a:prstGeom>
-          <a:solidFill xmlns:a="http://schemas.openxmlformats.org/drawingml/2006/main">
+          <a:solidFill>
             <a:srgbClr val="3D8DFF"/>
           </a:solidFill>
-          <a:ln xmlns:a="http://schemas.openxmlformats.org/drawingml/2006/main" w="0">
-            <a:noFill/>
-            <a:prstDash val="solid"/>
-          </a:ln>
-        </p:spPr>
-      </p:sp>
-      <p:sp>
-        <p:nvSpPr>
-          <p:cNvPr id="3" name="">
-            <a:extLst xmlns:a="http://schemas.openxmlformats.org/drawingml/2006/main">
+          <a:ln w="0">
+            <a:noFill/>
+            <a:prstDash val="solid"/>
+          </a:ln>
+        </p:spPr>
+      </p:sp>
+      <p:sp>
+        <p:nvSpPr>
+          <p:cNvPr id="3" name="Rectangle 2">
+            <a:extLst>
               <a:ext uri="{FF2B5EF4-FFF2-40B4-BE49-F238E27FC236}">
                 <a16:creationId xmlns:a16="http://schemas.microsoft.com/office/drawing/2014/main" id="{388F79F2-E0AC-4FD2-A60B-142E0964B6D3}"/>
               </a:ext>
             </a:extLst>
           </p:cNvPr>
           <p:cNvSpPr>
-            <a:spLocks xmlns:a="http://schemas.openxmlformats.org/drawingml/2006/main" noGrp="1"/>
-          </p:cNvSpPr>
-          <p:nvPr/>
-        </p:nvSpPr>
-        <p:spPr>
-          <a:xfrm xmlns:a="http://schemas.openxmlformats.org/drawingml/2006/main">
+            <a:spLocks noGrp="1"/>
+          </p:cNvSpPr>
+          <p:nvPr/>
+        </p:nvSpPr>
+        <p:spPr>
+          <a:xfrm>
             <a:off x="419100" y="1752600"/>
             <a:ext cx="552450" cy="381000"/>
           </a:xfrm>
-          <a:prstGeom xmlns:a="http://schemas.openxmlformats.org/drawingml/2006/main" prst="rect">
-            <a:avLst/>
-          </a:prstGeom>
-          <a:noFill xmlns:a="http://schemas.openxmlformats.org/drawingml/2006/main"/>
-          <a:ln xmlns:a="http://schemas.openxmlformats.org/drawingml/2006/main" w="0">
-            <a:noFill/>
-            <a:prstDash val="solid"/>
-          </a:ln>
-        </p:spPr>
-        <p:txBody>
-          <a:bodyPr xmlns:a="http://schemas.openxmlformats.org/drawingml/2006/main" anchor="ctr">
-            <a:normAutofit fontScale="100000"/>
+          <a:prstGeom prst="rect">
+            <a:avLst/>
+          </a:prstGeom>
+          <a:noFill/>
+          <a:ln w="0">
+            <a:noFill/>
+            <a:prstDash val="solid"/>
+          </a:ln>
+        </p:spPr>
+        <p:txBody>
+          <a:bodyPr anchor="ctr">
+            <a:normAutofit/>
           </a:bodyPr>
-          <a:lstStyle xmlns:a="http://schemas.openxmlformats.org/drawingml/2006/main"/>
-          <a:p xmlns:a="http://schemas.openxmlformats.org/drawingml/2006/main">
+          <a:lstStyle/>
+          <a:p>
             <a:pPr algn="ctr">
               <a:defRPr sz="1650" b="1">
                 <a:solidFill>
@@ -5994,38 +5746,38 @@
       </p:sp>
       <p:sp>
         <p:nvSpPr>
-          <p:cNvPr id="4" name="">
-            <a:extLst xmlns:a="http://schemas.openxmlformats.org/drawingml/2006/main">
+          <p:cNvPr id="4" name="Rectangle 3">
+            <a:extLst>
               <a:ext uri="{FF2B5EF4-FFF2-40B4-BE49-F238E27FC236}">
                 <a16:creationId xmlns:a16="http://schemas.microsoft.com/office/drawing/2014/main" id="{3ED1F6AA-09B4-4C41-9FE5-F414016CEE36}"/>
               </a:ext>
             </a:extLst>
           </p:cNvPr>
           <p:cNvSpPr>
-            <a:spLocks xmlns:a="http://schemas.openxmlformats.org/drawingml/2006/main" noGrp="1"/>
-          </p:cNvSpPr>
-          <p:nvPr/>
-        </p:nvSpPr>
-        <p:spPr>
-          <a:xfrm xmlns:a="http://schemas.openxmlformats.org/drawingml/2006/main">
+            <a:spLocks noGrp="1"/>
+          </p:cNvSpPr>
+          <p:nvPr/>
+        </p:nvSpPr>
+        <p:spPr>
+          <a:xfrm>
             <a:off x="1257300" y="1733550"/>
             <a:ext cx="5905500" cy="476250"/>
           </a:xfrm>
-          <a:prstGeom xmlns:a="http://schemas.openxmlformats.org/drawingml/2006/main" prst="rect">
-            <a:avLst/>
-          </a:prstGeom>
-          <a:noFill xmlns:a="http://schemas.openxmlformats.org/drawingml/2006/main"/>
-          <a:ln xmlns:a="http://schemas.openxmlformats.org/drawingml/2006/main" w="0">
-            <a:noFill/>
-            <a:prstDash val="solid"/>
-          </a:ln>
-        </p:spPr>
-        <p:txBody>
-          <a:bodyPr xmlns:a="http://schemas.openxmlformats.org/drawingml/2006/main" anchor="ctr">
-            <a:normAutofit fontScale="100000"/>
+          <a:prstGeom prst="rect">
+            <a:avLst/>
+          </a:prstGeom>
+          <a:noFill/>
+          <a:ln w="0">
+            <a:noFill/>
+            <a:prstDash val="solid"/>
+          </a:ln>
+        </p:spPr>
+        <p:txBody>
+          <a:bodyPr anchor="ctr">
+            <a:normAutofit/>
           </a:bodyPr>
-          <a:lstStyle xmlns:a="http://schemas.openxmlformats.org/drawingml/2006/main"/>
-          <a:p xmlns:a="http://schemas.openxmlformats.org/drawingml/2006/main">
+          <a:lstStyle/>
+          <a:p>
             <a:pPr algn="l">
               <a:defRPr sz="1950" b="1">
                 <a:solidFill>
@@ -6052,71 +5804,71 @@
       </p:sp>
       <p:sp>
         <p:nvSpPr>
-          <p:cNvPr id="5" name="">
-            <a:extLst xmlns:a="http://schemas.openxmlformats.org/drawingml/2006/main">
+          <p:cNvPr id="5" name="Rounded Rectangle 4">
+            <a:extLst>
               <a:ext uri="{FF2B5EF4-FFF2-40B4-BE49-F238E27FC236}">
                 <a16:creationId xmlns:a16="http://schemas.microsoft.com/office/drawing/2014/main" id="{5A5615F2-6379-4BA7-9CDB-C215EB58B71F}"/>
               </a:ext>
             </a:extLst>
           </p:cNvPr>
           <p:cNvSpPr>
-            <a:spLocks xmlns:a="http://schemas.openxmlformats.org/drawingml/2006/main" noGrp="1"/>
-          </p:cNvSpPr>
-          <p:nvPr/>
-        </p:nvSpPr>
-        <p:spPr>
-          <a:xfrm xmlns:a="http://schemas.openxmlformats.org/drawingml/2006/main">
+            <a:spLocks noGrp="1"/>
+          </p:cNvSpPr>
+          <p:nvPr/>
+        </p:nvSpPr>
+        <p:spPr>
+          <a:xfrm>
             <a:off x="419100" y="2724150"/>
             <a:ext cx="552450" cy="552450"/>
           </a:xfrm>
-          <a:prstGeom xmlns:a="http://schemas.openxmlformats.org/drawingml/2006/main" prst="roundRect">
+          <a:prstGeom prst="roundRect">
             <a:avLst>
               <a:gd name="adj" fmla="val 20690"/>
             </a:avLst>
           </a:prstGeom>
-          <a:solidFill xmlns:a="http://schemas.openxmlformats.org/drawingml/2006/main">
+          <a:solidFill>
             <a:srgbClr val="3D8DFF"/>
           </a:solidFill>
-          <a:ln xmlns:a="http://schemas.openxmlformats.org/drawingml/2006/main" w="0">
-            <a:noFill/>
-            <a:prstDash val="solid"/>
-          </a:ln>
-        </p:spPr>
-      </p:sp>
-      <p:sp>
-        <p:nvSpPr>
-          <p:cNvPr id="6" name="">
-            <a:extLst xmlns:a="http://schemas.openxmlformats.org/drawingml/2006/main">
+          <a:ln w="0">
+            <a:noFill/>
+            <a:prstDash val="solid"/>
+          </a:ln>
+        </p:spPr>
+      </p:sp>
+      <p:sp>
+        <p:nvSpPr>
+          <p:cNvPr id="6" name="Rectangle 5">
+            <a:extLst>
               <a:ext uri="{FF2B5EF4-FFF2-40B4-BE49-F238E27FC236}">
                 <a16:creationId xmlns:a16="http://schemas.microsoft.com/office/drawing/2014/main" id="{F3B80713-AEBE-48D3-9E90-3983BD590784}"/>
               </a:ext>
             </a:extLst>
           </p:cNvPr>
           <p:cNvSpPr>
-            <a:spLocks xmlns:a="http://schemas.openxmlformats.org/drawingml/2006/main" noGrp="1"/>
-          </p:cNvSpPr>
-          <p:nvPr/>
-        </p:nvSpPr>
-        <p:spPr>
-          <a:xfrm xmlns:a="http://schemas.openxmlformats.org/drawingml/2006/main">
+            <a:spLocks noGrp="1"/>
+          </p:cNvSpPr>
+          <p:nvPr/>
+        </p:nvSpPr>
+        <p:spPr>
+          <a:xfrm>
             <a:off x="419100" y="2819400"/>
             <a:ext cx="552450" cy="381000"/>
           </a:xfrm>
-          <a:prstGeom xmlns:a="http://schemas.openxmlformats.org/drawingml/2006/main" prst="rect">
-            <a:avLst/>
-          </a:prstGeom>
-          <a:noFill xmlns:a="http://schemas.openxmlformats.org/drawingml/2006/main"/>
-          <a:ln xmlns:a="http://schemas.openxmlformats.org/drawingml/2006/main" w="0">
-            <a:noFill/>
-            <a:prstDash val="solid"/>
-          </a:ln>
-        </p:spPr>
-        <p:txBody>
-          <a:bodyPr xmlns:a="http://schemas.openxmlformats.org/drawingml/2006/main" anchor="ctr">
-            <a:normAutofit fontScale="100000"/>
+          <a:prstGeom prst="rect">
+            <a:avLst/>
+          </a:prstGeom>
+          <a:noFill/>
+          <a:ln w="0">
+            <a:noFill/>
+            <a:prstDash val="solid"/>
+          </a:ln>
+        </p:spPr>
+        <p:txBody>
+          <a:bodyPr anchor="ctr">
+            <a:normAutofit/>
           </a:bodyPr>
-          <a:lstStyle xmlns:a="http://schemas.openxmlformats.org/drawingml/2006/main"/>
-          <a:p xmlns:a="http://schemas.openxmlformats.org/drawingml/2006/main">
+          <a:lstStyle/>
+          <a:p>
             <a:pPr algn="ctr">
               <a:defRPr sz="1650" b="1">
                 <a:solidFill>
@@ -6143,38 +5895,38 @@
       </p:sp>
       <p:sp>
         <p:nvSpPr>
-          <p:cNvPr id="7" name="">
-            <a:extLst xmlns:a="http://schemas.openxmlformats.org/drawingml/2006/main">
+          <p:cNvPr id="7" name="Rectangle 6">
+            <a:extLst>
               <a:ext uri="{FF2B5EF4-FFF2-40B4-BE49-F238E27FC236}">
                 <a16:creationId xmlns:a16="http://schemas.microsoft.com/office/drawing/2014/main" id="{C35275D7-8AFA-486D-A105-164647ADD4C1}"/>
               </a:ext>
             </a:extLst>
           </p:cNvPr>
           <p:cNvSpPr>
-            <a:spLocks xmlns:a="http://schemas.openxmlformats.org/drawingml/2006/main" noGrp="1"/>
-          </p:cNvSpPr>
-          <p:nvPr/>
-        </p:nvSpPr>
-        <p:spPr>
-          <a:xfrm xmlns:a="http://schemas.openxmlformats.org/drawingml/2006/main">
+            <a:spLocks noGrp="1"/>
+          </p:cNvSpPr>
+          <p:nvPr/>
+        </p:nvSpPr>
+        <p:spPr>
+          <a:xfrm>
             <a:off x="1257300" y="2800350"/>
             <a:ext cx="5905500" cy="476250"/>
           </a:xfrm>
-          <a:prstGeom xmlns:a="http://schemas.openxmlformats.org/drawingml/2006/main" prst="rect">
-            <a:avLst/>
-          </a:prstGeom>
-          <a:noFill xmlns:a="http://schemas.openxmlformats.org/drawingml/2006/main"/>
-          <a:ln xmlns:a="http://schemas.openxmlformats.org/drawingml/2006/main" w="0">
-            <a:noFill/>
-            <a:prstDash val="solid"/>
-          </a:ln>
-        </p:spPr>
-        <p:txBody>
-          <a:bodyPr xmlns:a="http://schemas.openxmlformats.org/drawingml/2006/main" anchor="ctr">
-            <a:normAutofit fontScale="100000"/>
+          <a:prstGeom prst="rect">
+            <a:avLst/>
+          </a:prstGeom>
+          <a:noFill/>
+          <a:ln w="0">
+            <a:noFill/>
+            <a:prstDash val="solid"/>
+          </a:ln>
+        </p:spPr>
+        <p:txBody>
+          <a:bodyPr anchor="ctr">
+            <a:normAutofit/>
           </a:bodyPr>
-          <a:lstStyle xmlns:a="http://schemas.openxmlformats.org/drawingml/2006/main"/>
-          <a:p xmlns:a="http://schemas.openxmlformats.org/drawingml/2006/main">
+          <a:lstStyle/>
+          <a:p>
             <a:pPr algn="l">
               <a:defRPr sz="1950" b="1">
                 <a:solidFill>
@@ -6201,71 +5953,71 @@
       </p:sp>
       <p:sp>
         <p:nvSpPr>
-          <p:cNvPr id="8" name="">
-            <a:extLst xmlns:a="http://schemas.openxmlformats.org/drawingml/2006/main">
+          <p:cNvPr id="8" name="Rounded Rectangle 7">
+            <a:extLst>
               <a:ext uri="{FF2B5EF4-FFF2-40B4-BE49-F238E27FC236}">
                 <a16:creationId xmlns:a16="http://schemas.microsoft.com/office/drawing/2014/main" id="{845C1D08-4B62-4E4D-96BF-44F6ADC38D3B}"/>
               </a:ext>
             </a:extLst>
           </p:cNvPr>
           <p:cNvSpPr>
-            <a:spLocks xmlns:a="http://schemas.openxmlformats.org/drawingml/2006/main" noGrp="1"/>
-          </p:cNvSpPr>
-          <p:nvPr/>
-        </p:nvSpPr>
-        <p:spPr>
-          <a:xfrm xmlns:a="http://schemas.openxmlformats.org/drawingml/2006/main">
+            <a:spLocks noGrp="1"/>
+          </p:cNvSpPr>
+          <p:nvPr/>
+        </p:nvSpPr>
+        <p:spPr>
+          <a:xfrm>
             <a:off x="419100" y="3790950"/>
             <a:ext cx="552450" cy="552450"/>
           </a:xfrm>
-          <a:prstGeom xmlns:a="http://schemas.openxmlformats.org/drawingml/2006/main" prst="roundRect">
+          <a:prstGeom prst="roundRect">
             <a:avLst>
               <a:gd name="adj" fmla="val 20690"/>
             </a:avLst>
           </a:prstGeom>
-          <a:solidFill xmlns:a="http://schemas.openxmlformats.org/drawingml/2006/main">
+          <a:solidFill>
             <a:srgbClr val="3D8DFF"/>
           </a:solidFill>
-          <a:ln xmlns:a="http://schemas.openxmlformats.org/drawingml/2006/main" w="0">
-            <a:noFill/>
-            <a:prstDash val="solid"/>
-          </a:ln>
-        </p:spPr>
-      </p:sp>
-      <p:sp>
-        <p:nvSpPr>
-          <p:cNvPr id="9" name="">
-            <a:extLst xmlns:a="http://schemas.openxmlformats.org/drawingml/2006/main">
+          <a:ln w="0">
+            <a:noFill/>
+            <a:prstDash val="solid"/>
+          </a:ln>
+        </p:spPr>
+      </p:sp>
+      <p:sp>
+        <p:nvSpPr>
+          <p:cNvPr id="9" name="Rectangle 8">
+            <a:extLst>
               <a:ext uri="{FF2B5EF4-FFF2-40B4-BE49-F238E27FC236}">
                 <a16:creationId xmlns:a16="http://schemas.microsoft.com/office/drawing/2014/main" id="{EAF0AE34-AD33-4D49-AFA1-BF6976D89D10}"/>
               </a:ext>
             </a:extLst>
           </p:cNvPr>
           <p:cNvSpPr>
-            <a:spLocks xmlns:a="http://schemas.openxmlformats.org/drawingml/2006/main" noGrp="1"/>
-          </p:cNvSpPr>
-          <p:nvPr/>
-        </p:nvSpPr>
-        <p:spPr>
-          <a:xfrm xmlns:a="http://schemas.openxmlformats.org/drawingml/2006/main">
+            <a:spLocks noGrp="1"/>
+          </p:cNvSpPr>
+          <p:nvPr/>
+        </p:nvSpPr>
+        <p:spPr>
+          <a:xfrm>
             <a:off x="419100" y="3886200"/>
             <a:ext cx="552450" cy="381000"/>
           </a:xfrm>
-          <a:prstGeom xmlns:a="http://schemas.openxmlformats.org/drawingml/2006/main" prst="rect">
-            <a:avLst/>
-          </a:prstGeom>
-          <a:noFill xmlns:a="http://schemas.openxmlformats.org/drawingml/2006/main"/>
-          <a:ln xmlns:a="http://schemas.openxmlformats.org/drawingml/2006/main" w="0">
-            <a:noFill/>
-            <a:prstDash val="solid"/>
-          </a:ln>
-        </p:spPr>
-        <p:txBody>
-          <a:bodyPr xmlns:a="http://schemas.openxmlformats.org/drawingml/2006/main" anchor="ctr">
-            <a:normAutofit fontScale="100000"/>
+          <a:prstGeom prst="rect">
+            <a:avLst/>
+          </a:prstGeom>
+          <a:noFill/>
+          <a:ln w="0">
+            <a:noFill/>
+            <a:prstDash val="solid"/>
+          </a:ln>
+        </p:spPr>
+        <p:txBody>
+          <a:bodyPr anchor="ctr">
+            <a:normAutofit/>
           </a:bodyPr>
-          <a:lstStyle xmlns:a="http://schemas.openxmlformats.org/drawingml/2006/main"/>
-          <a:p xmlns:a="http://schemas.openxmlformats.org/drawingml/2006/main">
+          <a:lstStyle/>
+          <a:p>
             <a:pPr algn="ctr">
               <a:defRPr sz="1650" b="1">
                 <a:solidFill>
@@ -6292,38 +6044,38 @@
       </p:sp>
       <p:sp>
         <p:nvSpPr>
-          <p:cNvPr id="10" name="">
-            <a:extLst xmlns:a="http://schemas.openxmlformats.org/drawingml/2006/main">
+          <p:cNvPr id="10" name="Rectangle 9">
+            <a:extLst>
               <a:ext uri="{FF2B5EF4-FFF2-40B4-BE49-F238E27FC236}">
                 <a16:creationId xmlns:a16="http://schemas.microsoft.com/office/drawing/2014/main" id="{29E9CA29-864F-4496-BA1A-04B816C3C39D}"/>
               </a:ext>
             </a:extLst>
           </p:cNvPr>
           <p:cNvSpPr>
-            <a:spLocks xmlns:a="http://schemas.openxmlformats.org/drawingml/2006/main" noGrp="1"/>
-          </p:cNvSpPr>
-          <p:nvPr/>
-        </p:nvSpPr>
-        <p:spPr>
-          <a:xfrm xmlns:a="http://schemas.openxmlformats.org/drawingml/2006/main">
+            <a:spLocks noGrp="1"/>
+          </p:cNvSpPr>
+          <p:nvPr/>
+        </p:nvSpPr>
+        <p:spPr>
+          <a:xfrm>
             <a:off x="1257300" y="3867150"/>
             <a:ext cx="5905500" cy="476250"/>
           </a:xfrm>
-          <a:prstGeom xmlns:a="http://schemas.openxmlformats.org/drawingml/2006/main" prst="rect">
-            <a:avLst/>
-          </a:prstGeom>
-          <a:noFill xmlns:a="http://schemas.openxmlformats.org/drawingml/2006/main"/>
-          <a:ln xmlns:a="http://schemas.openxmlformats.org/drawingml/2006/main" w="0">
-            <a:noFill/>
-            <a:prstDash val="solid"/>
-          </a:ln>
-        </p:spPr>
-        <p:txBody>
-          <a:bodyPr xmlns:a="http://schemas.openxmlformats.org/drawingml/2006/main" anchor="ctr">
-            <a:normAutofit fontScale="100000"/>
+          <a:prstGeom prst="rect">
+            <a:avLst/>
+          </a:prstGeom>
+          <a:noFill/>
+          <a:ln w="0">
+            <a:noFill/>
+            <a:prstDash val="solid"/>
+          </a:ln>
+        </p:spPr>
+        <p:txBody>
+          <a:bodyPr anchor="ctr">
+            <a:normAutofit/>
           </a:bodyPr>
-          <a:lstStyle xmlns:a="http://schemas.openxmlformats.org/drawingml/2006/main"/>
-          <a:p xmlns:a="http://schemas.openxmlformats.org/drawingml/2006/main">
+          <a:lstStyle/>
+          <a:p>
             <a:pPr algn="l">
               <a:defRPr sz="1950" b="1">
                 <a:solidFill>
@@ -6350,69 +6102,69 @@
       </p:sp>
       <p:sp>
         <p:nvSpPr>
-          <p:cNvPr id="11" name="">
-            <a:extLst xmlns:a="http://schemas.openxmlformats.org/drawingml/2006/main">
+          <p:cNvPr id="11" name="Rectangle 10">
+            <a:extLst>
               <a:ext uri="{FF2B5EF4-FFF2-40B4-BE49-F238E27FC236}">
                 <a16:creationId xmlns:a16="http://schemas.microsoft.com/office/drawing/2014/main" id="{0E4AFD44-3485-4C88-8DA7-915D5516FB74}"/>
               </a:ext>
             </a:extLst>
           </p:cNvPr>
           <p:cNvSpPr>
-            <a:spLocks xmlns:a="http://schemas.openxmlformats.org/drawingml/2006/main" noGrp="1"/>
-          </p:cNvSpPr>
-          <p:nvPr/>
-        </p:nvSpPr>
-        <p:spPr>
-          <a:xfrm xmlns:a="http://schemas.openxmlformats.org/drawingml/2006/main">
+            <a:spLocks noGrp="1"/>
+          </p:cNvSpPr>
+          <p:nvPr/>
+        </p:nvSpPr>
+        <p:spPr>
+          <a:xfrm>
             <a:off x="7943850" y="1657350"/>
             <a:ext cx="3829050" cy="3124200"/>
           </a:xfrm>
-          <a:prstGeom xmlns:a="http://schemas.openxmlformats.org/drawingml/2006/main" prst="rect">
-            <a:avLst/>
-          </a:prstGeom>
-          <a:solidFill xmlns:a="http://schemas.openxmlformats.org/drawingml/2006/main">
+          <a:prstGeom prst="rect">
+            <a:avLst/>
+          </a:prstGeom>
+          <a:solidFill>
             <a:srgbClr val="EDEDED"/>
           </a:solidFill>
-          <a:ln xmlns:a="http://schemas.openxmlformats.org/drawingml/2006/main" w="0">
-            <a:noFill/>
-            <a:prstDash val="solid"/>
-          </a:ln>
-        </p:spPr>
-      </p:sp>
-      <p:sp>
-        <p:nvSpPr>
-          <p:cNvPr id="12" name="">
-            <a:extLst xmlns:a="http://schemas.openxmlformats.org/drawingml/2006/main">
+          <a:ln w="0">
+            <a:noFill/>
+            <a:prstDash val="solid"/>
+          </a:ln>
+        </p:spPr>
+      </p:sp>
+      <p:sp>
+        <p:nvSpPr>
+          <p:cNvPr id="12" name="Rectangle 11">
+            <a:extLst>
               <a:ext uri="{FF2B5EF4-FFF2-40B4-BE49-F238E27FC236}">
                 <a16:creationId xmlns:a16="http://schemas.microsoft.com/office/drawing/2014/main" id="{47087461-DE5C-4AEE-8E3B-CE8D8CB145E7}"/>
               </a:ext>
             </a:extLst>
           </p:cNvPr>
           <p:cNvSpPr>
-            <a:spLocks xmlns:a="http://schemas.openxmlformats.org/drawingml/2006/main" noGrp="1"/>
-          </p:cNvSpPr>
-          <p:nvPr/>
-        </p:nvSpPr>
-        <p:spPr>
-          <a:xfrm xmlns:a="http://schemas.openxmlformats.org/drawingml/2006/main">
+            <a:spLocks noGrp="1"/>
+          </p:cNvSpPr>
+          <p:nvPr/>
+        </p:nvSpPr>
+        <p:spPr>
+          <a:xfrm>
             <a:off x="8343900" y="2457450"/>
             <a:ext cx="3048000" cy="666750"/>
           </a:xfrm>
-          <a:prstGeom xmlns:a="http://schemas.openxmlformats.org/drawingml/2006/main" prst="rect">
-            <a:avLst/>
-          </a:prstGeom>
-          <a:noFill xmlns:a="http://schemas.openxmlformats.org/drawingml/2006/main"/>
-          <a:ln xmlns:a="http://schemas.openxmlformats.org/drawingml/2006/main" w="0">
-            <a:noFill/>
-            <a:prstDash val="solid"/>
-          </a:ln>
-        </p:spPr>
-        <p:txBody>
-          <a:bodyPr xmlns:a="http://schemas.openxmlformats.org/drawingml/2006/main" anchor="t">
-            <a:normAutofit fontScale="100000"/>
+          <a:prstGeom prst="rect">
+            <a:avLst/>
+          </a:prstGeom>
+          <a:noFill/>
+          <a:ln w="0">
+            <a:noFill/>
+            <a:prstDash val="solid"/>
+          </a:ln>
+        </p:spPr>
+        <p:txBody>
+          <a:bodyPr anchor="t">
+            <a:normAutofit/>
           </a:bodyPr>
-          <a:lstStyle xmlns:a="http://schemas.openxmlformats.org/drawingml/2006/main"/>
-          <a:p xmlns:a="http://schemas.openxmlformats.org/drawingml/2006/main">
+          <a:lstStyle/>
+          <a:p>
             <a:pPr algn="l">
               <a:defRPr sz="3450" b="1">
                 <a:solidFill>
@@ -6439,38 +6191,38 @@
       </p:sp>
       <p:sp>
         <p:nvSpPr>
-          <p:cNvPr id="13" name="">
-            <a:extLst xmlns:a="http://schemas.openxmlformats.org/drawingml/2006/main">
+          <p:cNvPr id="13" name="Rectangle 12">
+            <a:extLst>
               <a:ext uri="{FF2B5EF4-FFF2-40B4-BE49-F238E27FC236}">
                 <a16:creationId xmlns:a16="http://schemas.microsoft.com/office/drawing/2014/main" id="{B71DFC34-1FEE-407C-B9F4-FF43D943A759}"/>
               </a:ext>
             </a:extLst>
           </p:cNvPr>
           <p:cNvSpPr>
-            <a:spLocks xmlns:a="http://schemas.openxmlformats.org/drawingml/2006/main" noGrp="1"/>
-          </p:cNvSpPr>
-          <p:nvPr/>
-        </p:nvSpPr>
-        <p:spPr>
-          <a:xfrm xmlns:a="http://schemas.openxmlformats.org/drawingml/2006/main">
+            <a:spLocks noGrp="1"/>
+          </p:cNvSpPr>
+          <p:nvPr/>
+        </p:nvSpPr>
+        <p:spPr>
+          <a:xfrm>
             <a:off x="8343900" y="3352800"/>
             <a:ext cx="2857500" cy="571500"/>
           </a:xfrm>
-          <a:prstGeom xmlns:a="http://schemas.openxmlformats.org/drawingml/2006/main" prst="rect">
-            <a:avLst/>
-          </a:prstGeom>
-          <a:noFill xmlns:a="http://schemas.openxmlformats.org/drawingml/2006/main"/>
-          <a:ln xmlns:a="http://schemas.openxmlformats.org/drawingml/2006/main" w="0">
-            <a:noFill/>
-            <a:prstDash val="solid"/>
-          </a:ln>
-        </p:spPr>
-        <p:txBody>
-          <a:bodyPr xmlns:a="http://schemas.openxmlformats.org/drawingml/2006/main" anchor="t">
-            <a:normAutofit fontScale="100000"/>
+          <a:prstGeom prst="rect">
+            <a:avLst/>
+          </a:prstGeom>
+          <a:noFill/>
+          <a:ln w="0">
+            <a:noFill/>
+            <a:prstDash val="solid"/>
+          </a:ln>
+        </p:spPr>
+        <p:txBody>
+          <a:bodyPr anchor="t">
+            <a:normAutofit/>
           </a:bodyPr>
-          <a:lstStyle xmlns:a="http://schemas.openxmlformats.org/drawingml/2006/main"/>
-          <a:p xmlns:a="http://schemas.openxmlformats.org/drawingml/2006/main">
+          <a:lstStyle/>
+          <a:p>
             <a:pPr algn="l">
               <a:defRPr sz="1800" b="0">
                 <a:solidFill>
@@ -6497,38 +6249,38 @@
       </p:sp>
       <p:sp>
         <p:nvSpPr>
-          <p:cNvPr id="14" name="">
-            <a:extLst xmlns:a="http://schemas.openxmlformats.org/drawingml/2006/main">
+          <p:cNvPr id="14" name="Rectangle 13">
+            <a:extLst>
               <a:ext uri="{FF2B5EF4-FFF2-40B4-BE49-F238E27FC236}">
                 <a16:creationId xmlns:a16="http://schemas.microsoft.com/office/drawing/2014/main" id="{E005643A-F9DE-4EAB-B036-6385C7817A94}"/>
               </a:ext>
             </a:extLst>
           </p:cNvPr>
           <p:cNvSpPr>
-            <a:spLocks xmlns:a="http://schemas.openxmlformats.org/drawingml/2006/main" noGrp="1"/>
-          </p:cNvSpPr>
-          <p:nvPr/>
-        </p:nvSpPr>
-        <p:spPr>
-          <a:xfrm xmlns:a="http://schemas.openxmlformats.org/drawingml/2006/main">
+            <a:spLocks noGrp="1"/>
+          </p:cNvSpPr>
+          <p:nvPr/>
+        </p:nvSpPr>
+        <p:spPr>
+          <a:xfrm>
             <a:off x="419100" y="6419850"/>
             <a:ext cx="3429000" cy="209550"/>
           </a:xfrm>
-          <a:prstGeom xmlns:a="http://schemas.openxmlformats.org/drawingml/2006/main" prst="rect">
-            <a:avLst/>
-          </a:prstGeom>
-          <a:noFill xmlns:a="http://schemas.openxmlformats.org/drawingml/2006/main"/>
-          <a:ln xmlns:a="http://schemas.openxmlformats.org/drawingml/2006/main" w="0">
-            <a:noFill/>
-            <a:prstDash val="solid"/>
-          </a:ln>
-        </p:spPr>
-        <p:txBody>
-          <a:bodyPr xmlns:a="http://schemas.openxmlformats.org/drawingml/2006/main" anchor="t">
+          <a:prstGeom prst="rect">
+            <a:avLst/>
+          </a:prstGeom>
+          <a:noFill/>
+          <a:ln w="0">
+            <a:noFill/>
+            <a:prstDash val="solid"/>
+          </a:ln>
+        </p:spPr>
+        <p:txBody>
+          <a:bodyPr anchor="t">
             <a:normAutofit fontScale="86111"/>
           </a:bodyPr>
-          <a:lstStyle xmlns:a="http://schemas.openxmlformats.org/drawingml/2006/main"/>
-          <a:p xmlns:a="http://schemas.openxmlformats.org/drawingml/2006/main">
+          <a:lstStyle/>
+          <a:p>
             <a:pPr algn="l">
               <a:defRPr sz="900" b="0">
                 <a:solidFill>
@@ -6555,38 +6307,38 @@
       </p:sp>
       <p:sp>
         <p:nvSpPr>
-          <p:cNvPr id="15" name="">
-            <a:extLst xmlns:a="http://schemas.openxmlformats.org/drawingml/2006/main">
+          <p:cNvPr id="15" name="Rectangle 14">
+            <a:extLst>
               <a:ext uri="{FF2B5EF4-FFF2-40B4-BE49-F238E27FC236}">
                 <a16:creationId xmlns:a16="http://schemas.microsoft.com/office/drawing/2014/main" id="{D4B7ED4B-B29F-437C-9DA9-33AC3A5E119A}"/>
               </a:ext>
             </a:extLst>
           </p:cNvPr>
           <p:cNvSpPr>
-            <a:spLocks xmlns:a="http://schemas.openxmlformats.org/drawingml/2006/main" noGrp="1"/>
-          </p:cNvSpPr>
-          <p:nvPr/>
-        </p:nvSpPr>
-        <p:spPr>
-          <a:xfrm xmlns:a="http://schemas.openxmlformats.org/drawingml/2006/main">
+            <a:spLocks noGrp="1"/>
+          </p:cNvSpPr>
+          <p:nvPr/>
+        </p:nvSpPr>
+        <p:spPr>
+          <a:xfrm>
             <a:off x="11239500" y="6419850"/>
             <a:ext cx="523875" cy="209550"/>
           </a:xfrm>
-          <a:prstGeom xmlns:a="http://schemas.openxmlformats.org/drawingml/2006/main" prst="rect">
-            <a:avLst/>
-          </a:prstGeom>
-          <a:noFill xmlns:a="http://schemas.openxmlformats.org/drawingml/2006/main"/>
-          <a:ln xmlns:a="http://schemas.openxmlformats.org/drawingml/2006/main" w="0">
-            <a:noFill/>
-            <a:prstDash val="solid"/>
-          </a:ln>
-        </p:spPr>
-        <p:txBody>
-          <a:bodyPr xmlns:a="http://schemas.openxmlformats.org/drawingml/2006/main" anchor="t">
+          <a:prstGeom prst="rect">
+            <a:avLst/>
+          </a:prstGeom>
+          <a:noFill/>
+          <a:ln w="0">
+            <a:noFill/>
+            <a:prstDash val="solid"/>
+          </a:ln>
+        </p:spPr>
+        <p:txBody>
+          <a:bodyPr anchor="t">
             <a:normAutofit fontScale="86111"/>
           </a:bodyPr>
-          <a:lstStyle xmlns:a="http://schemas.openxmlformats.org/drawingml/2006/main"/>
-          <a:p xmlns:a="http://schemas.openxmlformats.org/drawingml/2006/main">
+          <a:lstStyle/>
+          <a:p>
             <a:pPr algn="r">
               <a:defRPr sz="900" b="0">
                 <a:solidFill>
@@ -6618,6 +6370,9 @@
       </p:ext>
     </p:extLst>
   </p:cSld>
+  <p:clrMapOvr>
+    <a:masterClrMapping/>
+  </p:clrMapOvr>
 </p:sld>
 </file>
 
@@ -6863,5 +6618,254 @@
       </a:bgFillStyleLst>
     </a:fmtScheme>
   </a:themeElements>
+  <a:objectDefaults/>
+  <a:extraClrSchemeLst/>
+</a:theme>
+</file>
+
+<file path=ppt/theme/theme2.xml><?xml version="1.0" encoding="utf-8"?>
+<a:theme xmlns:a="http://schemas.openxmlformats.org/drawingml/2006/main" name="ChatGPT">
+  <a:themeElements>
+    <a:clrScheme name="ChatGPT">
+      <a:dk1>
+        <a:srgbClr val="000000"/>
+      </a:dk1>
+      <a:lt1>
+        <a:srgbClr val="FFFFFF"/>
+      </a:lt1>
+      <a:dk2>
+        <a:srgbClr val="0E2841"/>
+      </a:dk2>
+      <a:lt2>
+        <a:srgbClr val="E8E8E8"/>
+      </a:lt2>
+      <a:accent1>
+        <a:srgbClr val="156082"/>
+      </a:accent1>
+      <a:accent2>
+        <a:srgbClr val="E97132"/>
+      </a:accent2>
+      <a:accent3>
+        <a:srgbClr val="196B24"/>
+      </a:accent3>
+      <a:accent4>
+        <a:srgbClr val="0F9ED5"/>
+      </a:accent4>
+      <a:accent5>
+        <a:srgbClr val="A02B93"/>
+      </a:accent5>
+      <a:accent6>
+        <a:srgbClr val="4EA72E"/>
+      </a:accent6>
+      <a:hlink>
+        <a:srgbClr val="467886"/>
+      </a:hlink>
+      <a:folHlink>
+        <a:srgbClr val="96607D"/>
+      </a:folHlink>
+    </a:clrScheme>
+    <a:fontScheme name="Office">
+      <a:majorFont>
+        <a:latin typeface="Calibri Light"/>
+        <a:ea typeface="Calibri Light"/>
+        <a:cs typeface="Calibri Light"/>
+      </a:majorFont>
+      <a:minorFont>
+        <a:latin typeface="Calibri"/>
+        <a:ea typeface="Calibri"/>
+        <a:cs typeface="Calibri"/>
+      </a:minorFont>
+    </a:fontScheme>
+    <a:fmtScheme name="ChatGPT">
+      <a:fillStyleLst>
+        <a:solidFill>
+          <a:schemeClr val="phClr"/>
+        </a:solidFill>
+        <a:gradFill>
+          <a:gsLst>
+            <a:gs pos="0">
+              <a:schemeClr val="phClr">
+                <a:tint val="67000"/>
+                <a:lumMod val="110000"/>
+                <a:satMod val="105000"/>
+              </a:schemeClr>
+            </a:gs>
+            <a:gs pos="50000">
+              <a:schemeClr val="phClr">
+                <a:tint val="73000"/>
+                <a:lumMod val="105000"/>
+                <a:satMod val="103000"/>
+              </a:schemeClr>
+            </a:gs>
+            <a:gs pos="100000">
+              <a:schemeClr val="phClr">
+                <a:tint val="81000"/>
+                <a:lumMod val="105000"/>
+                <a:satMod val="109000"/>
+              </a:schemeClr>
+            </a:gs>
+          </a:gsLst>
+          <a:lin ang="5400000" scaled="0"/>
+        </a:gradFill>
+        <a:gradFill>
+          <a:gsLst>
+            <a:gs pos="0">
+              <a:schemeClr val="phClr">
+                <a:tint val="94000"/>
+                <a:lumMod val="102000"/>
+                <a:satMod val="103000"/>
+              </a:schemeClr>
+            </a:gs>
+            <a:gs pos="50000">
+              <a:schemeClr val="phClr">
+                <a:shade val="100000"/>
+                <a:lumMod val="100000"/>
+                <a:satMod val="110000"/>
+              </a:schemeClr>
+            </a:gs>
+            <a:gs pos="100000">
+              <a:schemeClr val="phClr">
+                <a:shade val="78000"/>
+                <a:lumMod val="99000"/>
+                <a:satMod val="120000"/>
+              </a:schemeClr>
+            </a:gs>
+          </a:gsLst>
+          <a:lin ang="5400000" scaled="0"/>
+        </a:gradFill>
+      </a:fillStyleLst>
+      <a:lnStyleLst>
+        <a:ln w="12700">
+          <a:solidFill>
+            <a:schemeClr val="phClr"/>
+          </a:solidFill>
+          <a:prstDash val="solid"/>
+        </a:ln>
+        <a:ln w="19050">
+          <a:solidFill>
+            <a:schemeClr val="phClr"/>
+          </a:solidFill>
+          <a:prstDash val="solid"/>
+        </a:ln>
+        <a:ln w="25400">
+          <a:solidFill>
+            <a:schemeClr val="phClr"/>
+          </a:solidFill>
+          <a:prstDash val="solid"/>
+        </a:ln>
+      </a:lnStyleLst>
+      <a:effectStyleLst>
+        <a:effectStyle>
+          <a:effectLst/>
+        </a:effectStyle>
+        <a:effectStyle>
+          <a:effectLst/>
+        </a:effectStyle>
+        <a:effectStyle>
+          <a:effectLst>
+            <a:outerShdw blurRad="57150" dist="19050" dir="5400000">
+              <a:srgbClr val="000000">
+                <a:alpha val="16000"/>
+              </a:srgbClr>
+            </a:outerShdw>
+          </a:effectLst>
+        </a:effectStyle>
+        <a:effectStyle>
+          <a:effectLst>
+            <a:outerShdw blurRad="19050" dist="9525" dir="5400000">
+              <a:srgbClr val="000000">
+                <a:alpha val="6000"/>
+              </a:srgbClr>
+            </a:outerShdw>
+          </a:effectLst>
+        </a:effectStyle>
+        <a:effectStyle>
+          <a:effectLst>
+            <a:outerShdw blurRad="28575" dist="9525" dir="5400000">
+              <a:srgbClr val="000000">
+                <a:alpha val="8000"/>
+              </a:srgbClr>
+            </a:outerShdw>
+          </a:effectLst>
+        </a:effectStyle>
+        <a:effectStyle>
+          <a:effectLst>
+            <a:outerShdw blurRad="57150" dist="19050" dir="5400000">
+              <a:srgbClr val="000000">
+                <a:alpha val="10000"/>
+              </a:srgbClr>
+            </a:outerShdw>
+          </a:effectLst>
+        </a:effectStyle>
+        <a:effectStyle>
+          <a:effectLst>
+            <a:outerShdw blurRad="114300" dist="38100" dir="5400000">
+              <a:srgbClr val="000000">
+                <a:alpha val="12000"/>
+              </a:srgbClr>
+            </a:outerShdw>
+          </a:effectLst>
+        </a:effectStyle>
+        <a:effectStyle>
+          <a:effectLst>
+            <a:outerShdw blurRad="171450" dist="57150" dir="5400000">
+              <a:srgbClr val="000000">
+                <a:alpha val="16000"/>
+              </a:srgbClr>
+            </a:outerShdw>
+          </a:effectLst>
+        </a:effectStyle>
+        <a:effectStyle>
+          <a:effectLst>
+            <a:outerShdw blurRad="266700" dist="95250" dir="5400000">
+              <a:srgbClr val="000000">
+                <a:alpha val="24000"/>
+              </a:srgbClr>
+            </a:outerShdw>
+          </a:effectLst>
+        </a:effectStyle>
+      </a:effectStyleLst>
+      <a:bgFillStyleLst>
+        <a:solidFill>
+          <a:schemeClr val="phClr"/>
+        </a:solidFill>
+        <a:solidFill>
+          <a:schemeClr val="phClr">
+            <a:tint val="95000"/>
+            <a:satMod val="170000"/>
+          </a:schemeClr>
+        </a:solidFill>
+        <a:gradFill>
+          <a:gsLst>
+            <a:gs pos="0">
+              <a:schemeClr val="phClr">
+                <a:tint val="93000"/>
+                <a:shade val="98000"/>
+                <a:lumMod val="102000"/>
+                <a:satMod val="150000"/>
+              </a:schemeClr>
+            </a:gs>
+            <a:gs pos="50000">
+              <a:schemeClr val="phClr">
+                <a:tint val="98000"/>
+                <a:shade val="90000"/>
+                <a:lumMod val="103000"/>
+                <a:satMod val="130000"/>
+              </a:schemeClr>
+            </a:gs>
+            <a:gs pos="100000">
+              <a:schemeClr val="phClr">
+                <a:shade val="63000"/>
+                <a:satMod val="120000"/>
+              </a:schemeClr>
+            </a:gs>
+          </a:gsLst>
+          <a:lin ang="5400000" scaled="0"/>
+        </a:gradFill>
+      </a:bgFillStyleLst>
+    </a:fmtScheme>
+  </a:themeElements>
+  <a:objectDefaults/>
+  <a:extraClrSchemeLst/>
 </a:theme>
 </file>